--- a/docs/bindplane-primer/bindplane-primer.pptx
+++ b/docs/bindplane-primer/bindplane-primer.pptx
@@ -6234,7 +6234,7 @@
                 <a:ea typeface="Segoe UI" pitchFamily="34" charset="-122"/>
                 <a:cs typeface="Segoe UI" pitchFamily="34" charset="-120"/>
               </a:rPr>
-              <a:t>Our setup has two destinations — and understanding why reveals a key architectural decision.</a:t>
+              <a:t>Our setup has two destinations - and understanding why reveals a key architectural decision.</a:t>
             </a:r>
             <a:endParaRPr lang="en-US" sz="2000" dirty="0"/>
           </a:p>
@@ -7118,7 +7118,7 @@
                 <a:ea typeface="Segoe UI" pitchFamily="34" charset="-122"/>
                 <a:cs typeface="Segoe UI" pitchFamily="34" charset="-120"/>
               </a:rPr>
-              <a:t>API token on every node — more secrets to manage</a:t>
+              <a:t>API token on every node - more secrets to manage</a:t>
             </a:r>
             <a:endParaRPr lang="en-US" sz="2200" dirty="0"/>
           </a:p>
@@ -7475,7 +7475,7 @@
                 <a:ea typeface="Segoe UI" pitchFamily="34" charset="-122"/>
                 <a:cs typeface="Segoe UI" pitchFamily="34" charset="-120"/>
               </a:rPr>
-              <a:t>It is the unit of deployment — the thing you </a:t>
+              <a:t>It is the unit of deployment - the thing you </a:t>
             </a:r>
             <a:pPr indent="0" marL="0">
               <a:buNone/>
@@ -7948,7 +7948,7 @@
                 <a:ea typeface="Segoe UI" pitchFamily="34" charset="-122"/>
                 <a:cs typeface="Segoe UI" pitchFamily="34" charset="-120"/>
               </a:rPr>
-              <a:t> A fleet gives you a named group you can monitor — agent count, combined throughput, version distribution, health status.</a:t>
+              <a:t> A fleet gives you a named group you can monitor - agent count, combined throughput, version distribution, health status.</a:t>
             </a:r>
             <a:endParaRPr lang="en-US" sz="2000" dirty="0"/>
           </a:p>
@@ -11764,7 +11764,7 @@
                 <a:ea typeface="Segoe UI" pitchFamily="34" charset="-122"/>
                 <a:cs typeface="Segoe UI" pitchFamily="34" charset="-120"/>
               </a:rPr>
-              <a:t>Exports to Dynatrace — the only agent with external credentials</a:t>
+              <a:t>Exports to Dynatrace - the only agent with external credentials</a:t>
             </a:r>
             <a:endParaRPr lang="en-US" sz="2200" dirty="0"/>
           </a:p>
@@ -12075,7 +12075,7 @@
                 <a:ea typeface="Segoe UI" pitchFamily="34" charset="-122"/>
                 <a:cs typeface="Segoe UI" pitchFamily="34" charset="-120"/>
               </a:rPr>
-              <a:t> — one pod per node. Collects what the gateway can't see.</a:t>
+              <a:t> - one pod per node. Collects what the gateway can't see.</a:t>
             </a:r>
             <a:endParaRPr lang="en-US" sz="2000" dirty="0"/>
           </a:p>
@@ -12331,7 +12331,7 @@
                           <a:ea typeface="Segoe UI" pitchFamily="34" charset="-122"/>
                           <a:cs typeface="Segoe UI" pitchFamily="34" charset="-120"/>
                         </a:rPr>
-                        <a:t>One per node — access to host filesystem</a:t>
+                        <a:t>One per node - access to host filesystem</a:t>
                       </a:r>
                       <a:endParaRPr lang="en-US" sz="1200" dirty="0">
                         <a:latin typeface="Segoe UI" charset="0"/>
@@ -13096,7 +13096,7 @@
                 <a:ea typeface="Segoe UI" pitchFamily="34" charset="-122"/>
                 <a:cs typeface="Segoe UI" pitchFamily="34" charset="-120"/>
               </a:rPr>
-              <a:t> — not per-node. A DaemonSet would collect the same events on every node.</a:t>
+              <a:t> - not per-node. A DaemonSet would collect the same events on every node.</a:t>
             </a:r>
             <a:endParaRPr lang="en-US" sz="2000" dirty="0"/>
           </a:p>
@@ -19228,7 +19228,7 @@
                 <a:ea typeface="Segoe UI" pitchFamily="34" charset="-122"/>
                 <a:cs typeface="Segoe UI" pitchFamily="34" charset="-120"/>
               </a:rPr>
-              <a:t>BindPlane delivers configs via OpAMP — agents handle the rest</a:t>
+              <a:t>BindPlane delivers configs via OpAMP - agents handle the rest</a:t>
             </a:r>
             <a:endParaRPr lang="en-US" sz="2200" dirty="0"/>
           </a:p>
@@ -20051,7 +20051,7 @@
                           <a:ea typeface="Segoe UI" pitchFamily="34" charset="-122"/>
                           <a:cs typeface="Segoe UI" pitchFamily="34" charset="-120"/>
                         </a:rPr>
-                        <a:t>Cloud OpAMP — one WebSocket URL, agents connect out</a:t>
+                        <a:t>Cloud OpAMP - one WebSocket URL, agents connect out</a:t>
                       </a:r>
                       <a:endParaRPr lang="en-US" sz="1200" dirty="0">
                         <a:latin typeface="Segoe UI" charset="0"/>
@@ -21696,7 +21696,7 @@
                 <a:ea typeface="Segoe UI" pitchFamily="34" charset="-122"/>
                 <a:cs typeface="Segoe UI" pitchFamily="34" charset="-120"/>
               </a:rPr>
-              <a:t> (Open Agent Management Protocol) — an open standard.</a:t>
+              <a:t> (Open Agent Management Protocol) - an open standard.</a:t>
             </a:r>
             <a:endParaRPr lang="en-US" sz="2000" dirty="0"/>
           </a:p>
@@ -21781,7 +21781,7 @@
                 <a:ea typeface="Segoe UI" pitchFamily="34" charset="-122"/>
                 <a:cs typeface="Segoe UI" pitchFamily="34" charset="-120"/>
               </a:rPr>
-              <a:t>Works through firewalls — no inbound ports needed</a:t>
+              <a:t>Works through firewalls - no inbound ports needed</a:t>
             </a:r>
             <a:endParaRPr lang="en-US" sz="2200" dirty="0"/>
           </a:p>

--- a/docs/bindplane-primer/bindplane-primer.pptx
+++ b/docs/bindplane-primer/bindplane-primer.pptx
@@ -14606,7 +14606,7 @@
                 <a:ea typeface="Inter" pitchFamily="34" charset="-122"/>
                 <a:cs typeface="Inter" pitchFamily="34" charset="-120"/>
               </a:rPr>
-              <a:t>Exports to Dynatrace - the only agent with external credentials</a:t>
+              <a:t>Exports to Dynatrace, the only agent with external credentials</a:t>
             </a:r>
             <a:endParaRPr lang="en-US" sz="2200" dirty="0"/>
           </a:p>
@@ -15127,7 +15127,7 @@
                 <a:ea typeface="Inter" pitchFamily="34" charset="-122"/>
                 <a:cs typeface="Inter" pitchFamily="34" charset="-120"/>
               </a:rPr>
-              <a:t> - one pod per node. Collects what the gateway can't see.</a:t>
+              <a:t>, one pod per node. Collects what the gateway can't see.</a:t>
             </a:r>
             <a:endParaRPr lang="en-US" sz="2000" dirty="0"/>
           </a:p>
@@ -24685,7 +24685,7 @@
                           <a:ea typeface="Inter" pitchFamily="34" charset="-122"/>
                           <a:cs typeface="Inter" pitchFamily="34" charset="-120"/>
                         </a:rPr>
-                        <a:t>Cloud OpAMP - one URL, agents connect out</a:t>
+                        <a:t>Cloud OpAMP: one URL, agents connect out</a:t>
                       </a:r>
                       <a:endParaRPr lang="en-US" sz="1200" dirty="0">
                         <a:latin typeface="Inter" charset="0"/>

--- a/docs/bindplane-primer/bindplane-primer.pptx
+++ b/docs/bindplane-primer/bindplane-primer.pptx
@@ -62,10 +62,9 @@
     <p:sldId id="310" r:id="rId56"/>
     <p:sldId id="311" r:id="rId57"/>
     <p:sldId id="312" r:id="rId58"/>
-    <p:sldId id="313" r:id="rId59"/>
   </p:sldIdLst>
   <p:notesMasterIdLst>
-    <p:notesMasterId r:id="rId60"/>
+    <p:notesMasterId r:id="rId59"/>
   </p:notesMasterIdLst>
   <p:sldSz cx="9144000" cy="5143500"/>
   <p:notesSz cx="5143500" cy="9144000"/>
@@ -5159,94 +5158,6 @@
             <a:fld id="{F7021451-1387-4CA6-816F-3879F97B5CBC}" type="slidenum">
               <a:rPr lang="en-US"/>
               <a:t>57</a:t>
-            </a:fld>
-            <a:endParaRPr lang="en-US"/>
-          </a:p>
-        </p:txBody>
-      </p:sp>
-    </p:spTree>
-    <p:extLst>
-      <p:ext uri="{BB962C8B-B14F-4D97-AF65-F5344CB8AC3E}">
-        <p14:creationId xmlns:p14="http://schemas.microsoft.com/office/powerpoint/2010/main" val="1024086991"/>
-      </p:ext>
-    </p:extLst>
-  </p:cSld>
-  <p:clrMapOvr>
-    <a:masterClrMapping/>
-  </p:clrMapOvr>
-</p:notes>
-</file>
-
-<file path=ppt/notesSlides/notesSlide58.xml><?xml version="1.0" encoding="utf-8"?>
-<p:notes xmlns:a="http://schemas.openxmlformats.org/drawingml/2006/main" xmlns:r="http://schemas.openxmlformats.org/officeDocument/2006/relationships" xmlns:p="http://schemas.openxmlformats.org/presentationml/2006/main">
-  <p:cSld>
-    <p:spTree>
-      <p:nvGrpSpPr>
-        <p:cNvPr id="1" name=""/>
-        <p:cNvGrpSpPr/>
-        <p:nvPr/>
-      </p:nvGrpSpPr>
-      <p:grpSpPr>
-        <a:xfrm>
-          <a:off x="0" y="0"/>
-          <a:ext cx="0" cy="0"/>
-          <a:chOff x="0" y="0"/>
-          <a:chExt cx="0" cy="0"/>
-        </a:xfrm>
-      </p:grpSpPr>
-      <p:sp>
-        <p:nvSpPr>
-          <p:cNvPr id="2" name="Slide Image Placeholder 1"/>
-          <p:cNvSpPr>
-            <a:spLocks noGrp="1" noRot="1" noChangeAspect="1"/>
-          </p:cNvSpPr>
-          <p:nvPr>
-            <p:ph type="sldImg"/>
-          </p:nvPr>
-        </p:nvSpPr>
-        <p:spPr/>
-      </p:sp>
-      <p:sp>
-        <p:nvSpPr>
-          <p:cNvPr id="3" name="Notes Placeholder 2"/>
-          <p:cNvSpPr>
-            <a:spLocks noGrp="1"/>
-          </p:cNvSpPr>
-          <p:nvPr>
-            <p:ph type="body" idx="1"/>
-          </p:nvPr>
-        </p:nvSpPr>
-        <p:spPr/>
-        <p:txBody>
-          <a:bodyPr/>
-          <a:lstStyle/>
-          <a:p>
-            <a:r>
-              <a:rPr lang="en-US" dirty="0"/>
-              <a:t/>
-            </a:r>
-            <a:endParaRPr lang="en-US" dirty="0"/>
-          </a:p>
-        </p:txBody>
-      </p:sp>
-      <p:sp>
-        <p:nvSpPr>
-          <p:cNvPr id="4" name="Slide Number Placeholder 3"/>
-          <p:cNvSpPr>
-            <a:spLocks noGrp="1"/>
-          </p:cNvSpPr>
-          <p:nvPr>
-            <p:ph type="sldNum" sz="quarter" idx="10"/>
-          </p:nvPr>
-        </p:nvSpPr>
-        <p:spPr/>
-        <p:txBody>
-          <a:bodyPr/>
-          <a:lstStyle/>
-          <a:p>
-            <a:fld id="{F7021451-1387-4CA6-816F-3879F97B5CBC}" type="slidenum">
-              <a:rPr lang="en-US"/>
-              <a:t>58</a:t>
             </a:fld>
             <a:endParaRPr lang="en-US"/>
           </a:p>
@@ -6695,98 +6606,6 @@
           </a:p>
         </p:txBody>
       </p:sp>
-      <p:sp>
-        <p:nvSpPr>
-          <p:cNvPr id="8" name="Text 6"/>
-          <p:cNvSpPr/>
-          <p:nvPr/>
-        </p:nvSpPr>
-        <p:spPr>
-          <a:xfrm>
-            <a:off x="457200" y="3785616"/>
-            <a:ext cx="8229600" cy="585216"/>
-          </a:xfrm>
-          <a:prstGeom prst="rect">
-            <a:avLst/>
-          </a:prstGeom>
-          <a:noFill/>
-          <a:ln/>
-        </p:spPr>
-        <p:txBody>
-          <a:bodyPr wrap="square" rtlCol="0" anchor="t"/>
-          <a:lstStyle/>
-          <a:p>
-            <a:pPr indent="0" marL="0">
-              <a:buNone/>
-            </a:pPr>
-            <a:r>
-              <a:rPr lang="en-US" sz="2000" b="1" dirty="0">
-                <a:solidFill>
-                  <a:srgbClr val="1496FF"/>
-                </a:solidFill>
-                <a:latin typeface="Inter" pitchFamily="34" charset="0"/>
-                <a:ea typeface="Inter" pitchFamily="34" charset="-122"/>
-                <a:cs typeface="Inter" pitchFamily="34" charset="-120"/>
-              </a:rPr>
-              <a:t>Step 4:</a:t>
-            </a:r>
-            <a:pPr indent="0" marL="0">
-              <a:buNone/>
-            </a:pPr>
-            <a:r>
-              <a:rPr lang="en-US" sz="2000" dirty="0">
-                <a:solidFill>
-                  <a:srgbClr val="FFFFFF"/>
-                </a:solidFill>
-                <a:latin typeface="Inter" pitchFamily="34" charset="0"/>
-                <a:ea typeface="Inter" pitchFamily="34" charset="-122"/>
-                <a:cs typeface="Inter" pitchFamily="34" charset="-120"/>
-              </a:rPr>
-              <a:t> Get your secret key (you'll need it later for agents)</a:t>
-            </a:r>
-            <a:endParaRPr lang="en-US" sz="2000" dirty="0"/>
-          </a:p>
-        </p:txBody>
-      </p:sp>
-      <p:sp>
-        <p:nvSpPr>
-          <p:cNvPr id="9" name="Text 7"/>
-          <p:cNvSpPr/>
-          <p:nvPr/>
-        </p:nvSpPr>
-        <p:spPr>
-          <a:xfrm>
-            <a:off x="457200" y="4553712"/>
-            <a:ext cx="8229600" cy="201168"/>
-          </a:xfrm>
-          <a:prstGeom prst="rect">
-            <a:avLst/>
-          </a:prstGeom>
-          <a:noFill/>
-          <a:ln/>
-        </p:spPr>
-        <p:txBody>
-          <a:bodyPr wrap="square" rtlCol="0" anchor="t"/>
-          <a:lstStyle/>
-          <a:p>
-            <a:pPr indent="0" marL="0">
-              <a:buNone/>
-            </a:pPr>
-            <a:r>
-              <a:rPr lang="en-US" sz="2000" dirty="0">
-                <a:solidFill>
-                  <a:srgbClr val="FFFFFF"/>
-                </a:solidFill>
-                <a:latin typeface="Inter" pitchFamily="34" charset="0"/>
-                <a:ea typeface="Inter" pitchFamily="34" charset="-122"/>
-                <a:cs typeface="Inter" pitchFamily="34" charset="-120"/>
-              </a:rPr>
-              <a:t>Save this value. Agents use it to authenticate with BindPlane.</a:t>
-            </a:r>
-            <a:endParaRPr lang="en-US" sz="2000" dirty="0"/>
-          </a:p>
-        </p:txBody>
-      </p:sp>
     </p:spTree>
   </p:cSld>
   <p:clrMapOvr>
@@ -7519,6 +7338,282 @@
                           <a:cs typeface="Inter" pitchFamily="34" charset="-120"/>
                         </a:rPr>
                         <a:t>Container logs from the node</a:t>
+                      </a:r>
+                      <a:endParaRPr lang="en-US" sz="1200" dirty="0">
+                        <a:latin typeface="Inter" charset="0"/>
+                        <a:ea typeface="Inter" charset="0"/>
+                        <a:cs typeface="Inter" charset="0"/>
+                      </a:endParaRPr>
+                    </a:p>
+                  </a:txBody>
+                  <a:tcPr marL="91440" marR="91440" marT="45720" marB="45720" anchor="ctr">
+                    <a:lnL w="0" cap="flat" cmpd="sng" algn="ctr">
+                      <a:solidFill>
+                        <a:srgbClr val="0B0F1A"/>
+                      </a:solidFill>
+                      <a:prstDash val="solid"/>
+                      <a:round/>
+                      <a:headEnd type="none" w="med" len="med"/>
+                      <a:tailEnd type="none" w="med" len="med"/>
+                    </a:lnL>
+                    <a:lnR w="0" cap="flat" cmpd="sng" algn="ctr">
+                      <a:solidFill>
+                        <a:srgbClr val="0B0F1A"/>
+                      </a:solidFill>
+                      <a:prstDash val="solid"/>
+                      <a:round/>
+                      <a:headEnd type="none" w="med" len="med"/>
+                      <a:tailEnd type="none" w="med" len="med"/>
+                    </a:lnR>
+                    <a:lnT w="0" cap="flat" cmpd="sng" algn="ctr">
+                      <a:solidFill>
+                        <a:srgbClr val="0B0F1A"/>
+                      </a:solidFill>
+                      <a:prstDash val="solid"/>
+                      <a:round/>
+                      <a:headEnd type="none" w="med" len="med"/>
+                      <a:tailEnd type="none" w="med" len="med"/>
+                    </a:lnT>
+                    <a:lnB w="6350" cap="flat" cmpd="sng" algn="ctr">
+                      <a:solidFill>
+                        <a:srgbClr val="1E2535"/>
+                      </a:solidFill>
+                      <a:prstDash val="solid"/>
+                      <a:round/>
+                      <a:headEnd type="none" w="med" len="med"/>
+                      <a:tailEnd type="none" w="med" len="med"/>
+                    </a:lnB>
+                    <a:solidFill>
+                      <a:srgbClr val="0B0F1A"/>
+                    </a:solidFill>
+                  </a:tcPr>
+                </a:tc>
+              </a:tr>
+              <a:tr h="292608">
+                <a:tc>
+                  <a:txBody>
+                    <a:bodyPr/>
+                    <a:lstStyle/>
+                    <a:p>
+                      <a:pPr indent="0" marL="0">
+                        <a:buNone/>
+                      </a:pPr>
+                      <a:r>
+                        <a:rPr lang="en-US" sz="1200" dirty="0">
+                          <a:solidFill>
+                            <a:srgbClr val="FFFFFF"/>
+                          </a:solidFill>
+                          <a:latin typeface="Inter" pitchFamily="34" charset="0"/>
+                          <a:ea typeface="Inter" pitchFamily="34" charset="-122"/>
+                          <a:cs typeface="Inter" pitchFamily="34" charset="-120"/>
+                        </a:rPr>
+                        <a:t>k8s_kubelet</a:t>
+                      </a:r>
+                      <a:endParaRPr lang="en-US" sz="1200" dirty="0">
+                        <a:latin typeface="Inter" charset="0"/>
+                        <a:ea typeface="Inter" charset="0"/>
+                        <a:cs typeface="Inter" charset="0"/>
+                      </a:endParaRPr>
+                    </a:p>
+                  </a:txBody>
+                  <a:tcPr marL="91440" marR="91440" marT="45720" marB="45720" anchor="ctr">
+                    <a:lnL w="0" cap="flat" cmpd="sng" algn="ctr">
+                      <a:solidFill>
+                        <a:srgbClr val="0B0F1A"/>
+                      </a:solidFill>
+                      <a:prstDash val="solid"/>
+                      <a:round/>
+                      <a:headEnd type="none" w="med" len="med"/>
+                      <a:tailEnd type="none" w="med" len="med"/>
+                    </a:lnL>
+                    <a:lnR w="0" cap="flat" cmpd="sng" algn="ctr">
+                      <a:solidFill>
+                        <a:srgbClr val="0B0F1A"/>
+                      </a:solidFill>
+                      <a:prstDash val="solid"/>
+                      <a:round/>
+                      <a:headEnd type="none" w="med" len="med"/>
+                      <a:tailEnd type="none" w="med" len="med"/>
+                    </a:lnR>
+                    <a:lnT w="0" cap="flat" cmpd="sng" algn="ctr">
+                      <a:solidFill>
+                        <a:srgbClr val="0B0F1A"/>
+                      </a:solidFill>
+                      <a:prstDash val="solid"/>
+                      <a:round/>
+                      <a:headEnd type="none" w="med" len="med"/>
+                      <a:tailEnd type="none" w="med" len="med"/>
+                    </a:lnT>
+                    <a:lnB w="6350" cap="flat" cmpd="sng" algn="ctr">
+                      <a:solidFill>
+                        <a:srgbClr val="1E2535"/>
+                      </a:solidFill>
+                      <a:prstDash val="solid"/>
+                      <a:round/>
+                      <a:headEnd type="none" w="med" len="med"/>
+                      <a:tailEnd type="none" w="med" len="med"/>
+                    </a:lnB>
+                    <a:solidFill>
+                      <a:srgbClr val="0B0F1A"/>
+                    </a:solidFill>
+                  </a:tcPr>
+                </a:tc>
+                <a:tc>
+                  <a:txBody>
+                    <a:bodyPr/>
+                    <a:lstStyle/>
+                    <a:p>
+                      <a:pPr indent="0" marL="0">
+                        <a:buNone/>
+                      </a:pPr>
+                      <a:r>
+                        <a:rPr lang="en-US" sz="1200" dirty="0">
+                          <a:solidFill>
+                            <a:srgbClr val="FFFFFF"/>
+                          </a:solidFill>
+                          <a:latin typeface="Inter" pitchFamily="34" charset="0"/>
+                          <a:ea typeface="Inter" pitchFamily="34" charset="-122"/>
+                          <a:cs typeface="Inter" pitchFamily="34" charset="-120"/>
+                        </a:rPr>
+                        <a:t>Pod CPU, memory (kubelet-level)</a:t>
+                      </a:r>
+                      <a:endParaRPr lang="en-US" sz="1200" dirty="0">
+                        <a:latin typeface="Inter" charset="0"/>
+                        <a:ea typeface="Inter" charset="0"/>
+                        <a:cs typeface="Inter" charset="0"/>
+                      </a:endParaRPr>
+                    </a:p>
+                  </a:txBody>
+                  <a:tcPr marL="91440" marR="91440" marT="45720" marB="45720" anchor="ctr">
+                    <a:lnL w="0" cap="flat" cmpd="sng" algn="ctr">
+                      <a:solidFill>
+                        <a:srgbClr val="0B0F1A"/>
+                      </a:solidFill>
+                      <a:prstDash val="solid"/>
+                      <a:round/>
+                      <a:headEnd type="none" w="med" len="med"/>
+                      <a:tailEnd type="none" w="med" len="med"/>
+                    </a:lnL>
+                    <a:lnR w="0" cap="flat" cmpd="sng" algn="ctr">
+                      <a:solidFill>
+                        <a:srgbClr val="0B0F1A"/>
+                      </a:solidFill>
+                      <a:prstDash val="solid"/>
+                      <a:round/>
+                      <a:headEnd type="none" w="med" len="med"/>
+                      <a:tailEnd type="none" w="med" len="med"/>
+                    </a:lnR>
+                    <a:lnT w="0" cap="flat" cmpd="sng" algn="ctr">
+                      <a:solidFill>
+                        <a:srgbClr val="0B0F1A"/>
+                      </a:solidFill>
+                      <a:prstDash val="solid"/>
+                      <a:round/>
+                      <a:headEnd type="none" w="med" len="med"/>
+                      <a:tailEnd type="none" w="med" len="med"/>
+                    </a:lnT>
+                    <a:lnB w="6350" cap="flat" cmpd="sng" algn="ctr">
+                      <a:solidFill>
+                        <a:srgbClr val="1E2535"/>
+                      </a:solidFill>
+                      <a:prstDash val="solid"/>
+                      <a:round/>
+                      <a:headEnd type="none" w="med" len="med"/>
+                      <a:tailEnd type="none" w="med" len="med"/>
+                    </a:lnB>
+                    <a:solidFill>
+                      <a:srgbClr val="0B0F1A"/>
+                    </a:solidFill>
+                  </a:tcPr>
+                </a:tc>
+              </a:tr>
+              <a:tr h="292608">
+                <a:tc>
+                  <a:txBody>
+                    <a:bodyPr/>
+                    <a:lstStyle/>
+                    <a:p>
+                      <a:pPr indent="0" marL="0">
+                        <a:buNone/>
+                      </a:pPr>
+                      <a:r>
+                        <a:rPr lang="en-US" sz="1200" dirty="0">
+                          <a:solidFill>
+                            <a:srgbClr val="FFFFFF"/>
+                          </a:solidFill>
+                          <a:latin typeface="Inter" pitchFamily="34" charset="0"/>
+                          <a:ea typeface="Inter" pitchFamily="34" charset="-122"/>
+                          <a:cs typeface="Inter" pitchFamily="34" charset="-120"/>
+                        </a:rPr>
+                        <a:t>k8s_cluster</a:t>
+                      </a:r>
+                      <a:endParaRPr lang="en-US" sz="1200" dirty="0">
+                        <a:latin typeface="Inter" charset="0"/>
+                        <a:ea typeface="Inter" charset="0"/>
+                        <a:cs typeface="Inter" charset="0"/>
+                      </a:endParaRPr>
+                    </a:p>
+                  </a:txBody>
+                  <a:tcPr marL="91440" marR="91440" marT="45720" marB="45720" anchor="ctr">
+                    <a:lnL w="0" cap="flat" cmpd="sng" algn="ctr">
+                      <a:solidFill>
+                        <a:srgbClr val="0B0F1A"/>
+                      </a:solidFill>
+                      <a:prstDash val="solid"/>
+                      <a:round/>
+                      <a:headEnd type="none" w="med" len="med"/>
+                      <a:tailEnd type="none" w="med" len="med"/>
+                    </a:lnL>
+                    <a:lnR w="0" cap="flat" cmpd="sng" algn="ctr">
+                      <a:solidFill>
+                        <a:srgbClr val="0B0F1A"/>
+                      </a:solidFill>
+                      <a:prstDash val="solid"/>
+                      <a:round/>
+                      <a:headEnd type="none" w="med" len="med"/>
+                      <a:tailEnd type="none" w="med" len="med"/>
+                    </a:lnR>
+                    <a:lnT w="0" cap="flat" cmpd="sng" algn="ctr">
+                      <a:solidFill>
+                        <a:srgbClr val="0B0F1A"/>
+                      </a:solidFill>
+                      <a:prstDash val="solid"/>
+                      <a:round/>
+                      <a:headEnd type="none" w="med" len="med"/>
+                      <a:tailEnd type="none" w="med" len="med"/>
+                    </a:lnT>
+                    <a:lnB w="6350" cap="flat" cmpd="sng" algn="ctr">
+                      <a:solidFill>
+                        <a:srgbClr val="1E2535"/>
+                      </a:solidFill>
+                      <a:prstDash val="solid"/>
+                      <a:round/>
+                      <a:headEnd type="none" w="med" len="med"/>
+                      <a:tailEnd type="none" w="med" len="med"/>
+                    </a:lnB>
+                    <a:solidFill>
+                      <a:srgbClr val="0B0F1A"/>
+                    </a:solidFill>
+                  </a:tcPr>
+                </a:tc>
+                <a:tc>
+                  <a:txBody>
+                    <a:bodyPr/>
+                    <a:lstStyle/>
+                    <a:p>
+                      <a:pPr indent="0" marL="0">
+                        <a:buNone/>
+                      </a:pPr>
+                      <a:r>
+                        <a:rPr lang="en-US" sz="1200" dirty="0">
+                          <a:solidFill>
+                            <a:srgbClr val="FFFFFF"/>
+                          </a:solidFill>
+                          <a:latin typeface="Inter" pitchFamily="34" charset="0"/>
+                          <a:ea typeface="Inter" pitchFamily="34" charset="-122"/>
+                          <a:cs typeface="Inter" pitchFamily="34" charset="-120"/>
+                        </a:rPr>
+                        <a:t>Cluster-wide metrics</a:t>
                       </a:r>
                       <a:endParaRPr lang="en-US" sz="1200" dirty="0">
                         <a:latin typeface="Inter" charset="0"/>
@@ -14642,7 +14737,7 @@
         <p:spPr>
           <a:xfrm>
             <a:off x="457200" y="3602736"/>
-            <a:ext cx="8229600" cy="1152144"/>
+            <a:ext cx="8229600" cy="877824"/>
           </a:xfrm>
           <a:prstGeom prst="rect">
             <a:avLst/>
@@ -14666,7 +14761,7 @@
                 <a:ea typeface="Inter" pitchFamily="34" charset="-122"/>
                 <a:cs typeface="Inter" pitchFamily="34" charset="-120"/>
               </a:rPr>
-              <a:t>The manifest includes RBAC, a Service (ports 4317/4318), and an init container that writes a bootstrap config so the agent can start before BindPlane sends the real pipeline.</a:t>
+              <a:t>The manifest includes RBAC and a Service on ports 4317/4318. The agent starts with a bootstrap config, then BindPlane delivers the real pipeline via OpAMP.</a:t>
             </a:r>
             <a:endParaRPr lang="en-US" sz="2000" dirty="0"/>
           </a:p>
@@ -16822,7 +16917,7 @@
                 <a:ea typeface="Inter" pitchFamily="34" charset="-122"/>
                 <a:cs typeface="Inter" pitchFamily="34" charset="-120"/>
               </a:rPr>
-              <a:t>The agents run in their own namespace and need the secret key from Lab 1:</a:t>
+              <a:t>Get the secret key agents use to authenticate with BindPlane:</a:t>
             </a:r>
             <a:endParaRPr lang="en-US" sz="2000" dirty="0"/>
           </a:p>
@@ -16837,7 +16932,7 @@
         <p:spPr>
           <a:xfrm>
             <a:off x="457200" y="2231136"/>
-            <a:ext cx="8229600" cy="1325880"/>
+            <a:ext cx="8229600" cy="868680"/>
           </a:xfrm>
           <a:prstGeom prst="rect">
             <a:avLst/>
@@ -16863,7 +16958,7 @@
                 <a:ea typeface="JetBrains Mono" pitchFamily="34" charset="-122"/>
                 <a:cs typeface="JetBrains Mono" pitchFamily="34" charset="-120"/>
               </a:rPr>
-              <a:t>kubectl create namespace bindplane-agent</a:t>
+              <a:t>$ bindplane secret get</a:t>
             </a:r>
             <a:endParaRPr lang="en-US" sz="1100" dirty="0"/>
           </a:p>
@@ -16886,10 +16981,73 @@
                 <a:ea typeface="JetBrains Mono" pitchFamily="34" charset="-122"/>
                 <a:cs typeface="JetBrains Mono" pitchFamily="34" charset="-120"/>
               </a:rPr>
-              <a:t>kubectl -n bindplane-agent create secret generic \</a:t>
+              <a:t>01KPAT6TVX0Z2TP8H1ZWN47EZE (default)</a:t>
             </a:r>
             <a:endParaRPr lang="en-US" sz="1100" dirty="0"/>
           </a:p>
+        </p:txBody>
+      </p:sp>
+      <p:sp>
+        <p:nvSpPr>
+          <p:cNvPr id="7" name="Text 5"/>
+          <p:cNvSpPr/>
+          <p:nvPr/>
+        </p:nvSpPr>
+        <p:spPr>
+          <a:xfrm>
+            <a:off x="457200" y="3236976"/>
+            <a:ext cx="8229600" cy="585216"/>
+          </a:xfrm>
+          <a:prstGeom prst="rect">
+            <a:avLst/>
+          </a:prstGeom>
+          <a:noFill/>
+          <a:ln/>
+        </p:spPr>
+        <p:txBody>
+          <a:bodyPr wrap="square" rtlCol="0" anchor="t"/>
+          <a:lstStyle/>
+          <a:p>
+            <a:pPr indent="0" marL="0">
+              <a:buNone/>
+            </a:pPr>
+            <a:r>
+              <a:rPr lang="en-US" sz="2000" dirty="0">
+                <a:solidFill>
+                  <a:srgbClr val="FFFFFF"/>
+                </a:solidFill>
+                <a:latin typeface="Inter" pitchFamily="34" charset="0"/>
+                <a:ea typeface="Inter" pitchFamily="34" charset="-122"/>
+                <a:cs typeface="Inter" pitchFamily="34" charset="-120"/>
+              </a:rPr>
+              <a:t>Create a namespace and store the key as a Kubernetes secret:</a:t>
+            </a:r>
+            <a:endParaRPr lang="en-US" sz="2000" dirty="0"/>
+          </a:p>
+        </p:txBody>
+      </p:sp>
+      <p:sp>
+        <p:nvSpPr>
+          <p:cNvPr id="8" name="Text 6"/>
+          <p:cNvSpPr/>
+          <p:nvPr/>
+        </p:nvSpPr>
+        <p:spPr>
+          <a:xfrm>
+            <a:off x="457200" y="4005072"/>
+            <a:ext cx="8229600" cy="749808"/>
+          </a:xfrm>
+          <a:prstGeom prst="rect">
+            <a:avLst/>
+          </a:prstGeom>
+          <a:solidFill>
+            <a:srgbClr val="141827"/>
+          </a:solidFill>
+          <a:ln/>
+        </p:spPr>
+        <p:txBody>
+          <a:bodyPr wrap="square" rtlCol="0" anchor="t"/>
+          <a:lstStyle/>
           <a:p>
             <a:pPr indent="0" marL="0">
               <a:buNone/>
@@ -16903,8 +17061,14 @@
                 <a:ea typeface="JetBrains Mono" pitchFamily="34" charset="-122"/>
                 <a:cs typeface="JetBrains Mono" pitchFamily="34" charset="-120"/>
               </a:rPr>
-              <a:t>  bindplane-agent-secret \</a:t>
-            </a:r>
+              <a:t>kubectl create namespace bindplane-agent</a:t>
+            </a:r>
+            <a:endParaRPr lang="en-US" sz="1100" dirty="0"/>
+          </a:p>
+          <a:p>
+            <a:pPr indent="0" marL="0">
+              <a:buNone/>
+            </a:pPr>
             <a:endParaRPr lang="en-US" sz="1100" dirty="0"/>
           </a:p>
           <a:p>
@@ -16920,52 +17084,16 @@
                 <a:ea typeface="JetBrains Mono" pitchFamily="34" charset="-122"/>
                 <a:cs typeface="JetBrains Mono" pitchFamily="34" charset="-120"/>
               </a:rPr>
-              <a:t>  --from-literal=secret-key="YOUR_SECRET_KEY"</a:t>
+              <a:t>kubectl -n bindplane-agent create secret generic \</a:t>
             </a:r>
             <a:endParaRPr lang="en-US" sz="1100" dirty="0"/>
           </a:p>
-        </p:txBody>
-      </p:sp>
-      <p:sp>
-        <p:nvSpPr>
-          <p:cNvPr id="7" name="Text 5"/>
-          <p:cNvSpPr/>
-          <p:nvPr/>
-        </p:nvSpPr>
-        <p:spPr>
-          <a:xfrm>
-            <a:off x="457200" y="3694176"/>
-            <a:ext cx="8229600" cy="585216"/>
-          </a:xfrm>
-          <a:prstGeom prst="rect">
-            <a:avLst/>
-          </a:prstGeom>
-          <a:noFill/>
-          <a:ln/>
-        </p:spPr>
-        <p:txBody>
-          <a:bodyPr wrap="square" rtlCol="0" anchor="t"/>
-          <a:lstStyle/>
-          <a:p>
-            <a:pPr indent="0" marL="0">
-              <a:buNone/>
-            </a:pPr>
-            <a:r>
-              <a:rPr lang="en-US" sz="2000" dirty="0">
-                <a:solidFill>
-                  <a:srgbClr val="FFFFFF"/>
-                </a:solidFill>
-                <a:latin typeface="Inter" pitchFamily="34" charset="0"/>
-                <a:ea typeface="Inter" pitchFamily="34" charset="-122"/>
-                <a:cs typeface="Inter" pitchFamily="34" charset="-120"/>
-              </a:rPr>
-              <a:t>Replace </a:t>
-            </a:r>
-            <a:pPr indent="0" marL="0">
-              <a:buNone/>
-            </a:pPr>
-            <a:r>
-              <a:rPr lang="en-US" sz="1800" dirty="0">
+          <a:p>
+            <a:pPr indent="0" marL="0">
+              <a:buNone/>
+            </a:pPr>
+            <a:r>
+              <a:rPr lang="en-US" sz="1100" dirty="0">
                 <a:solidFill>
                   <a:srgbClr val="FFFFFF"/>
                 </a:solidFill>
@@ -16973,27 +17101,16 @@
                 <a:ea typeface="JetBrains Mono" pitchFamily="34" charset="-122"/>
                 <a:cs typeface="JetBrains Mono" pitchFamily="34" charset="-120"/>
               </a:rPr>
-              <a:t>YOUR_SECRET_KEY</a:t>
-            </a:r>
-            <a:pPr indent="0" marL="0">
-              <a:buNone/>
-            </a:pPr>
-            <a:r>
-              <a:rPr lang="en-US" sz="2000" dirty="0">
-                <a:solidFill>
-                  <a:srgbClr val="FFFFFF"/>
-                </a:solidFill>
-                <a:latin typeface="Inter" pitchFamily="34" charset="0"/>
-                <a:ea typeface="Inter" pitchFamily="34" charset="-122"/>
-                <a:cs typeface="Inter" pitchFamily="34" charset="-120"/>
-              </a:rPr>
-              <a:t> with the value from </a:t>
-            </a:r>
-            <a:pPr indent="0" marL="0">
-              <a:buNone/>
-            </a:pPr>
-            <a:r>
-              <a:rPr lang="en-US" sz="1800" dirty="0">
+              <a:t>  bindplane-agent-secret \</a:t>
+            </a:r>
+            <a:endParaRPr lang="en-US" sz="1100" dirty="0"/>
+          </a:p>
+          <a:p>
+            <a:pPr indent="0" marL="0">
+              <a:buNone/>
+            </a:pPr>
+            <a:r>
+              <a:rPr lang="en-US" sz="1100" dirty="0">
                 <a:solidFill>
                   <a:srgbClr val="FFFFFF"/>
                 </a:solidFill>
@@ -17001,23 +17118,9 @@
                 <a:ea typeface="JetBrains Mono" pitchFamily="34" charset="-122"/>
                 <a:cs typeface="JetBrains Mono" pitchFamily="34" charset="-120"/>
               </a:rPr>
-              <a:t>bindplane secret get</a:t>
-            </a:r>
-            <a:pPr indent="0" marL="0">
-              <a:buNone/>
-            </a:pPr>
-            <a:r>
-              <a:rPr lang="en-US" sz="2000" dirty="0">
-                <a:solidFill>
-                  <a:srgbClr val="FFFFFF"/>
-                </a:solidFill>
-                <a:latin typeface="Inter" pitchFamily="34" charset="0"/>
-                <a:ea typeface="Inter" pitchFamily="34" charset="-122"/>
-                <a:cs typeface="Inter" pitchFamily="34" charset="-120"/>
-              </a:rPr>
-              <a:t>.</a:t>
-            </a:r>
-            <a:endParaRPr lang="en-US" sz="2000" dirty="0"/>
+              <a:t>  --from-literal=secret-key="YOUR_SECRET_KEY"</a:t>
+            </a:r>
+            <a:endParaRPr lang="en-US" sz="1100" dirty="0"/>
           </a:p>
         </p:txBody>
       </p:sp>
@@ -20109,8 +20212,8 @@
         </p:nvSpPr>
         <p:spPr>
           <a:xfrm>
-            <a:off x="457200" y="2011680"/>
-            <a:ext cx="8229600" cy="914400"/>
+            <a:off x="457200" y="457200"/>
+            <a:ext cx="8229600" cy="640080"/>
           </a:xfrm>
           <a:prstGeom prst="rect">
             <a:avLst/>
@@ -20122,21 +20225,21 @@
           <a:bodyPr wrap="square" rtlCol="0" anchor="ctr"/>
           <a:lstStyle/>
           <a:p>
-            <a:pPr algn="ctr" indent="0" marL="0">
-              <a:buNone/>
-            </a:pPr>
-            <a:r>
-              <a:rPr lang="en-US" sz="4000" b="1" dirty="0">
-                <a:solidFill>
-                  <a:srgbClr val="FFFFFF"/>
-                </a:solidFill>
-                <a:latin typeface="Inter" pitchFamily="34" charset="0"/>
-                <a:ea typeface="Inter" pitchFamily="34" charset="-122"/>
-                <a:cs typeface="Inter" pitchFamily="34" charset="-120"/>
-              </a:rPr>
-              <a:t>Module 6</a:t>
-            </a:r>
-            <a:endParaRPr lang="en-US" sz="4000" dirty="0"/>
+            <a:pPr indent="0" marL="0">
+              <a:buNone/>
+            </a:pPr>
+            <a:r>
+              <a:rPr lang="en-US" sz="3600" b="1" dirty="0">
+                <a:solidFill>
+                  <a:srgbClr val="FFFFFF"/>
+                </a:solidFill>
+                <a:latin typeface="Inter" pitchFamily="34" charset="0"/>
+                <a:ea typeface="Inter" pitchFamily="34" charset="-122"/>
+                <a:cs typeface="Inter" pitchFamily="34" charset="-120"/>
+              </a:rPr>
+              <a:t>When a Rollout Fails</a:t>
+            </a:r>
+            <a:endParaRPr lang="en-US" sz="3600" dirty="0"/>
           </a:p>
         </p:txBody>
       </p:sp>
@@ -20148,8 +20251,8 @@
         </p:nvSpPr>
         <p:spPr>
           <a:xfrm>
-            <a:off x="1828800" y="3017520"/>
-            <a:ext cx="5486400" cy="54864"/>
+            <a:off x="457200" y="1188720"/>
+            <a:ext cx="4114800" cy="54864"/>
           </a:xfrm>
           <a:prstGeom prst="rect">
             <a:avLst/>
@@ -20157,19 +20260,49 @@
           <a:solidFill>
             <a:srgbClr val="1496FF"/>
           </a:solidFill>
-          <a:ln/>
-        </p:spPr>
-      </p:sp>
-      <p:sp>
-        <p:nvSpPr>
-          <p:cNvPr id="4" name="Text 2"/>
-          <p:cNvSpPr/>
-          <p:nvPr/>
-        </p:nvSpPr>
-        <p:spPr>
-          <a:xfrm>
-            <a:off x="457200" y="3291840"/>
-            <a:ext cx="8229600" cy="548640"/>
+          <a:ln w="12700">
+            <a:solidFill>
+              <a:srgbClr val="1496FF"/>
+            </a:solidFill>
+            <a:prstDash val="solid"/>
+          </a:ln>
+        </p:spPr>
+      </p:sp>
+      <p:sp>
+        <p:nvSpPr>
+          <p:cNvPr id="4" name="Shape 2"/>
+          <p:cNvSpPr/>
+          <p:nvPr/>
+        </p:nvSpPr>
+        <p:spPr>
+          <a:xfrm>
+            <a:off x="4572000" y="1188720"/>
+            <a:ext cx="4114800" cy="54864"/>
+          </a:xfrm>
+          <a:prstGeom prst="rect">
+            <a:avLst/>
+          </a:prstGeom>
+          <a:solidFill>
+            <a:srgbClr val="6366F1"/>
+          </a:solidFill>
+          <a:ln w="12700">
+            <a:solidFill>
+              <a:srgbClr val="6366F1"/>
+            </a:solidFill>
+            <a:prstDash val="solid"/>
+          </a:ln>
+        </p:spPr>
+      </p:sp>
+      <p:sp>
+        <p:nvSpPr>
+          <p:cNvPr id="5" name="Text 3"/>
+          <p:cNvSpPr/>
+          <p:nvPr/>
+        </p:nvSpPr>
+        <p:spPr>
+          <a:xfrm>
+            <a:off x="457200" y="1463040"/>
+            <a:ext cx="8229600" cy="585216"/>
           </a:xfrm>
           <a:prstGeom prst="rect">
             <a:avLst/>
@@ -20178,10 +20311,144 @@
           <a:ln/>
         </p:spPr>
         <p:txBody>
-          <a:bodyPr wrap="square" rtlCol="0" anchor="ctr"/>
-          <a:lstStyle/>
-          <a:p>
-            <a:pPr algn="ctr" indent="0" marL="0">
+          <a:bodyPr wrap="square" rtlCol="0" anchor="t"/>
+          <a:lstStyle/>
+          <a:p>
+            <a:pPr indent="0" marL="0">
+              <a:buNone/>
+            </a:pPr>
+            <a:r>
+              <a:rPr lang="en-US" sz="2000" dirty="0">
+                <a:solidFill>
+                  <a:srgbClr val="FFFFFF"/>
+                </a:solidFill>
+                <a:latin typeface="Inter" pitchFamily="34" charset="0"/>
+                <a:ea typeface="Inter" pitchFamily="34" charset="-122"/>
+                <a:cs typeface="Inter" pitchFamily="34" charset="-120"/>
+              </a:rPr>
+              <a:t>Rollback is the feature that matters. Here is what it looks like when the safety net fires.</a:t>
+            </a:r>
+            <a:endParaRPr lang="en-US" sz="2000" dirty="0"/>
+          </a:p>
+        </p:txBody>
+      </p:sp>
+      <p:sp>
+        <p:nvSpPr>
+          <p:cNvPr id="6" name="Text 4"/>
+          <p:cNvSpPr/>
+          <p:nvPr/>
+        </p:nvSpPr>
+        <p:spPr>
+          <a:xfrm>
+            <a:off x="457200" y="2231136"/>
+            <a:ext cx="8229600" cy="1097280"/>
+          </a:xfrm>
+          <a:prstGeom prst="rect">
+            <a:avLst/>
+          </a:prstGeom>
+          <a:solidFill>
+            <a:srgbClr val="141827"/>
+          </a:solidFill>
+          <a:ln/>
+        </p:spPr>
+        <p:txBody>
+          <a:bodyPr wrap="square" rtlCol="0" anchor="t"/>
+          <a:lstStyle/>
+          <a:p>
+            <a:pPr indent="0" marL="0">
+              <a:buNone/>
+            </a:pPr>
+            <a:r>
+              <a:rPr lang="en-US" sz="1100" dirty="0">
+                <a:solidFill>
+                  <a:srgbClr val="FFFFFF"/>
+                </a:solidFill>
+                <a:latin typeface="JetBrains Mono" pitchFamily="34" charset="0"/>
+                <a:ea typeface="JetBrains Mono" pitchFamily="34" charset="-122"/>
+                <a:cs typeface="JetBrains Mono" pitchFamily="34" charset="-120"/>
+              </a:rPr>
+              <a:t>$ bindplane rollout status astroshop-node</a:t>
+            </a:r>
+            <a:endParaRPr lang="en-US" sz="1100" dirty="0"/>
+          </a:p>
+          <a:p>
+            <a:pPr indent="0" marL="0">
+              <a:buNone/>
+            </a:pPr>
+            <a:endParaRPr lang="en-US" sz="1100" dirty="0"/>
+          </a:p>
+          <a:p>
+            <a:pPr indent="0" marL="0">
+              <a:buNone/>
+            </a:pPr>
+            <a:r>
+              <a:rPr lang="en-US" sz="1100" dirty="0">
+                <a:solidFill>
+                  <a:srgbClr val="FFFFFF"/>
+                </a:solidFill>
+                <a:latin typeface="JetBrains Mono" pitchFamily="34" charset="0"/>
+                <a:ea typeface="JetBrains Mono" pitchFamily="34" charset="-122"/>
+                <a:cs typeface="JetBrains Mono" pitchFamily="34" charset="-120"/>
+              </a:rPr>
+              <a:t>NAME              STATUS  COMPLETED  ERRORS  PENDING</a:t>
+            </a:r>
+            <a:endParaRPr lang="en-US" sz="1100" dirty="0"/>
+          </a:p>
+          <a:p>
+            <a:pPr indent="0" marL="0">
+              <a:buNone/>
+            </a:pPr>
+            <a:r>
+              <a:rPr lang="en-US" sz="1100" dirty="0">
+                <a:solidFill>
+                  <a:srgbClr val="FFFFFF"/>
+                </a:solidFill>
+                <a:latin typeface="JetBrains Mono" pitchFamily="34" charset="0"/>
+                <a:ea typeface="JetBrains Mono" pitchFamily="34" charset="-122"/>
+                <a:cs typeface="JetBrains Mono" pitchFamily="34" charset="-120"/>
+              </a:rPr>
+              <a:t>astroshop-node:1  Error   0          1       2</a:t>
+            </a:r>
+            <a:endParaRPr lang="en-US" sz="1100" dirty="0"/>
+          </a:p>
+        </p:txBody>
+      </p:sp>
+      <p:sp>
+        <p:nvSpPr>
+          <p:cNvPr id="7" name="Text 5"/>
+          <p:cNvSpPr/>
+          <p:nvPr/>
+        </p:nvSpPr>
+        <p:spPr>
+          <a:xfrm>
+            <a:off x="457200" y="3465576"/>
+            <a:ext cx="8229600" cy="585216"/>
+          </a:xfrm>
+          <a:prstGeom prst="rect">
+            <a:avLst/>
+          </a:prstGeom>
+          <a:noFill/>
+          <a:ln/>
+        </p:spPr>
+        <p:txBody>
+          <a:bodyPr wrap="square" rtlCol="0" anchor="t"/>
+          <a:lstStyle/>
+          <a:p>
+            <a:pPr indent="0" marL="0">
+              <a:buNone/>
+            </a:pPr>
+            <a:r>
+              <a:rPr lang="en-US" sz="2000" dirty="0">
+                <a:solidFill>
+                  <a:srgbClr val="FFFFFF"/>
+                </a:solidFill>
+                <a:latin typeface="Inter" pitchFamily="34" charset="0"/>
+                <a:ea typeface="Inter" pitchFamily="34" charset="-122"/>
+                <a:cs typeface="Inter" pitchFamily="34" charset="-120"/>
+              </a:rPr>
+              <a:t>One agent rejected the config. Two were held back. The CLI shows the count, but not </a:t>
+            </a:r>
+            <a:pPr indent="0" marL="0">
               <a:buNone/>
             </a:pPr>
             <a:r>
@@ -20193,7 +20460,21 @@
                 <a:ea typeface="Inter" pitchFamily="34" charset="-122"/>
                 <a:cs typeface="Inter" pitchFamily="34" charset="-120"/>
               </a:rPr>
-              <a:t>The Application</a:t>
+              <a:t>what</a:t>
+            </a:r>
+            <a:pPr indent="0" marL="0">
+              <a:buNone/>
+            </a:pPr>
+            <a:r>
+              <a:rPr lang="en-US" sz="2000" dirty="0">
+                <a:solidFill>
+                  <a:srgbClr val="FFFFFF"/>
+                </a:solidFill>
+                <a:latin typeface="Inter" pitchFamily="34" charset="0"/>
+                <a:ea typeface="Inter" pitchFamily="34" charset="-122"/>
+                <a:cs typeface="Inter" pitchFamily="34" charset="-120"/>
+              </a:rPr>
+              <a:t> went wrong.</a:t>
             </a:r>
             <a:endParaRPr lang="en-US" sz="2000" dirty="0"/>
           </a:p>
@@ -20257,7 +20538,7 @@
                 <a:ea typeface="Inter" pitchFamily="34" charset="-122"/>
                 <a:cs typeface="Inter" pitchFamily="34" charset="-120"/>
               </a:rPr>
-              <a:t>Connecting the Astronomy Shop</a:t>
+              <a:t>Finding the Error</a:t>
             </a:r>
             <a:endParaRPr lang="en-US" sz="3600" dirty="0"/>
           </a:p>
@@ -20322,7 +20603,7 @@
         <p:spPr>
           <a:xfrm>
             <a:off x="457200" y="1463040"/>
-            <a:ext cx="8229600" cy="585216"/>
+            <a:ext cx="8229600" cy="365760"/>
           </a:xfrm>
           <a:prstGeom prst="rect">
             <a:avLst/>
@@ -20346,7 +20627,7 @@
                 <a:ea typeface="Inter" pitchFamily="34" charset="-122"/>
                 <a:cs typeface="Inter" pitchFamily="34" charset="-120"/>
               </a:rPr>
-              <a:t>The Astronomy Shop ships with its own OTel Collector. It already sends to Jaeger, Prometheus, and OpenSearch.</a:t>
+              <a:t>Check the pod logs on the rejecting agent:</a:t>
             </a:r>
             <a:endParaRPr lang="en-US" sz="2000" dirty="0"/>
           </a:p>
@@ -20360,114 +20641,8 @@
         </p:nvSpPr>
         <p:spPr>
           <a:xfrm>
-            <a:off x="457200" y="2231136"/>
-            <a:ext cx="8229600" cy="877824"/>
-          </a:xfrm>
-          <a:prstGeom prst="rect">
-            <a:avLst/>
-          </a:prstGeom>
-          <a:noFill/>
-          <a:ln/>
-        </p:spPr>
-        <p:txBody>
-          <a:bodyPr wrap="square" rtlCol="0" anchor="t"/>
-          <a:lstStyle/>
-          <a:p>
-            <a:pPr indent="0" marL="0">
-              <a:buNone/>
-            </a:pPr>
-            <a:r>
-              <a:rPr lang="en-US" sz="2000" dirty="0">
-                <a:solidFill>
-                  <a:srgbClr val="FFFFFF"/>
-                </a:solidFill>
-                <a:latin typeface="Inter" pitchFamily="34" charset="0"/>
-                <a:ea typeface="Inter" pitchFamily="34" charset="-122"/>
-                <a:cs typeface="Inter" pitchFamily="34" charset="-120"/>
-              </a:rPr>
-              <a:t>We </a:t>
-            </a:r>
-            <a:pPr indent="0" marL="0">
-              <a:buNone/>
-            </a:pPr>
-            <a:r>
-              <a:rPr lang="en-US" sz="2000" b="1" dirty="0">
-                <a:solidFill>
-                  <a:srgbClr val="1496FF"/>
-                </a:solidFill>
-                <a:latin typeface="Inter" pitchFamily="34" charset="0"/>
-                <a:ea typeface="Inter" pitchFamily="34" charset="-122"/>
-                <a:cs typeface="Inter" pitchFamily="34" charset="-120"/>
-              </a:rPr>
-              <a:t>add</a:t>
-            </a:r>
-            <a:pPr indent="0" marL="0">
-              <a:buNone/>
-            </a:pPr>
-            <a:r>
-              <a:rPr lang="en-US" sz="2000" dirty="0">
-                <a:solidFill>
-                  <a:srgbClr val="FFFFFF"/>
-                </a:solidFill>
-                <a:latin typeface="Inter" pitchFamily="34" charset="0"/>
-                <a:ea typeface="Inter" pitchFamily="34" charset="-122"/>
-                <a:cs typeface="Inter" pitchFamily="34" charset="-120"/>
-              </a:rPr>
-              <a:t> a second exporter that forwards a copy of everything to the BindPlane gateway. The original observability continues to work alongside BindPlane.</a:t>
-            </a:r>
-            <a:endParaRPr lang="en-US" sz="2000" dirty="0"/>
-          </a:p>
-        </p:txBody>
-      </p:sp>
-      <p:sp>
-        <p:nvSpPr>
-          <p:cNvPr id="7" name="Text 5"/>
-          <p:cNvSpPr/>
-          <p:nvPr/>
-        </p:nvSpPr>
-        <p:spPr>
-          <a:xfrm>
-            <a:off x="457200" y="3291840"/>
-            <a:ext cx="8229600" cy="585216"/>
-          </a:xfrm>
-          <a:prstGeom prst="rect">
-            <a:avLst/>
-          </a:prstGeom>
-          <a:noFill/>
-          <a:ln/>
-        </p:spPr>
-        <p:txBody>
-          <a:bodyPr wrap="square" rtlCol="0" anchor="t"/>
-          <a:lstStyle/>
-          <a:p>
-            <a:pPr indent="0" marL="0">
-              <a:buNone/>
-            </a:pPr>
-            <a:r>
-              <a:rPr lang="en-US" sz="2000" dirty="0">
-                <a:solidFill>
-                  <a:srgbClr val="FFFFFF"/>
-                </a:solidFill>
-                <a:latin typeface="Inter" pitchFamily="34" charset="0"/>
-                <a:ea typeface="Inter" pitchFamily="34" charset="-122"/>
-                <a:cs typeface="Inter" pitchFamily="34" charset="-120"/>
-              </a:rPr>
-              <a:t>The exporter uses Kubernetes service DNS to reach the gateway:</a:t>
-            </a:r>
-            <a:endParaRPr lang="en-US" sz="2000" dirty="0"/>
-          </a:p>
-        </p:txBody>
-      </p:sp>
-      <p:sp>
-        <p:nvSpPr>
-          <p:cNvPr id="8" name="Text 6"/>
-          <p:cNvSpPr/>
-          <p:nvPr/>
-        </p:nvSpPr>
-        <p:spPr>
-          <a:xfrm>
-            <a:off x="457200" y="4059936"/>
-            <a:ext cx="8229600" cy="457200"/>
+            <a:off x="457200" y="2011680"/>
+            <a:ext cx="8229600" cy="1097280"/>
           </a:xfrm>
           <a:prstGeom prst="rect">
             <a:avLst/>
@@ -20493,9 +20668,141 @@
                 <a:ea typeface="JetBrains Mono" pitchFamily="34" charset="-122"/>
                 <a:cs typeface="JetBrains Mono" pitchFamily="34" charset="-120"/>
               </a:rPr>
-              <a:t>bindplane-gateway-agent.bindplane-agent.svc.cluster.local:4317</a:t>
+              <a:t>$ kubectl logs -n bindplane-agent bindplane-node-agent-wblpl</a:t>
             </a:r>
             <a:endParaRPr lang="en-US" sz="1100" dirty="0"/>
+          </a:p>
+          <a:p>
+            <a:pPr indent="0" marL="0">
+              <a:buNone/>
+            </a:pPr>
+            <a:endParaRPr lang="en-US" sz="1100" dirty="0"/>
+          </a:p>
+          <a:p>
+            <a:pPr indent="0" marL="0">
+              <a:buNone/>
+            </a:pPr>
+            <a:r>
+              <a:rPr lang="en-US" sz="1100" dirty="0">
+                <a:solidFill>
+                  <a:srgbClr val="FFFFFF"/>
+                </a:solidFill>
+                <a:latin typeface="JetBrains Mono" pitchFamily="34" charset="0"/>
+                <a:ea typeface="JetBrains Mono" pitchFamily="34" charset="-122"/>
+                <a:cs typeface="JetBrains Mono" pitchFamily="34" charset="-120"/>
+              </a:rPr>
+              <a:t>"Failed applying remote config"</a:t>
+            </a:r>
+            <a:endParaRPr lang="en-US" sz="1100" dirty="0"/>
+          </a:p>
+          <a:p>
+            <a:pPr indent="0" marL="0">
+              <a:buNone/>
+            </a:pPr>
+            <a:r>
+              <a:rPr lang="en-US" sz="1100" dirty="0">
+                <a:solidFill>
+                  <a:srgbClr val="FFFFFF"/>
+                </a:solidFill>
+                <a:latin typeface="JetBrains Mono" pitchFamily="34" charset="0"/>
+                <a:ea typeface="JetBrains Mono" pitchFamily="34" charset="-122"/>
+                <a:cs typeface="JetBrains Mono" pitchFamily="34" charset="-120"/>
+              </a:rPr>
+              <a:t>"error: 'metrics' has invalid keys: k8s.pod.volume.usage"</a:t>
+            </a:r>
+            <a:endParaRPr lang="en-US" sz="1100" dirty="0"/>
+          </a:p>
+        </p:txBody>
+      </p:sp>
+      <p:sp>
+        <p:nvSpPr>
+          <p:cNvPr id="7" name="Text 5"/>
+          <p:cNvSpPr/>
+          <p:nvPr/>
+        </p:nvSpPr>
+        <p:spPr>
+          <a:xfrm>
+            <a:off x="457200" y="3246120"/>
+            <a:ext cx="8229600" cy="585216"/>
+          </a:xfrm>
+          <a:prstGeom prst="rect">
+            <a:avLst/>
+          </a:prstGeom>
+          <a:noFill/>
+          <a:ln/>
+        </p:spPr>
+        <p:txBody>
+          <a:bodyPr wrap="square" rtlCol="0" anchor="t"/>
+          <a:lstStyle/>
+          <a:p>
+            <a:pPr indent="0" marL="0">
+              <a:buNone/>
+            </a:pPr>
+            <a:r>
+              <a:rPr lang="en-US" sz="2000" dirty="0">
+                <a:solidFill>
+                  <a:srgbClr val="FFFFFF"/>
+                </a:solidFill>
+                <a:latin typeface="Inter" pitchFamily="34" charset="0"/>
+                <a:ea typeface="Inter" pitchFamily="34" charset="-122"/>
+                <a:cs typeface="Inter" pitchFamily="34" charset="-120"/>
+              </a:rPr>
+              <a:t>The BindPlane-generated config included a metric the agent version didn't support.</a:t>
+            </a:r>
+            <a:endParaRPr lang="en-US" sz="2000" dirty="0"/>
+          </a:p>
+        </p:txBody>
+      </p:sp>
+      <p:sp>
+        <p:nvSpPr>
+          <p:cNvPr id="8" name="Text 6"/>
+          <p:cNvSpPr/>
+          <p:nvPr/>
+        </p:nvSpPr>
+        <p:spPr>
+          <a:xfrm>
+            <a:off x="457200" y="4014216"/>
+            <a:ext cx="8229600" cy="585216"/>
+          </a:xfrm>
+          <a:prstGeom prst="rect">
+            <a:avLst/>
+          </a:prstGeom>
+          <a:noFill/>
+          <a:ln/>
+        </p:spPr>
+        <p:txBody>
+          <a:bodyPr wrap="square" rtlCol="0" anchor="t"/>
+          <a:lstStyle/>
+          <a:p>
+            <a:pPr indent="0" marL="0">
+              <a:buNone/>
+            </a:pPr>
+            <a:r>
+              <a:rPr lang="en-US" sz="2000" b="1" dirty="0">
+                <a:solidFill>
+                  <a:srgbClr val="1496FF"/>
+                </a:solidFill>
+                <a:latin typeface="Inter" pitchFamily="34" charset="0"/>
+                <a:ea typeface="Inter" pitchFamily="34" charset="-122"/>
+                <a:cs typeface="Inter" pitchFamily="34" charset="-120"/>
+              </a:rPr>
+              <a:t>What worked:</a:t>
+            </a:r>
+            <a:pPr indent="0" marL="0">
+              <a:buNone/>
+            </a:pPr>
+            <a:r>
+              <a:rPr lang="en-US" sz="2000" dirty="0">
+                <a:solidFill>
+                  <a:srgbClr val="FFFFFF"/>
+                </a:solidFill>
+                <a:latin typeface="Inter" pitchFamily="34" charset="0"/>
+                <a:ea typeface="Inter" pitchFamily="34" charset="-122"/>
+                <a:cs typeface="Inter" pitchFamily="34" charset="-120"/>
+              </a:rPr>
+              <a:t> the agent rolled back automatically. No broken state.</a:t>
+            </a:r>
+            <a:endParaRPr lang="en-US" sz="2000" dirty="0"/>
           </a:p>
         </p:txBody>
       </p:sp>
@@ -20532,8 +20839,8 @@
         </p:nvSpPr>
         <p:spPr>
           <a:xfrm>
-            <a:off x="457200" y="457200"/>
-            <a:ext cx="8229600" cy="640080"/>
+            <a:off x="457200" y="2011680"/>
+            <a:ext cx="8229600" cy="914400"/>
           </a:xfrm>
           <a:prstGeom prst="rect">
             <a:avLst/>
@@ -20545,21 +20852,21 @@
           <a:bodyPr wrap="square" rtlCol="0" anchor="ctr"/>
           <a:lstStyle/>
           <a:p>
-            <a:pPr indent="0" marL="0">
-              <a:buNone/>
-            </a:pPr>
-            <a:r>
-              <a:rPr lang="en-US" sz="3600" b="1" dirty="0">
-                <a:solidFill>
-                  <a:srgbClr val="FFFFFF"/>
-                </a:solidFill>
-                <a:latin typeface="Inter" pitchFamily="34" charset="0"/>
-                <a:ea typeface="Inter" pitchFamily="34" charset="-122"/>
-                <a:cs typeface="Inter" pitchFamily="34" charset="-120"/>
-              </a:rPr>
-              <a:t>Helm Values Override</a:t>
-            </a:r>
-            <a:endParaRPr lang="en-US" sz="3600" dirty="0"/>
+            <a:pPr algn="ctr" indent="0" marL="0">
+              <a:buNone/>
+            </a:pPr>
+            <a:r>
+              <a:rPr lang="en-US" sz="4000" b="1" dirty="0">
+                <a:solidFill>
+                  <a:srgbClr val="FFFFFF"/>
+                </a:solidFill>
+                <a:latin typeface="Inter" pitchFamily="34" charset="0"/>
+                <a:ea typeface="Inter" pitchFamily="34" charset="-122"/>
+                <a:cs typeface="Inter" pitchFamily="34" charset="-120"/>
+              </a:rPr>
+              <a:t>Module 6</a:t>
+            </a:r>
+            <a:endParaRPr lang="en-US" sz="4000" dirty="0"/>
           </a:p>
         </p:txBody>
       </p:sp>
@@ -20571,8 +20878,8 @@
         </p:nvSpPr>
         <p:spPr>
           <a:xfrm>
-            <a:off x="457200" y="1188720"/>
-            <a:ext cx="4114800" cy="54864"/>
+            <a:off x="1828800" y="3017520"/>
+            <a:ext cx="5486400" cy="54864"/>
           </a:xfrm>
           <a:prstGeom prst="rect">
             <a:avLst/>
@@ -20580,49 +20887,19 @@
           <a:solidFill>
             <a:srgbClr val="1496FF"/>
           </a:solidFill>
-          <a:ln w="12700">
-            <a:solidFill>
-              <a:srgbClr val="1496FF"/>
-            </a:solidFill>
-            <a:prstDash val="solid"/>
-          </a:ln>
-        </p:spPr>
-      </p:sp>
-      <p:sp>
-        <p:nvSpPr>
-          <p:cNvPr id="4" name="Shape 2"/>
-          <p:cNvSpPr/>
-          <p:nvPr/>
-        </p:nvSpPr>
-        <p:spPr>
-          <a:xfrm>
-            <a:off x="4572000" y="1188720"/>
-            <a:ext cx="4114800" cy="54864"/>
-          </a:xfrm>
-          <a:prstGeom prst="rect">
-            <a:avLst/>
-          </a:prstGeom>
-          <a:solidFill>
-            <a:srgbClr val="6366F1"/>
-          </a:solidFill>
-          <a:ln w="12700">
-            <a:solidFill>
-              <a:srgbClr val="6366F1"/>
-            </a:solidFill>
-            <a:prstDash val="solid"/>
-          </a:ln>
-        </p:spPr>
-      </p:sp>
-      <p:sp>
-        <p:nvSpPr>
-          <p:cNvPr id="5" name="Text 3"/>
-          <p:cNvSpPr/>
-          <p:nvPr/>
-        </p:nvSpPr>
-        <p:spPr>
-          <a:xfrm>
-            <a:off x="457200" y="1463040"/>
-            <a:ext cx="8229600" cy="585216"/>
+          <a:ln/>
+        </p:spPr>
+      </p:sp>
+      <p:sp>
+        <p:nvSpPr>
+          <p:cNvPr id="4" name="Text 2"/>
+          <p:cNvSpPr/>
+          <p:nvPr/>
+        </p:nvSpPr>
+        <p:spPr>
+          <a:xfrm>
+            <a:off x="457200" y="3291840"/>
+            <a:ext cx="8229600" cy="548640"/>
           </a:xfrm>
           <a:prstGeom prst="rect">
             <a:avLst/>
@@ -20631,331 +20908,24 @@
           <a:ln/>
         </p:spPr>
         <p:txBody>
-          <a:bodyPr wrap="square" rtlCol="0" anchor="t"/>
-          <a:lstStyle/>
-          <a:p>
-            <a:pPr indent="0" marL="0">
-              <a:buNone/>
-            </a:pPr>
-            <a:r>
-              <a:rPr lang="en-US" sz="2000" dirty="0">
-                <a:solidFill>
-                  <a:srgbClr val="FFFFFF"/>
-                </a:solidFill>
-                <a:latin typeface="Inter" pitchFamily="34" charset="0"/>
-                <a:ea typeface="Inter" pitchFamily="34" charset="-122"/>
-                <a:cs typeface="Inter" pitchFamily="34" charset="-120"/>
-              </a:rPr>
-              <a:t>The </a:t>
-            </a:r>
-            <a:pPr indent="0" marL="0">
-              <a:buNone/>
-            </a:pPr>
-            <a:r>
-              <a:rPr lang="en-US" sz="1800" dirty="0">
-                <a:solidFill>
-                  <a:srgbClr val="FFFFFF"/>
-                </a:solidFill>
-                <a:latin typeface="JetBrains Mono" pitchFamily="34" charset="0"/>
-                <a:ea typeface="JetBrains Mono" pitchFamily="34" charset="-122"/>
-                <a:cs typeface="JetBrains Mono" pitchFamily="34" charset="-120"/>
-              </a:rPr>
-              <a:t>astroshop-values.yaml</a:t>
-            </a:r>
-            <a:pPr indent="0" marL="0">
-              <a:buNone/>
-            </a:pPr>
-            <a:r>
-              <a:rPr lang="en-US" sz="2000" dirty="0">
-                <a:solidFill>
-                  <a:srgbClr val="FFFFFF"/>
-                </a:solidFill>
-                <a:latin typeface="Inter" pitchFamily="34" charset="0"/>
-                <a:ea typeface="Inter" pitchFamily="34" charset="-122"/>
-                <a:cs typeface="Inter" pitchFamily="34" charset="-120"/>
-              </a:rPr>
-              <a:t> file adds our exporter to every pipeline:</a:t>
+          <a:bodyPr wrap="square" rtlCol="0" anchor="ctr"/>
+          <a:lstStyle/>
+          <a:p>
+            <a:pPr algn="ctr" indent="0" marL="0">
+              <a:buNone/>
+            </a:pPr>
+            <a:r>
+              <a:rPr lang="en-US" sz="2000" b="1" dirty="0">
+                <a:solidFill>
+                  <a:srgbClr val="1496FF"/>
+                </a:solidFill>
+                <a:latin typeface="Inter" pitchFamily="34" charset="0"/>
+                <a:ea typeface="Inter" pitchFamily="34" charset="-122"/>
+                <a:cs typeface="Inter" pitchFamily="34" charset="-120"/>
+              </a:rPr>
+              <a:t>The Application</a:t>
             </a:r>
             <a:endParaRPr lang="en-US" sz="2000" dirty="0"/>
-          </a:p>
-        </p:txBody>
-      </p:sp>
-      <p:sp>
-        <p:nvSpPr>
-          <p:cNvPr id="6" name="Text 4"/>
-          <p:cNvSpPr/>
-          <p:nvPr/>
-        </p:nvSpPr>
-        <p:spPr>
-          <a:xfrm>
-            <a:off x="457200" y="2231136"/>
-            <a:ext cx="8229600" cy="2523744"/>
-          </a:xfrm>
-          <a:prstGeom prst="rect">
-            <a:avLst/>
-          </a:prstGeom>
-          <a:solidFill>
-            <a:srgbClr val="141827"/>
-          </a:solidFill>
-          <a:ln/>
-        </p:spPr>
-        <p:txBody>
-          <a:bodyPr wrap="square" rtlCol="0" anchor="t"/>
-          <a:lstStyle/>
-          <a:p>
-            <a:pPr indent="0" marL="0">
-              <a:buNone/>
-            </a:pPr>
-            <a:r>
-              <a:rPr lang="en-US" sz="1100" dirty="0">
-                <a:solidFill>
-                  <a:srgbClr val="FFFFFF"/>
-                </a:solidFill>
-                <a:latin typeface="JetBrains Mono" pitchFamily="34" charset="0"/>
-                <a:ea typeface="JetBrains Mono" pitchFamily="34" charset="-122"/>
-                <a:cs typeface="JetBrains Mono" pitchFamily="34" charset="-120"/>
-              </a:rPr>
-              <a:t>opentelemetry-collector:</a:t>
-            </a:r>
-            <a:endParaRPr lang="en-US" sz="1100" dirty="0"/>
-          </a:p>
-          <a:p>
-            <a:pPr indent="0" marL="0">
-              <a:buNone/>
-            </a:pPr>
-            <a:r>
-              <a:rPr lang="en-US" sz="1100" dirty="0">
-                <a:solidFill>
-                  <a:srgbClr val="FFFFFF"/>
-                </a:solidFill>
-                <a:latin typeface="JetBrains Mono" pitchFamily="34" charset="0"/>
-                <a:ea typeface="JetBrains Mono" pitchFamily="34" charset="-122"/>
-                <a:cs typeface="JetBrains Mono" pitchFamily="34" charset="-120"/>
-              </a:rPr>
-              <a:t>  config:</a:t>
-            </a:r>
-            <a:endParaRPr lang="en-US" sz="1100" dirty="0"/>
-          </a:p>
-          <a:p>
-            <a:pPr indent="0" marL="0">
-              <a:buNone/>
-            </a:pPr>
-            <a:r>
-              <a:rPr lang="en-US" sz="1100" dirty="0">
-                <a:solidFill>
-                  <a:srgbClr val="FFFFFF"/>
-                </a:solidFill>
-                <a:latin typeface="JetBrains Mono" pitchFamily="34" charset="0"/>
-                <a:ea typeface="JetBrains Mono" pitchFamily="34" charset="-122"/>
-                <a:cs typeface="JetBrains Mono" pitchFamily="34" charset="-120"/>
-              </a:rPr>
-              <a:t>    exporters:</a:t>
-            </a:r>
-            <a:endParaRPr lang="en-US" sz="1100" dirty="0"/>
-          </a:p>
-          <a:p>
-            <a:pPr indent="0" marL="0">
-              <a:buNone/>
-            </a:pPr>
-            <a:r>
-              <a:rPr lang="en-US" sz="1100" dirty="0">
-                <a:solidFill>
-                  <a:srgbClr val="FFFFFF"/>
-                </a:solidFill>
-                <a:latin typeface="JetBrains Mono" pitchFamily="34" charset="0"/>
-                <a:ea typeface="JetBrains Mono" pitchFamily="34" charset="-122"/>
-                <a:cs typeface="JetBrains Mono" pitchFamily="34" charset="-120"/>
-              </a:rPr>
-              <a:t>      otlp/bindplane:</a:t>
-            </a:r>
-            <a:endParaRPr lang="en-US" sz="1100" dirty="0"/>
-          </a:p>
-          <a:p>
-            <a:pPr indent="0" marL="0">
-              <a:buNone/>
-            </a:pPr>
-            <a:r>
-              <a:rPr lang="en-US" sz="1100" dirty="0">
-                <a:solidFill>
-                  <a:srgbClr val="FFFFFF"/>
-                </a:solidFill>
-                <a:latin typeface="JetBrains Mono" pitchFamily="34" charset="0"/>
-                <a:ea typeface="JetBrains Mono" pitchFamily="34" charset="-122"/>
-                <a:cs typeface="JetBrains Mono" pitchFamily="34" charset="-120"/>
-              </a:rPr>
-              <a:t>        endpoint: bindplane-gateway-agent.bindplane-agent.svc.cluster.local:4317</a:t>
-            </a:r>
-            <a:endParaRPr lang="en-US" sz="1100" dirty="0"/>
-          </a:p>
-          <a:p>
-            <a:pPr indent="0" marL="0">
-              <a:buNone/>
-            </a:pPr>
-            <a:r>
-              <a:rPr lang="en-US" sz="1100" dirty="0">
-                <a:solidFill>
-                  <a:srgbClr val="FFFFFF"/>
-                </a:solidFill>
-                <a:latin typeface="JetBrains Mono" pitchFamily="34" charset="0"/>
-                <a:ea typeface="JetBrains Mono" pitchFamily="34" charset="-122"/>
-                <a:cs typeface="JetBrains Mono" pitchFamily="34" charset="-120"/>
-              </a:rPr>
-              <a:t>        tls:</a:t>
-            </a:r>
-            <a:endParaRPr lang="en-US" sz="1100" dirty="0"/>
-          </a:p>
-          <a:p>
-            <a:pPr indent="0" marL="0">
-              <a:buNone/>
-            </a:pPr>
-            <a:r>
-              <a:rPr lang="en-US" sz="1100" dirty="0">
-                <a:solidFill>
-                  <a:srgbClr val="FFFFFF"/>
-                </a:solidFill>
-                <a:latin typeface="JetBrains Mono" pitchFamily="34" charset="0"/>
-                <a:ea typeface="JetBrains Mono" pitchFamily="34" charset="-122"/>
-                <a:cs typeface="JetBrains Mono" pitchFamily="34" charset="-120"/>
-              </a:rPr>
-              <a:t>          insecure: true</a:t>
-            </a:r>
-            <a:endParaRPr lang="en-US" sz="1100" dirty="0"/>
-          </a:p>
-          <a:p>
-            <a:pPr indent="0" marL="0">
-              <a:buNone/>
-            </a:pPr>
-            <a:r>
-              <a:rPr lang="en-US" sz="1100" dirty="0">
-                <a:solidFill>
-                  <a:srgbClr val="FFFFFF"/>
-                </a:solidFill>
-                <a:latin typeface="JetBrains Mono" pitchFamily="34" charset="0"/>
-                <a:ea typeface="JetBrains Mono" pitchFamily="34" charset="-122"/>
-                <a:cs typeface="JetBrains Mono" pitchFamily="34" charset="-120"/>
-              </a:rPr>
-              <a:t>    service:</a:t>
-            </a:r>
-            <a:endParaRPr lang="en-US" sz="1100" dirty="0"/>
-          </a:p>
-          <a:p>
-            <a:pPr indent="0" marL="0">
-              <a:buNone/>
-            </a:pPr>
-            <a:r>
-              <a:rPr lang="en-US" sz="1100" dirty="0">
-                <a:solidFill>
-                  <a:srgbClr val="FFFFFF"/>
-                </a:solidFill>
-                <a:latin typeface="JetBrains Mono" pitchFamily="34" charset="0"/>
-                <a:ea typeface="JetBrains Mono" pitchFamily="34" charset="-122"/>
-                <a:cs typeface="JetBrains Mono" pitchFamily="34" charset="-120"/>
-              </a:rPr>
-              <a:t>      pipelines:</a:t>
-            </a:r>
-            <a:endParaRPr lang="en-US" sz="1100" dirty="0"/>
-          </a:p>
-          <a:p>
-            <a:pPr indent="0" marL="0">
-              <a:buNone/>
-            </a:pPr>
-            <a:r>
-              <a:rPr lang="en-US" sz="1100" dirty="0">
-                <a:solidFill>
-                  <a:srgbClr val="FFFFFF"/>
-                </a:solidFill>
-                <a:latin typeface="JetBrains Mono" pitchFamily="34" charset="0"/>
-                <a:ea typeface="JetBrains Mono" pitchFamily="34" charset="-122"/>
-                <a:cs typeface="JetBrains Mono" pitchFamily="34" charset="-120"/>
-              </a:rPr>
-              <a:t>        traces:</a:t>
-            </a:r>
-            <a:endParaRPr lang="en-US" sz="1100" dirty="0"/>
-          </a:p>
-          <a:p>
-            <a:pPr indent="0" marL="0">
-              <a:buNone/>
-            </a:pPr>
-            <a:r>
-              <a:rPr lang="en-US" sz="1100" dirty="0">
-                <a:solidFill>
-                  <a:srgbClr val="FFFFFF"/>
-                </a:solidFill>
-                <a:latin typeface="JetBrains Mono" pitchFamily="34" charset="0"/>
-                <a:ea typeface="JetBrains Mono" pitchFamily="34" charset="-122"/>
-                <a:cs typeface="JetBrains Mono" pitchFamily="34" charset="-120"/>
-              </a:rPr>
-              <a:t>          exporters: [otlp/jaeger, otlp/bindplane]</a:t>
-            </a:r>
-            <a:endParaRPr lang="en-US" sz="1100" dirty="0"/>
-          </a:p>
-          <a:p>
-            <a:pPr indent="0" marL="0">
-              <a:buNone/>
-            </a:pPr>
-            <a:r>
-              <a:rPr lang="en-US" sz="1100" dirty="0">
-                <a:solidFill>
-                  <a:srgbClr val="FFFFFF"/>
-                </a:solidFill>
-                <a:latin typeface="JetBrains Mono" pitchFamily="34" charset="0"/>
-                <a:ea typeface="JetBrains Mono" pitchFamily="34" charset="-122"/>
-                <a:cs typeface="JetBrains Mono" pitchFamily="34" charset="-120"/>
-              </a:rPr>
-              <a:t>        metrics:</a:t>
-            </a:r>
-            <a:endParaRPr lang="en-US" sz="1100" dirty="0"/>
-          </a:p>
-          <a:p>
-            <a:pPr indent="0" marL="0">
-              <a:buNone/>
-            </a:pPr>
-            <a:r>
-              <a:rPr lang="en-US" sz="1100" dirty="0">
-                <a:solidFill>
-                  <a:srgbClr val="FFFFFF"/>
-                </a:solidFill>
-                <a:latin typeface="JetBrains Mono" pitchFamily="34" charset="0"/>
-                <a:ea typeface="JetBrains Mono" pitchFamily="34" charset="-122"/>
-                <a:cs typeface="JetBrains Mono" pitchFamily="34" charset="-120"/>
-              </a:rPr>
-              <a:t>          exporters: [otlphttp/prometheus, otlp/bindplane]</a:t>
-            </a:r>
-            <a:endParaRPr lang="en-US" sz="1100" dirty="0"/>
-          </a:p>
-          <a:p>
-            <a:pPr indent="0" marL="0">
-              <a:buNone/>
-            </a:pPr>
-            <a:r>
-              <a:rPr lang="en-US" sz="1100" dirty="0">
-                <a:solidFill>
-                  <a:srgbClr val="FFFFFF"/>
-                </a:solidFill>
-                <a:latin typeface="JetBrains Mono" pitchFamily="34" charset="0"/>
-                <a:ea typeface="JetBrains Mono" pitchFamily="34" charset="-122"/>
-                <a:cs typeface="JetBrains Mono" pitchFamily="34" charset="-120"/>
-              </a:rPr>
-              <a:t>        logs:</a:t>
-            </a:r>
-            <a:endParaRPr lang="en-US" sz="1100" dirty="0"/>
-          </a:p>
-          <a:p>
-            <a:pPr indent="0" marL="0">
-              <a:buNone/>
-            </a:pPr>
-            <a:r>
-              <a:rPr lang="en-US" sz="1100" dirty="0">
-                <a:solidFill>
-                  <a:srgbClr val="FFFFFF"/>
-                </a:solidFill>
-                <a:latin typeface="JetBrains Mono" pitchFamily="34" charset="0"/>
-                <a:ea typeface="JetBrains Mono" pitchFamily="34" charset="-122"/>
-                <a:cs typeface="JetBrains Mono" pitchFamily="34" charset="-120"/>
-              </a:rPr>
-              <a:t>          exporters: [opensearch, otlp/bindplane]</a:t>
-            </a:r>
-            <a:endParaRPr lang="en-US" sz="1100" dirty="0"/>
           </a:p>
         </p:txBody>
       </p:sp>
@@ -20992,8 +20962,8 @@
         </p:nvSpPr>
         <p:spPr>
           <a:xfrm>
-            <a:off x="457200" y="2011680"/>
-            <a:ext cx="8229600" cy="914400"/>
+            <a:off x="457200" y="457200"/>
+            <a:ext cx="8229600" cy="640080"/>
           </a:xfrm>
           <a:prstGeom prst="rect">
             <a:avLst/>
@@ -21005,21 +20975,21 @@
           <a:bodyPr wrap="square" rtlCol="0" anchor="ctr"/>
           <a:lstStyle/>
           <a:p>
-            <a:pPr algn="ctr" indent="0" marL="0">
-              <a:buNone/>
-            </a:pPr>
-            <a:r>
-              <a:rPr lang="en-US" sz="4000" b="1" dirty="0">
-                <a:solidFill>
-                  <a:srgbClr val="FFFFFF"/>
-                </a:solidFill>
-                <a:latin typeface="Inter" pitchFamily="34" charset="0"/>
-                <a:ea typeface="Inter" pitchFamily="34" charset="-122"/>
-                <a:cs typeface="Inter" pitchFamily="34" charset="-120"/>
-              </a:rPr>
-              <a:t>Lab 6</a:t>
-            </a:r>
-            <a:endParaRPr lang="en-US" sz="4000" dirty="0"/>
+            <a:pPr indent="0" marL="0">
+              <a:buNone/>
+            </a:pPr>
+            <a:r>
+              <a:rPr lang="en-US" sz="3600" b="1" dirty="0">
+                <a:solidFill>
+                  <a:srgbClr val="FFFFFF"/>
+                </a:solidFill>
+                <a:latin typeface="Inter" pitchFamily="34" charset="0"/>
+                <a:ea typeface="Inter" pitchFamily="34" charset="-122"/>
+                <a:cs typeface="Inter" pitchFamily="34" charset="-120"/>
+              </a:rPr>
+              <a:t>Connecting the Astronomy Shop</a:t>
+            </a:r>
+            <a:endParaRPr lang="en-US" sz="3600" dirty="0"/>
           </a:p>
         </p:txBody>
       </p:sp>
@@ -21031,8 +21001,8 @@
         </p:nvSpPr>
         <p:spPr>
           <a:xfrm>
-            <a:off x="1828800" y="3017520"/>
-            <a:ext cx="5486400" cy="54864"/>
+            <a:off x="457200" y="1188720"/>
+            <a:ext cx="4114800" cy="54864"/>
           </a:xfrm>
           <a:prstGeom prst="rect">
             <a:avLst/>
@@ -21040,19 +21010,49 @@
           <a:solidFill>
             <a:srgbClr val="1496FF"/>
           </a:solidFill>
-          <a:ln/>
-        </p:spPr>
-      </p:sp>
-      <p:sp>
-        <p:nvSpPr>
-          <p:cNvPr id="4" name="Text 2"/>
-          <p:cNvSpPr/>
-          <p:nvPr/>
-        </p:nvSpPr>
-        <p:spPr>
-          <a:xfrm>
-            <a:off x="457200" y="3291840"/>
-            <a:ext cx="8229600" cy="548640"/>
+          <a:ln w="12700">
+            <a:solidFill>
+              <a:srgbClr val="1496FF"/>
+            </a:solidFill>
+            <a:prstDash val="solid"/>
+          </a:ln>
+        </p:spPr>
+      </p:sp>
+      <p:sp>
+        <p:nvSpPr>
+          <p:cNvPr id="4" name="Shape 2"/>
+          <p:cNvSpPr/>
+          <p:nvPr/>
+        </p:nvSpPr>
+        <p:spPr>
+          <a:xfrm>
+            <a:off x="4572000" y="1188720"/>
+            <a:ext cx="4114800" cy="54864"/>
+          </a:xfrm>
+          <a:prstGeom prst="rect">
+            <a:avLst/>
+          </a:prstGeom>
+          <a:solidFill>
+            <a:srgbClr val="6366F1"/>
+          </a:solidFill>
+          <a:ln w="12700">
+            <a:solidFill>
+              <a:srgbClr val="6366F1"/>
+            </a:solidFill>
+            <a:prstDash val="solid"/>
+          </a:ln>
+        </p:spPr>
+      </p:sp>
+      <p:sp>
+        <p:nvSpPr>
+          <p:cNvPr id="5" name="Text 3"/>
+          <p:cNvSpPr/>
+          <p:nvPr/>
+        </p:nvSpPr>
+        <p:spPr>
+          <a:xfrm>
+            <a:off x="457200" y="1463040"/>
+            <a:ext cx="8229600" cy="585216"/>
           </a:xfrm>
           <a:prstGeom prst="rect">
             <a:avLst/>
@@ -21061,10 +21061,63 @@
           <a:ln/>
         </p:spPr>
         <p:txBody>
-          <a:bodyPr wrap="square" rtlCol="0" anchor="ctr"/>
-          <a:lstStyle/>
-          <a:p>
-            <a:pPr algn="ctr" indent="0" marL="0">
+          <a:bodyPr wrap="square" rtlCol="0" anchor="t"/>
+          <a:lstStyle/>
+          <a:p>
+            <a:pPr indent="0" marL="0">
+              <a:buNone/>
+            </a:pPr>
+            <a:r>
+              <a:rPr lang="en-US" sz="2000" dirty="0">
+                <a:solidFill>
+                  <a:srgbClr val="FFFFFF"/>
+                </a:solidFill>
+                <a:latin typeface="Inter" pitchFamily="34" charset="0"/>
+                <a:ea typeface="Inter" pitchFamily="34" charset="-122"/>
+                <a:cs typeface="Inter" pitchFamily="34" charset="-120"/>
+              </a:rPr>
+              <a:t>The Astronomy Shop ships with its own OTel Collector. It already sends to Jaeger, Prometheus, and OpenSearch.</a:t>
+            </a:r>
+            <a:endParaRPr lang="en-US" sz="2000" dirty="0"/>
+          </a:p>
+        </p:txBody>
+      </p:sp>
+      <p:sp>
+        <p:nvSpPr>
+          <p:cNvPr id="6" name="Text 4"/>
+          <p:cNvSpPr/>
+          <p:nvPr/>
+        </p:nvSpPr>
+        <p:spPr>
+          <a:xfrm>
+            <a:off x="457200" y="2231136"/>
+            <a:ext cx="8229600" cy="877824"/>
+          </a:xfrm>
+          <a:prstGeom prst="rect">
+            <a:avLst/>
+          </a:prstGeom>
+          <a:noFill/>
+          <a:ln/>
+        </p:spPr>
+        <p:txBody>
+          <a:bodyPr wrap="square" rtlCol="0" anchor="t"/>
+          <a:lstStyle/>
+          <a:p>
+            <a:pPr indent="0" marL="0">
+              <a:buNone/>
+            </a:pPr>
+            <a:r>
+              <a:rPr lang="en-US" sz="2000" dirty="0">
+                <a:solidFill>
+                  <a:srgbClr val="FFFFFF"/>
+                </a:solidFill>
+                <a:latin typeface="Inter" pitchFamily="34" charset="0"/>
+                <a:ea typeface="Inter" pitchFamily="34" charset="-122"/>
+                <a:cs typeface="Inter" pitchFamily="34" charset="-120"/>
+              </a:rPr>
+              <a:t>We </a:t>
+            </a:r>
+            <a:pPr indent="0" marL="0">
               <a:buNone/>
             </a:pPr>
             <a:r>
@@ -21076,9 +21129,103 @@
                 <a:ea typeface="Inter" pitchFamily="34" charset="-122"/>
                 <a:cs typeface="Inter" pitchFamily="34" charset="-120"/>
               </a:rPr>
-              <a:t>Deploy the Astronomy Shop</a:t>
+              <a:t>add</a:t>
+            </a:r>
+            <a:pPr indent="0" marL="0">
+              <a:buNone/>
+            </a:pPr>
+            <a:r>
+              <a:rPr lang="en-US" sz="2000" dirty="0">
+                <a:solidFill>
+                  <a:srgbClr val="FFFFFF"/>
+                </a:solidFill>
+                <a:latin typeface="Inter" pitchFamily="34" charset="0"/>
+                <a:ea typeface="Inter" pitchFamily="34" charset="-122"/>
+                <a:cs typeface="Inter" pitchFamily="34" charset="-120"/>
+              </a:rPr>
+              <a:t> a second exporter that forwards a copy of everything to the BindPlane gateway. The original observability continues to work alongside BindPlane.</a:t>
             </a:r>
             <a:endParaRPr lang="en-US" sz="2000" dirty="0"/>
+          </a:p>
+        </p:txBody>
+      </p:sp>
+      <p:sp>
+        <p:nvSpPr>
+          <p:cNvPr id="7" name="Text 5"/>
+          <p:cNvSpPr/>
+          <p:nvPr/>
+        </p:nvSpPr>
+        <p:spPr>
+          <a:xfrm>
+            <a:off x="457200" y="3291840"/>
+            <a:ext cx="8229600" cy="585216"/>
+          </a:xfrm>
+          <a:prstGeom prst="rect">
+            <a:avLst/>
+          </a:prstGeom>
+          <a:noFill/>
+          <a:ln/>
+        </p:spPr>
+        <p:txBody>
+          <a:bodyPr wrap="square" rtlCol="0" anchor="t"/>
+          <a:lstStyle/>
+          <a:p>
+            <a:pPr indent="0" marL="0">
+              <a:buNone/>
+            </a:pPr>
+            <a:r>
+              <a:rPr lang="en-US" sz="2000" dirty="0">
+                <a:solidFill>
+                  <a:srgbClr val="FFFFFF"/>
+                </a:solidFill>
+                <a:latin typeface="Inter" pitchFamily="34" charset="0"/>
+                <a:ea typeface="Inter" pitchFamily="34" charset="-122"/>
+                <a:cs typeface="Inter" pitchFamily="34" charset="-120"/>
+              </a:rPr>
+              <a:t>The exporter uses Kubernetes service DNS to reach the gateway:</a:t>
+            </a:r>
+            <a:endParaRPr lang="en-US" sz="2000" dirty="0"/>
+          </a:p>
+        </p:txBody>
+      </p:sp>
+      <p:sp>
+        <p:nvSpPr>
+          <p:cNvPr id="8" name="Text 6"/>
+          <p:cNvSpPr/>
+          <p:nvPr/>
+        </p:nvSpPr>
+        <p:spPr>
+          <a:xfrm>
+            <a:off x="457200" y="4059936"/>
+            <a:ext cx="8229600" cy="457200"/>
+          </a:xfrm>
+          <a:prstGeom prst="rect">
+            <a:avLst/>
+          </a:prstGeom>
+          <a:solidFill>
+            <a:srgbClr val="141827"/>
+          </a:solidFill>
+          <a:ln/>
+        </p:spPr>
+        <p:txBody>
+          <a:bodyPr wrap="square" rtlCol="0" anchor="t"/>
+          <a:lstStyle/>
+          <a:p>
+            <a:pPr indent="0" marL="0">
+              <a:buNone/>
+            </a:pPr>
+            <a:r>
+              <a:rPr lang="en-US" sz="1100" dirty="0">
+                <a:solidFill>
+                  <a:srgbClr val="FFFFFF"/>
+                </a:solidFill>
+                <a:latin typeface="JetBrains Mono" pitchFamily="34" charset="0"/>
+                <a:ea typeface="JetBrains Mono" pitchFamily="34" charset="-122"/>
+                <a:cs typeface="JetBrains Mono" pitchFamily="34" charset="-120"/>
+              </a:rPr>
+              <a:t>bindplane-gateway-agent.bindplane-agent.svc.cluster.local:4317</a:t>
+            </a:r>
+            <a:endParaRPr lang="en-US" sz="1100" dirty="0"/>
           </a:p>
         </p:txBody>
       </p:sp>
@@ -21140,7 +21287,7 @@
                 <a:ea typeface="Inter" pitchFamily="34" charset="-122"/>
                 <a:cs typeface="Inter" pitchFamily="34" charset="-120"/>
               </a:rPr>
-              <a:t>Lab 6: Install with Helm</a:t>
+              <a:t>Helm Values Override</a:t>
             </a:r>
             <a:endParaRPr lang="en-US" sz="3600" dirty="0"/>
           </a:p>
@@ -21205,7 +21352,7 @@
         <p:spPr>
           <a:xfrm>
             <a:off x="457200" y="1463040"/>
-            <a:ext cx="8229600" cy="365760"/>
+            <a:ext cx="8229600" cy="585216"/>
           </a:xfrm>
           <a:prstGeom prst="rect">
             <a:avLst/>
@@ -21229,7 +21376,35 @@
                 <a:ea typeface="Inter" pitchFamily="34" charset="-122"/>
                 <a:cs typeface="Inter" pitchFamily="34" charset="-120"/>
               </a:rPr>
-              <a:t>Add the chart repo and deploy:</a:t>
+              <a:t>The </a:t>
+            </a:r>
+            <a:pPr indent="0" marL="0">
+              <a:buNone/>
+            </a:pPr>
+            <a:r>
+              <a:rPr lang="en-US" sz="1800" dirty="0">
+                <a:solidFill>
+                  <a:srgbClr val="FFFFFF"/>
+                </a:solidFill>
+                <a:latin typeface="JetBrains Mono" pitchFamily="34" charset="0"/>
+                <a:ea typeface="JetBrains Mono" pitchFamily="34" charset="-122"/>
+                <a:cs typeface="JetBrains Mono" pitchFamily="34" charset="-120"/>
+              </a:rPr>
+              <a:t>astroshop-values.yaml</a:t>
+            </a:r>
+            <a:pPr indent="0" marL="0">
+              <a:buNone/>
+            </a:pPr>
+            <a:r>
+              <a:rPr lang="en-US" sz="2000" dirty="0">
+                <a:solidFill>
+                  <a:srgbClr val="FFFFFF"/>
+                </a:solidFill>
+                <a:latin typeface="Inter" pitchFamily="34" charset="0"/>
+                <a:ea typeface="Inter" pitchFamily="34" charset="-122"/>
+                <a:cs typeface="Inter" pitchFamily="34" charset="-120"/>
+              </a:rPr>
+              <a:t> file adds our exporter to every pipeline:</a:t>
             </a:r>
             <a:endParaRPr lang="en-US" sz="2000" dirty="0"/>
           </a:p>
@@ -21243,8 +21418,8 @@
         </p:nvSpPr>
         <p:spPr>
           <a:xfrm>
-            <a:off x="457200" y="2011680"/>
-            <a:ext cx="8229600" cy="2240280"/>
+            <a:off x="457200" y="2231136"/>
+            <a:ext cx="8229600" cy="2523744"/>
           </a:xfrm>
           <a:prstGeom prst="rect">
             <a:avLst/>
@@ -21270,7 +21445,7 @@
                 <a:ea typeface="JetBrains Mono" pitchFamily="34" charset="-122"/>
                 <a:cs typeface="JetBrains Mono" pitchFamily="34" charset="-120"/>
               </a:rPr>
-              <a:t>helm repo add open-telemetry \</a:t>
+              <a:t>opentelemetry-collector:</a:t>
             </a:r>
             <a:endParaRPr lang="en-US" sz="1100" dirty="0"/>
           </a:p>
@@ -21287,7 +21462,7 @@
                 <a:ea typeface="JetBrains Mono" pitchFamily="34" charset="-122"/>
                 <a:cs typeface="JetBrains Mono" pitchFamily="34" charset="-120"/>
               </a:rPr>
-              <a:t>  https://open-telemetry.github.io/opentelemetry-helm-charts</a:t>
+              <a:t>  config:</a:t>
             </a:r>
             <a:endParaRPr lang="en-US" sz="1100" dirty="0"/>
           </a:p>
@@ -21304,14 +21479,8 @@
                 <a:ea typeface="JetBrains Mono" pitchFamily="34" charset="-122"/>
                 <a:cs typeface="JetBrains Mono" pitchFamily="34" charset="-120"/>
               </a:rPr>
-              <a:t>helm repo update</a:t>
-            </a:r>
-            <a:endParaRPr lang="en-US" sz="1100" dirty="0"/>
-          </a:p>
-          <a:p>
-            <a:pPr indent="0" marL="0">
-              <a:buNone/>
-            </a:pPr>
+              <a:t>    exporters:</a:t>
+            </a:r>
             <a:endParaRPr lang="en-US" sz="1100" dirty="0"/>
           </a:p>
           <a:p>
@@ -21327,7 +21496,7 @@
                 <a:ea typeface="JetBrains Mono" pitchFamily="34" charset="-122"/>
                 <a:cs typeface="JetBrains Mono" pitchFamily="34" charset="-120"/>
               </a:rPr>
-              <a:t>helm upgrade --install astroshop \</a:t>
+              <a:t>      otlp/bindplane:</a:t>
             </a:r>
             <a:endParaRPr lang="en-US" sz="1100" dirty="0"/>
           </a:p>
@@ -21344,7 +21513,7 @@
                 <a:ea typeface="JetBrains Mono" pitchFamily="34" charset="-122"/>
                 <a:cs typeface="JetBrains Mono" pitchFamily="34" charset="-120"/>
               </a:rPr>
-              <a:t>  open-telemetry/opentelemetry-demo \</a:t>
+              <a:t>        endpoint: bindplane-gateway-agent.bindplane-agent.svc.cluster.local:4317</a:t>
             </a:r>
             <a:endParaRPr lang="en-US" sz="1100" dirty="0"/>
           </a:p>
@@ -21361,7 +21530,7 @@
                 <a:ea typeface="JetBrains Mono" pitchFamily="34" charset="-122"/>
                 <a:cs typeface="JetBrains Mono" pitchFamily="34" charset="-120"/>
               </a:rPr>
-              <a:t>  -f astroshop-values.yaml \</a:t>
+              <a:t>        tls:</a:t>
             </a:r>
             <a:endParaRPr lang="en-US" sz="1100" dirty="0"/>
           </a:p>
@@ -21378,7 +21547,7 @@
                 <a:ea typeface="JetBrains Mono" pitchFamily="34" charset="-122"/>
                 <a:cs typeface="JetBrains Mono" pitchFamily="34" charset="-120"/>
               </a:rPr>
-              <a:t>  --namespace astroshop \</a:t>
+              <a:t>          insecure: true</a:t>
             </a:r>
             <a:endParaRPr lang="en-US" sz="1100" dirty="0"/>
           </a:p>
@@ -21395,7 +21564,126 @@
                 <a:ea typeface="JetBrains Mono" pitchFamily="34" charset="-122"/>
                 <a:cs typeface="JetBrains Mono" pitchFamily="34" charset="-120"/>
               </a:rPr>
-              <a:t>  --create-namespace</a:t>
+              <a:t>    service:</a:t>
+            </a:r>
+            <a:endParaRPr lang="en-US" sz="1100" dirty="0"/>
+          </a:p>
+          <a:p>
+            <a:pPr indent="0" marL="0">
+              <a:buNone/>
+            </a:pPr>
+            <a:r>
+              <a:rPr lang="en-US" sz="1100" dirty="0">
+                <a:solidFill>
+                  <a:srgbClr val="FFFFFF"/>
+                </a:solidFill>
+                <a:latin typeface="JetBrains Mono" pitchFamily="34" charset="0"/>
+                <a:ea typeface="JetBrains Mono" pitchFamily="34" charset="-122"/>
+                <a:cs typeface="JetBrains Mono" pitchFamily="34" charset="-120"/>
+              </a:rPr>
+              <a:t>      pipelines:</a:t>
+            </a:r>
+            <a:endParaRPr lang="en-US" sz="1100" dirty="0"/>
+          </a:p>
+          <a:p>
+            <a:pPr indent="0" marL="0">
+              <a:buNone/>
+            </a:pPr>
+            <a:r>
+              <a:rPr lang="en-US" sz="1100" dirty="0">
+                <a:solidFill>
+                  <a:srgbClr val="FFFFFF"/>
+                </a:solidFill>
+                <a:latin typeface="JetBrains Mono" pitchFamily="34" charset="0"/>
+                <a:ea typeface="JetBrains Mono" pitchFamily="34" charset="-122"/>
+                <a:cs typeface="JetBrains Mono" pitchFamily="34" charset="-120"/>
+              </a:rPr>
+              <a:t>        traces:</a:t>
+            </a:r>
+            <a:endParaRPr lang="en-US" sz="1100" dirty="0"/>
+          </a:p>
+          <a:p>
+            <a:pPr indent="0" marL="0">
+              <a:buNone/>
+            </a:pPr>
+            <a:r>
+              <a:rPr lang="en-US" sz="1100" dirty="0">
+                <a:solidFill>
+                  <a:srgbClr val="FFFFFF"/>
+                </a:solidFill>
+                <a:latin typeface="JetBrains Mono" pitchFamily="34" charset="0"/>
+                <a:ea typeface="JetBrains Mono" pitchFamily="34" charset="-122"/>
+                <a:cs typeface="JetBrains Mono" pitchFamily="34" charset="-120"/>
+              </a:rPr>
+              <a:t>          exporters: [otlp/jaeger, otlp/bindplane]</a:t>
+            </a:r>
+            <a:endParaRPr lang="en-US" sz="1100" dirty="0"/>
+          </a:p>
+          <a:p>
+            <a:pPr indent="0" marL="0">
+              <a:buNone/>
+            </a:pPr>
+            <a:r>
+              <a:rPr lang="en-US" sz="1100" dirty="0">
+                <a:solidFill>
+                  <a:srgbClr val="FFFFFF"/>
+                </a:solidFill>
+                <a:latin typeface="JetBrains Mono" pitchFamily="34" charset="0"/>
+                <a:ea typeface="JetBrains Mono" pitchFamily="34" charset="-122"/>
+                <a:cs typeface="JetBrains Mono" pitchFamily="34" charset="-120"/>
+              </a:rPr>
+              <a:t>        metrics:</a:t>
+            </a:r>
+            <a:endParaRPr lang="en-US" sz="1100" dirty="0"/>
+          </a:p>
+          <a:p>
+            <a:pPr indent="0" marL="0">
+              <a:buNone/>
+            </a:pPr>
+            <a:r>
+              <a:rPr lang="en-US" sz="1100" dirty="0">
+                <a:solidFill>
+                  <a:srgbClr val="FFFFFF"/>
+                </a:solidFill>
+                <a:latin typeface="JetBrains Mono" pitchFamily="34" charset="0"/>
+                <a:ea typeface="JetBrains Mono" pitchFamily="34" charset="-122"/>
+                <a:cs typeface="JetBrains Mono" pitchFamily="34" charset="-120"/>
+              </a:rPr>
+              <a:t>          exporters: [otlphttp/prometheus, otlp/bindplane]</a:t>
+            </a:r>
+            <a:endParaRPr lang="en-US" sz="1100" dirty="0"/>
+          </a:p>
+          <a:p>
+            <a:pPr indent="0" marL="0">
+              <a:buNone/>
+            </a:pPr>
+            <a:r>
+              <a:rPr lang="en-US" sz="1100" dirty="0">
+                <a:solidFill>
+                  <a:srgbClr val="FFFFFF"/>
+                </a:solidFill>
+                <a:latin typeface="JetBrains Mono" pitchFamily="34" charset="0"/>
+                <a:ea typeface="JetBrains Mono" pitchFamily="34" charset="-122"/>
+                <a:cs typeface="JetBrains Mono" pitchFamily="34" charset="-120"/>
+              </a:rPr>
+              <a:t>        logs:</a:t>
+            </a:r>
+            <a:endParaRPr lang="en-US" sz="1100" dirty="0"/>
+          </a:p>
+          <a:p>
+            <a:pPr indent="0" marL="0">
+              <a:buNone/>
+            </a:pPr>
+            <a:r>
+              <a:rPr lang="en-US" sz="1100" dirty="0">
+                <a:solidFill>
+                  <a:srgbClr val="FFFFFF"/>
+                </a:solidFill>
+                <a:latin typeface="JetBrains Mono" pitchFamily="34" charset="0"/>
+                <a:ea typeface="JetBrains Mono" pitchFamily="34" charset="-122"/>
+                <a:cs typeface="JetBrains Mono" pitchFamily="34" charset="-120"/>
+              </a:rPr>
+              <a:t>          exporters: [opensearch, otlp/bindplane]</a:t>
             </a:r>
             <a:endParaRPr lang="en-US" sz="1100" dirty="0"/>
           </a:p>
@@ -21434,8 +21722,8 @@
         </p:nvSpPr>
         <p:spPr>
           <a:xfrm>
-            <a:off x="457200" y="457200"/>
-            <a:ext cx="8229600" cy="640080"/>
+            <a:off x="457200" y="2011680"/>
+            <a:ext cx="8229600" cy="914400"/>
           </a:xfrm>
           <a:prstGeom prst="rect">
             <a:avLst/>
@@ -21447,21 +21735,21 @@
           <a:bodyPr wrap="square" rtlCol="0" anchor="ctr"/>
           <a:lstStyle/>
           <a:p>
-            <a:pPr indent="0" marL="0">
-              <a:buNone/>
-            </a:pPr>
-            <a:r>
-              <a:rPr lang="en-US" sz="3600" b="1" dirty="0">
-                <a:solidFill>
-                  <a:srgbClr val="FFFFFF"/>
-                </a:solidFill>
-                <a:latin typeface="Inter" pitchFamily="34" charset="0"/>
-                <a:ea typeface="Inter" pitchFamily="34" charset="-122"/>
-                <a:cs typeface="Inter" pitchFamily="34" charset="-120"/>
-              </a:rPr>
-              <a:t>Lab 6: Verify End-to-End</a:t>
-            </a:r>
-            <a:endParaRPr lang="en-US" sz="3600" dirty="0"/>
+            <a:pPr algn="ctr" indent="0" marL="0">
+              <a:buNone/>
+            </a:pPr>
+            <a:r>
+              <a:rPr lang="en-US" sz="4000" b="1" dirty="0">
+                <a:solidFill>
+                  <a:srgbClr val="FFFFFF"/>
+                </a:solidFill>
+                <a:latin typeface="Inter" pitchFamily="34" charset="0"/>
+                <a:ea typeface="Inter" pitchFamily="34" charset="-122"/>
+                <a:cs typeface="Inter" pitchFamily="34" charset="-120"/>
+              </a:rPr>
+              <a:t>Lab 6</a:t>
+            </a:r>
+            <a:endParaRPr lang="en-US" sz="4000" dirty="0"/>
           </a:p>
         </p:txBody>
       </p:sp>
@@ -21473,8 +21761,8 @@
         </p:nvSpPr>
         <p:spPr>
           <a:xfrm>
-            <a:off x="457200" y="1188720"/>
-            <a:ext cx="4114800" cy="54864"/>
+            <a:off x="1828800" y="3017520"/>
+            <a:ext cx="5486400" cy="54864"/>
           </a:xfrm>
           <a:prstGeom prst="rect">
             <a:avLst/>
@@ -21482,49 +21770,19 @@
           <a:solidFill>
             <a:srgbClr val="1496FF"/>
           </a:solidFill>
-          <a:ln w="12700">
-            <a:solidFill>
-              <a:srgbClr val="1496FF"/>
-            </a:solidFill>
-            <a:prstDash val="solid"/>
-          </a:ln>
-        </p:spPr>
-      </p:sp>
-      <p:sp>
-        <p:nvSpPr>
-          <p:cNvPr id="4" name="Shape 2"/>
-          <p:cNvSpPr/>
-          <p:nvPr/>
-        </p:nvSpPr>
-        <p:spPr>
-          <a:xfrm>
-            <a:off x="4572000" y="1188720"/>
-            <a:ext cx="4114800" cy="54864"/>
-          </a:xfrm>
-          <a:prstGeom prst="rect">
-            <a:avLst/>
-          </a:prstGeom>
-          <a:solidFill>
-            <a:srgbClr val="6366F1"/>
-          </a:solidFill>
-          <a:ln w="12700">
-            <a:solidFill>
-              <a:srgbClr val="6366F1"/>
-            </a:solidFill>
-            <a:prstDash val="solid"/>
-          </a:ln>
-        </p:spPr>
-      </p:sp>
-      <p:sp>
-        <p:nvSpPr>
-          <p:cNvPr id="5" name="Text 3"/>
-          <p:cNvSpPr/>
-          <p:nvPr/>
-        </p:nvSpPr>
-        <p:spPr>
-          <a:xfrm>
-            <a:off x="457200" y="1463040"/>
-            <a:ext cx="8229600" cy="365760"/>
+          <a:ln/>
+        </p:spPr>
+      </p:sp>
+      <p:sp>
+        <p:nvSpPr>
+          <p:cNvPr id="4" name="Text 2"/>
+          <p:cNvSpPr/>
+          <p:nvPr/>
+        </p:nvSpPr>
+        <p:spPr>
+          <a:xfrm>
+            <a:off x="457200" y="3291840"/>
+            <a:ext cx="8229600" cy="548640"/>
           </a:xfrm>
           <a:prstGeom prst="rect">
             <a:avLst/>
@@ -21533,10 +21791,10 @@
           <a:ln/>
         </p:spPr>
         <p:txBody>
-          <a:bodyPr wrap="square" rtlCol="0" anchor="t"/>
-          <a:lstStyle/>
-          <a:p>
-            <a:pPr indent="0" marL="0">
+          <a:bodyPr wrap="square" rtlCol="0" anchor="ctr"/>
+          <a:lstStyle/>
+          <a:p>
+            <a:pPr algn="ctr" indent="0" marL="0">
               <a:buNone/>
             </a:pPr>
             <a:r>
@@ -21548,272 +21806,9 @@
                 <a:ea typeface="Inter" pitchFamily="34" charset="-122"/>
                 <a:cs typeface="Inter" pitchFamily="34" charset="-120"/>
               </a:rPr>
-              <a:t>Check pods</a:t>
-            </a:r>
-            <a:pPr indent="0" marL="0">
-              <a:buNone/>
-            </a:pPr>
-            <a:r>
-              <a:rPr lang="en-US" sz="2000" dirty="0">
-                <a:solidFill>
-                  <a:srgbClr val="FFFFFF"/>
-                </a:solidFill>
-                <a:latin typeface="Inter" pitchFamily="34" charset="0"/>
-                <a:ea typeface="Inter" pitchFamily="34" charset="-122"/>
-                <a:cs typeface="Inter" pitchFamily="34" charset="-120"/>
-              </a:rPr>
-              <a:t> are running:</a:t>
+              <a:t>Deploy the Astronomy Shop</a:t>
             </a:r>
             <a:endParaRPr lang="en-US" sz="2000" dirty="0"/>
-          </a:p>
-        </p:txBody>
-      </p:sp>
-      <p:sp>
-        <p:nvSpPr>
-          <p:cNvPr id="6" name="Text 4"/>
-          <p:cNvSpPr/>
-          <p:nvPr/>
-        </p:nvSpPr>
-        <p:spPr>
-          <a:xfrm>
-            <a:off x="457200" y="2011680"/>
-            <a:ext cx="8229600" cy="1554480"/>
-          </a:xfrm>
-          <a:prstGeom prst="rect">
-            <a:avLst/>
-          </a:prstGeom>
-          <a:solidFill>
-            <a:srgbClr val="141827"/>
-          </a:solidFill>
-          <a:ln/>
-        </p:spPr>
-        <p:txBody>
-          <a:bodyPr wrap="square" rtlCol="0" anchor="t"/>
-          <a:lstStyle/>
-          <a:p>
-            <a:pPr indent="0" marL="0">
-              <a:buNone/>
-            </a:pPr>
-            <a:r>
-              <a:rPr lang="en-US" sz="1100" dirty="0">
-                <a:solidFill>
-                  <a:srgbClr val="FFFFFF"/>
-                </a:solidFill>
-                <a:latin typeface="JetBrains Mono" pitchFamily="34" charset="0"/>
-                <a:ea typeface="JetBrains Mono" pitchFamily="34" charset="-122"/>
-                <a:cs typeface="JetBrains Mono" pitchFamily="34" charset="-120"/>
-              </a:rPr>
-              <a:t>$ kubectl get pods -n astroshop | head -5</a:t>
-            </a:r>
-            <a:endParaRPr lang="en-US" sz="1100" dirty="0"/>
-          </a:p>
-          <a:p>
-            <a:pPr indent="0" marL="0">
-              <a:buNone/>
-            </a:pPr>
-            <a:endParaRPr lang="en-US" sz="1100" dirty="0"/>
-          </a:p>
-          <a:p>
-            <a:pPr indent="0" marL="0">
-              <a:buNone/>
-            </a:pPr>
-            <a:r>
-              <a:rPr lang="en-US" sz="1100" dirty="0">
-                <a:solidFill>
-                  <a:srgbClr val="FFFFFF"/>
-                </a:solidFill>
-                <a:latin typeface="JetBrains Mono" pitchFamily="34" charset="0"/>
-                <a:ea typeface="JetBrains Mono" pitchFamily="34" charset="-122"/>
-                <a:cs typeface="JetBrains Mono" pitchFamily="34" charset="-120"/>
-              </a:rPr>
-              <a:t>NAME                         READY  STATUS</a:t>
-            </a:r>
-            <a:endParaRPr lang="en-US" sz="1100" dirty="0"/>
-          </a:p>
-          <a:p>
-            <a:pPr indent="0" marL="0">
-              <a:buNone/>
-            </a:pPr>
-            <a:r>
-              <a:rPr lang="en-US" sz="1100" dirty="0">
-                <a:solidFill>
-                  <a:srgbClr val="FFFFFF"/>
-                </a:solidFill>
-                <a:latin typeface="JetBrains Mono" pitchFamily="34" charset="0"/>
-                <a:ea typeface="JetBrains Mono" pitchFamily="34" charset="-122"/>
-                <a:cs typeface="JetBrains Mono" pitchFamily="34" charset="-120"/>
-              </a:rPr>
-              <a:t>frontend-xxx                 1/1    Running</a:t>
-            </a:r>
-            <a:endParaRPr lang="en-US" sz="1100" dirty="0"/>
-          </a:p>
-          <a:p>
-            <a:pPr indent="0" marL="0">
-              <a:buNone/>
-            </a:pPr>
-            <a:r>
-              <a:rPr lang="en-US" sz="1100" dirty="0">
-                <a:solidFill>
-                  <a:srgbClr val="FFFFFF"/>
-                </a:solidFill>
-                <a:latin typeface="JetBrains Mono" pitchFamily="34" charset="0"/>
-                <a:ea typeface="JetBrains Mono" pitchFamily="34" charset="-122"/>
-                <a:cs typeface="JetBrains Mono" pitchFamily="34" charset="-120"/>
-              </a:rPr>
-              <a:t>checkout-xxx                 1/1    Running</a:t>
-            </a:r>
-            <a:endParaRPr lang="en-US" sz="1100" dirty="0"/>
-          </a:p>
-          <a:p>
-            <a:pPr indent="0" marL="0">
-              <a:buNone/>
-            </a:pPr>
-            <a:r>
-              <a:rPr lang="en-US" sz="1100" dirty="0">
-                <a:solidFill>
-                  <a:srgbClr val="FFFFFF"/>
-                </a:solidFill>
-                <a:latin typeface="JetBrains Mono" pitchFamily="34" charset="0"/>
-                <a:ea typeface="JetBrains Mono" pitchFamily="34" charset="-122"/>
-                <a:cs typeface="JetBrains Mono" pitchFamily="34" charset="-120"/>
-              </a:rPr>
-              <a:t>otel-collector-xxx           1/1    Running</a:t>
-            </a:r>
-            <a:endParaRPr lang="en-US" sz="1100" dirty="0"/>
-          </a:p>
-        </p:txBody>
-      </p:sp>
-      <p:sp>
-        <p:nvSpPr>
-          <p:cNvPr id="7" name="Text 5"/>
-          <p:cNvSpPr/>
-          <p:nvPr/>
-        </p:nvSpPr>
-        <p:spPr>
-          <a:xfrm>
-            <a:off x="457200" y="3703320"/>
-            <a:ext cx="8229600" cy="365760"/>
-          </a:xfrm>
-          <a:prstGeom prst="rect">
-            <a:avLst/>
-          </a:prstGeom>
-          <a:noFill/>
-          <a:ln/>
-        </p:spPr>
-        <p:txBody>
-          <a:bodyPr wrap="square" rtlCol="0" anchor="t"/>
-          <a:lstStyle/>
-          <a:p>
-            <a:pPr indent="0" marL="0">
-              <a:buNone/>
-            </a:pPr>
-            <a:r>
-              <a:rPr lang="en-US" sz="2000" b="1" dirty="0">
-                <a:solidFill>
-                  <a:srgbClr val="1496FF"/>
-                </a:solidFill>
-                <a:latin typeface="Inter" pitchFamily="34" charset="0"/>
-                <a:ea typeface="Inter" pitchFamily="34" charset="-122"/>
-                <a:cs typeface="Inter" pitchFamily="34" charset="-120"/>
-              </a:rPr>
-              <a:t>Check throughput</a:t>
-            </a:r>
-            <a:pPr indent="0" marL="0">
-              <a:buNone/>
-            </a:pPr>
-            <a:r>
-              <a:rPr lang="en-US" sz="2000" dirty="0">
-                <a:solidFill>
-                  <a:srgbClr val="FFFFFF"/>
-                </a:solidFill>
-                <a:latin typeface="Inter" pitchFamily="34" charset="0"/>
-                <a:ea typeface="Inter" pitchFamily="34" charset="-122"/>
-                <a:cs typeface="Inter" pitchFamily="34" charset="-120"/>
-              </a:rPr>
-              <a:t> in BindPlane:</a:t>
-            </a:r>
-            <a:endParaRPr lang="en-US" sz="2000" dirty="0"/>
-          </a:p>
-        </p:txBody>
-      </p:sp>
-      <p:sp>
-        <p:nvSpPr>
-          <p:cNvPr id="8" name="Text 6"/>
-          <p:cNvSpPr/>
-          <p:nvPr/>
-        </p:nvSpPr>
-        <p:spPr>
-          <a:xfrm>
-            <a:off x="457200" y="4251960"/>
-            <a:ext cx="8229600" cy="502920"/>
-          </a:xfrm>
-          <a:prstGeom prst="rect">
-            <a:avLst/>
-          </a:prstGeom>
-          <a:solidFill>
-            <a:srgbClr val="141827"/>
-          </a:solidFill>
-          <a:ln/>
-        </p:spPr>
-        <p:txBody>
-          <a:bodyPr wrap="square" rtlCol="0" anchor="t"/>
-          <a:lstStyle/>
-          <a:p>
-            <a:pPr indent="0" marL="0">
-              <a:buNone/>
-            </a:pPr>
-            <a:r>
-              <a:rPr lang="en-US" sz="1100" dirty="0">
-                <a:solidFill>
-                  <a:srgbClr val="FFFFFF"/>
-                </a:solidFill>
-                <a:latin typeface="JetBrains Mono" pitchFamily="34" charset="0"/>
-                <a:ea typeface="JetBrains Mono" pitchFamily="34" charset="-122"/>
-                <a:cs typeface="JetBrains Mono" pitchFamily="34" charset="-120"/>
-              </a:rPr>
-              <a:t>$ bindplane get agents</a:t>
-            </a:r>
-            <a:endParaRPr lang="en-US" sz="1100" dirty="0"/>
-          </a:p>
-          <a:p>
-            <a:pPr indent="0" marL="0">
-              <a:buNone/>
-            </a:pPr>
-            <a:endParaRPr lang="en-US" sz="1100" dirty="0"/>
-          </a:p>
-          <a:p>
-            <a:pPr indent="0" marL="0">
-              <a:buNone/>
-            </a:pPr>
-            <a:r>
-              <a:rPr lang="en-US" sz="1100" dirty="0">
-                <a:solidFill>
-                  <a:srgbClr val="FFFFFF"/>
-                </a:solidFill>
-                <a:latin typeface="JetBrains Mono" pitchFamily="34" charset="0"/>
-                <a:ea typeface="JetBrains Mono" pitchFamily="34" charset="-122"/>
-                <a:cs typeface="JetBrains Mono" pitchFamily="34" charset="-120"/>
-              </a:rPr>
-              <a:t>NAME                        LOGS      METRICS    TRACES</a:t>
-            </a:r>
-            <a:endParaRPr lang="en-US" sz="1100" dirty="0"/>
-          </a:p>
-          <a:p>
-            <a:pPr indent="0" marL="0">
-              <a:buNone/>
-            </a:pPr>
-            <a:r>
-              <a:rPr lang="en-US" sz="1100" dirty="0">
-                <a:solidFill>
-                  <a:srgbClr val="FFFFFF"/>
-                </a:solidFill>
-                <a:latin typeface="JetBrains Mono" pitchFamily="34" charset="0"/>
-                <a:ea typeface="JetBrains Mono" pitchFamily="34" charset="-122"/>
-                <a:cs typeface="JetBrains Mono" pitchFamily="34" charset="-120"/>
-              </a:rPr>
-              <a:t>bindplane-gateway-agent-xx  2.5 MB/h  9.4 MB/h   4.6 MB/h</a:t>
-            </a:r>
-            <a:endParaRPr lang="en-US" sz="1100" dirty="0"/>
           </a:p>
         </p:txBody>
       </p:sp>
@@ -21850,8 +21845,8 @@
         </p:nvSpPr>
         <p:spPr>
           <a:xfrm>
-            <a:off x="457200" y="274320"/>
-            <a:ext cx="8229600" cy="548640"/>
+            <a:off x="457200" y="457200"/>
+            <a:ext cx="8229600" cy="640080"/>
           </a:xfrm>
           <a:prstGeom prst="rect">
             <a:avLst/>
@@ -21867,17 +21862,17 @@
               <a:buNone/>
             </a:pPr>
             <a:r>
-              <a:rPr lang="en-US" sz="2800" b="1" dirty="0">
-                <a:solidFill>
-                  <a:srgbClr val="FFFFFF"/>
-                </a:solidFill>
-                <a:latin typeface="Inter" pitchFamily="34" charset="0"/>
-                <a:ea typeface="Inter" pitchFamily="34" charset="-122"/>
-                <a:cs typeface="Inter" pitchFamily="34" charset="-120"/>
-              </a:rPr>
-              <a:t>Verify in the BindPlane UI</a:t>
-            </a:r>
-            <a:endParaRPr lang="en-US" sz="2800" dirty="0"/>
+              <a:rPr lang="en-US" sz="3600" b="1" dirty="0">
+                <a:solidFill>
+                  <a:srgbClr val="FFFFFF"/>
+                </a:solidFill>
+                <a:latin typeface="Inter" pitchFamily="34" charset="0"/>
+                <a:ea typeface="Inter" pitchFamily="34" charset="-122"/>
+                <a:cs typeface="Inter" pitchFamily="34" charset="-120"/>
+              </a:rPr>
+              <a:t>Lab 6: Install with Helm</a:t>
+            </a:r>
+            <a:endParaRPr lang="en-US" sz="3600" dirty="0"/>
           </a:p>
         </p:txBody>
       </p:sp>
@@ -21889,53 +21884,58 @@
         </p:nvSpPr>
         <p:spPr>
           <a:xfrm>
-            <a:off x="457200" y="868680"/>
-            <a:ext cx="8229600" cy="36576"/>
+            <a:off x="457200" y="1188720"/>
+            <a:ext cx="4114800" cy="54864"/>
           </a:xfrm>
           <a:prstGeom prst="rect">
             <a:avLst/>
           </a:prstGeom>
           <a:solidFill>
             <a:srgbClr val="1496FF"/>
-          </a:solidFill>
-          <a:ln/>
-        </p:spPr>
-      </p:sp>
-      <p:sp>
-        <p:nvSpPr>
-          <p:cNvPr id="4" name="Shape 2"/>
-          <p:cNvSpPr/>
-          <p:nvPr/>
-        </p:nvSpPr>
-        <p:spPr>
-          <a:xfrm>
-            <a:off x="457200" y="1005840"/>
-            <a:ext cx="8229600" cy="3108960"/>
-          </a:xfrm>
-          <a:prstGeom prst="rect">
-            <a:avLst/>
-          </a:prstGeom>
-          <a:solidFill>
-            <a:srgbClr val="141827"/>
           </a:solidFill>
           <a:ln w="12700">
             <a:solidFill>
               <a:srgbClr val="1496FF"/>
             </a:solidFill>
-            <a:prstDash val="dash"/>
+            <a:prstDash val="solid"/>
           </a:ln>
         </p:spPr>
       </p:sp>
       <p:sp>
         <p:nvSpPr>
+          <p:cNvPr id="4" name="Shape 2"/>
+          <p:cNvSpPr/>
+          <p:nvPr/>
+        </p:nvSpPr>
+        <p:spPr>
+          <a:xfrm>
+            <a:off x="4572000" y="1188720"/>
+            <a:ext cx="4114800" cy="54864"/>
+          </a:xfrm>
+          <a:prstGeom prst="rect">
+            <a:avLst/>
+          </a:prstGeom>
+          <a:solidFill>
+            <a:srgbClr val="6366F1"/>
+          </a:solidFill>
+          <a:ln w="12700">
+            <a:solidFill>
+              <a:srgbClr val="6366F1"/>
+            </a:solidFill>
+            <a:prstDash val="solid"/>
+          </a:ln>
+        </p:spPr>
+      </p:sp>
+      <p:sp>
+        <p:nvSpPr>
           <p:cNvPr id="5" name="Text 3"/>
           <p:cNvSpPr/>
           <p:nvPr/>
         </p:nvSpPr>
         <p:spPr>
           <a:xfrm>
-            <a:off x="457200" y="2286000"/>
-            <a:ext cx="8229600" cy="548640"/>
+            <a:off x="457200" y="1463040"/>
+            <a:ext cx="8229600" cy="365760"/>
           </a:xfrm>
           <a:prstGeom prst="rect">
             <a:avLst/>
@@ -21944,22 +21944,22 @@
           <a:ln/>
         </p:spPr>
         <p:txBody>
-          <a:bodyPr wrap="square" rtlCol="0" anchor="ctr"/>
-          <a:lstStyle/>
-          <a:p>
-            <a:pPr algn="ctr" indent="0" marL="0">
-              <a:buNone/>
-            </a:pPr>
-            <a:r>
-              <a:rPr lang="en-US" sz="2000" b="1" dirty="0">
-                <a:solidFill>
-                  <a:srgbClr val="1496FF"/>
-                </a:solidFill>
-                <a:latin typeface="Inter" pitchFamily="34" charset="0"/>
-                <a:ea typeface="Inter" pitchFamily="34" charset="-122"/>
-                <a:cs typeface="Inter" pitchFamily="34" charset="-120"/>
-              </a:rPr>
-              <a:t>[ INSERT SCREENSHOT HERE ]</a:t>
+          <a:bodyPr wrap="square" rtlCol="0" anchor="t"/>
+          <a:lstStyle/>
+          <a:p>
+            <a:pPr indent="0" marL="0">
+              <a:buNone/>
+            </a:pPr>
+            <a:r>
+              <a:rPr lang="en-US" sz="2000" dirty="0">
+                <a:solidFill>
+                  <a:srgbClr val="FFFFFF"/>
+                </a:solidFill>
+                <a:latin typeface="Inter" pitchFamily="34" charset="0"/>
+                <a:ea typeface="Inter" pitchFamily="34" charset="-122"/>
+                <a:cs typeface="Inter" pitchFamily="34" charset="-120"/>
+              </a:rPr>
+              <a:t>Add the chart repo and deploy:</a:t>
             </a:r>
             <a:endParaRPr lang="en-US" sz="2000" dirty="0"/>
           </a:p>
@@ -21973,55 +21973,18 @@
         </p:nvSpPr>
         <p:spPr>
           <a:xfrm>
-            <a:off x="457200" y="4297680"/>
-            <a:ext cx="8229600" cy="228600"/>
-          </a:xfrm>
-          <a:prstGeom prst="rect">
-            <a:avLst/>
-          </a:prstGeom>
-          <a:noFill/>
+            <a:off x="457200" y="2011680"/>
+            <a:ext cx="8229600" cy="2240280"/>
+          </a:xfrm>
+          <a:prstGeom prst="rect">
+            <a:avLst/>
+          </a:prstGeom>
+          <a:solidFill>
+            <a:srgbClr val="141827"/>
+          </a:solidFill>
           <a:ln/>
         </p:spPr>
         <p:txBody>
-          <a:bodyPr wrap="square" rtlCol="0" anchor="ctr"/>
-          <a:lstStyle/>
-          <a:p>
-            <a:pPr indent="0" marL="0">
-              <a:buNone/>
-            </a:pPr>
-            <a:r>
-              <a:rPr lang="en-US" sz="900" b="1" dirty="0">
-                <a:solidFill>
-                  <a:srgbClr val="FF6B6B"/>
-                </a:solidFill>
-                <a:latin typeface="Inter" pitchFamily="34" charset="0"/>
-                <a:ea typeface="Inter" pitchFamily="34" charset="-122"/>
-                <a:cs typeface="Inter" pitchFamily="34" charset="-120"/>
-              </a:rPr>
-              <a:t>AUTHOR NOTES (delete before presenting):</a:t>
-            </a:r>
-            <a:endParaRPr lang="en-US" sz="900" dirty="0"/>
-          </a:p>
-        </p:txBody>
-      </p:sp>
-      <p:sp>
-        <p:nvSpPr>
-          <p:cNvPr id="7" name="Text 5"/>
-          <p:cNvSpPr/>
-          <p:nvPr/>
-        </p:nvSpPr>
-        <p:spPr>
-          <a:xfrm>
-            <a:off x="457200" y="4553712"/>
-            <a:ext cx="8229600" cy="164592"/>
-          </a:xfrm>
-          <a:prstGeom prst="rect">
-            <a:avLst/>
-          </a:prstGeom>
-          <a:noFill/>
-          <a:ln/>
-        </p:spPr>
-        <p:txBody>
           <a:bodyPr wrap="square" rtlCol="0" anchor="t"/>
           <a:lstStyle/>
           <a:p>
@@ -22029,107 +21992,142 @@
               <a:buNone/>
             </a:pPr>
             <a:r>
-              <a:rPr lang="en-US" sz="900" b="1" dirty="0">
-                <a:solidFill>
-                  <a:srgbClr val="1496FF"/>
-                </a:solidFill>
-                <a:latin typeface="Inter" pitchFamily="34" charset="0"/>
-                <a:ea typeface="Inter" pitchFamily="34" charset="-122"/>
-                <a:cs typeface="Inter" pitchFamily="34" charset="-120"/>
-              </a:rPr>
-              <a:t>SCREENSHOT:</a:t>
-            </a:r>
-            <a:pPr indent="0" marL="0">
-              <a:buNone/>
-            </a:pPr>
-            <a:r>
-              <a:rPr lang="en-US" sz="900" dirty="0">
-                <a:solidFill>
-                  <a:srgbClr val="FFFFFF"/>
-                </a:solidFill>
-                <a:latin typeface="Inter" pitchFamily="34" charset="0"/>
-                <a:ea typeface="Inter" pitchFamily="34" charset="-122"/>
-                <a:cs typeface="Inter" pitchFamily="34" charset="-120"/>
-              </a:rPr>
-              <a:t> BindPlane &gt; Agents page</a:t>
-            </a:r>
-            <a:endParaRPr lang="en-US" sz="900" dirty="0"/>
-          </a:p>
-        </p:txBody>
-      </p:sp>
-      <p:sp>
-        <p:nvSpPr>
-          <p:cNvPr id="8" name="Text 6"/>
-          <p:cNvSpPr/>
-          <p:nvPr/>
-        </p:nvSpPr>
-        <p:spPr>
-          <a:xfrm>
-            <a:off x="457200" y="4773168"/>
-            <a:ext cx="8229600" cy="164592"/>
-          </a:xfrm>
-          <a:prstGeom prst="rect">
-            <a:avLst/>
-          </a:prstGeom>
-          <a:noFill/>
-          <a:ln/>
-        </p:spPr>
-        <p:txBody>
-          <a:bodyPr wrap="square" rtlCol="0" anchor="t"/>
-          <a:lstStyle/>
-          <a:p>
-            <a:pPr marL="342900" indent="-342900">
-              <a:buSzPct val="100000"/>
-              <a:buChar char="•"/>
-            </a:pPr>
-            <a:r>
-              <a:rPr lang="en-US" sz="900" dirty="0">
-                <a:solidFill>
-                  <a:srgbClr val="AAAAAA"/>
-                </a:solidFill>
-                <a:latin typeface="Inter" pitchFamily="34" charset="0"/>
-                <a:ea typeface="Inter" pitchFamily="34" charset="-122"/>
-                <a:cs typeface="Inter" pitchFamily="34" charset="-120"/>
-              </a:rPr>
-              <a:t>All agents connected with throughput</a:t>
-            </a:r>
-            <a:endParaRPr lang="en-US" sz="900" dirty="0"/>
-          </a:p>
-          <a:p>
-            <a:pPr marL="342900" indent="-342900">
-              <a:buSzPct val="100000"/>
-              <a:buChar char="•"/>
-            </a:pPr>
-            <a:r>
-              <a:rPr lang="en-US" sz="900" dirty="0">
-                <a:solidFill>
-                  <a:srgbClr val="AAAAAA"/>
-                </a:solidFill>
-                <a:latin typeface="Inter" pitchFamily="34" charset="0"/>
-                <a:ea typeface="Inter" pitchFamily="34" charset="-122"/>
-                <a:cs typeface="Inter" pitchFamily="34" charset="-120"/>
-              </a:rPr>
-              <a:t>Gateway shows logs, metrics, and traces</a:t>
-            </a:r>
-            <a:endParaRPr lang="en-US" sz="900" dirty="0"/>
-          </a:p>
-          <a:p>
-            <a:pPr marL="342900" indent="-342900">
-              <a:buSzPct val="100000"/>
-              <a:buChar char="•"/>
-            </a:pPr>
-            <a:r>
-              <a:rPr lang="en-US" sz="900" dirty="0">
-                <a:solidFill>
-                  <a:srgbClr val="AAAAAA"/>
-                </a:solidFill>
-                <a:latin typeface="Inter" pitchFamily="34" charset="0"/>
-                <a:ea typeface="Inter" pitchFamily="34" charset="-122"/>
-                <a:cs typeface="Inter" pitchFamily="34" charset="-120"/>
-              </a:rPr>
-              <a:t>Key point: End-to-end pipeline is working</a:t>
-            </a:r>
-            <a:endParaRPr lang="en-US" sz="900" dirty="0"/>
+              <a:rPr lang="en-US" sz="1100" dirty="0">
+                <a:solidFill>
+                  <a:srgbClr val="FFFFFF"/>
+                </a:solidFill>
+                <a:latin typeface="JetBrains Mono" pitchFamily="34" charset="0"/>
+                <a:ea typeface="JetBrains Mono" pitchFamily="34" charset="-122"/>
+                <a:cs typeface="JetBrains Mono" pitchFamily="34" charset="-120"/>
+              </a:rPr>
+              <a:t>helm repo add open-telemetry \</a:t>
+            </a:r>
+            <a:endParaRPr lang="en-US" sz="1100" dirty="0"/>
+          </a:p>
+          <a:p>
+            <a:pPr indent="0" marL="0">
+              <a:buNone/>
+            </a:pPr>
+            <a:r>
+              <a:rPr lang="en-US" sz="1100" dirty="0">
+                <a:solidFill>
+                  <a:srgbClr val="FFFFFF"/>
+                </a:solidFill>
+                <a:latin typeface="JetBrains Mono" pitchFamily="34" charset="0"/>
+                <a:ea typeface="JetBrains Mono" pitchFamily="34" charset="-122"/>
+                <a:cs typeface="JetBrains Mono" pitchFamily="34" charset="-120"/>
+              </a:rPr>
+              <a:t>  https://open-telemetry.github.io/opentelemetry-helm-charts</a:t>
+            </a:r>
+            <a:endParaRPr lang="en-US" sz="1100" dirty="0"/>
+          </a:p>
+          <a:p>
+            <a:pPr indent="0" marL="0">
+              <a:buNone/>
+            </a:pPr>
+            <a:r>
+              <a:rPr lang="en-US" sz="1100" dirty="0">
+                <a:solidFill>
+                  <a:srgbClr val="FFFFFF"/>
+                </a:solidFill>
+                <a:latin typeface="JetBrains Mono" pitchFamily="34" charset="0"/>
+                <a:ea typeface="JetBrains Mono" pitchFamily="34" charset="-122"/>
+                <a:cs typeface="JetBrains Mono" pitchFamily="34" charset="-120"/>
+              </a:rPr>
+              <a:t>helm repo update</a:t>
+            </a:r>
+            <a:endParaRPr lang="en-US" sz="1100" dirty="0"/>
+          </a:p>
+          <a:p>
+            <a:pPr indent="0" marL="0">
+              <a:buNone/>
+            </a:pPr>
+            <a:endParaRPr lang="en-US" sz="1100" dirty="0"/>
+          </a:p>
+          <a:p>
+            <a:pPr indent="0" marL="0">
+              <a:buNone/>
+            </a:pPr>
+            <a:r>
+              <a:rPr lang="en-US" sz="1100" dirty="0">
+                <a:solidFill>
+                  <a:srgbClr val="FFFFFF"/>
+                </a:solidFill>
+                <a:latin typeface="JetBrains Mono" pitchFamily="34" charset="0"/>
+                <a:ea typeface="JetBrains Mono" pitchFamily="34" charset="-122"/>
+                <a:cs typeface="JetBrains Mono" pitchFamily="34" charset="-120"/>
+              </a:rPr>
+              <a:t>helm upgrade --install astroshop \</a:t>
+            </a:r>
+            <a:endParaRPr lang="en-US" sz="1100" dirty="0"/>
+          </a:p>
+          <a:p>
+            <a:pPr indent="0" marL="0">
+              <a:buNone/>
+            </a:pPr>
+            <a:r>
+              <a:rPr lang="en-US" sz="1100" dirty="0">
+                <a:solidFill>
+                  <a:srgbClr val="FFFFFF"/>
+                </a:solidFill>
+                <a:latin typeface="JetBrains Mono" pitchFamily="34" charset="0"/>
+                <a:ea typeface="JetBrains Mono" pitchFamily="34" charset="-122"/>
+                <a:cs typeface="JetBrains Mono" pitchFamily="34" charset="-120"/>
+              </a:rPr>
+              <a:t>  open-telemetry/opentelemetry-demo \</a:t>
+            </a:r>
+            <a:endParaRPr lang="en-US" sz="1100" dirty="0"/>
+          </a:p>
+          <a:p>
+            <a:pPr indent="0" marL="0">
+              <a:buNone/>
+            </a:pPr>
+            <a:r>
+              <a:rPr lang="en-US" sz="1100" dirty="0">
+                <a:solidFill>
+                  <a:srgbClr val="FFFFFF"/>
+                </a:solidFill>
+                <a:latin typeface="JetBrains Mono" pitchFamily="34" charset="0"/>
+                <a:ea typeface="JetBrains Mono" pitchFamily="34" charset="-122"/>
+                <a:cs typeface="JetBrains Mono" pitchFamily="34" charset="-120"/>
+              </a:rPr>
+              <a:t>  -f astroshop-values.yaml \</a:t>
+            </a:r>
+            <a:endParaRPr lang="en-US" sz="1100" dirty="0"/>
+          </a:p>
+          <a:p>
+            <a:pPr indent="0" marL="0">
+              <a:buNone/>
+            </a:pPr>
+            <a:r>
+              <a:rPr lang="en-US" sz="1100" dirty="0">
+                <a:solidFill>
+                  <a:srgbClr val="FFFFFF"/>
+                </a:solidFill>
+                <a:latin typeface="JetBrains Mono" pitchFamily="34" charset="0"/>
+                <a:ea typeface="JetBrains Mono" pitchFamily="34" charset="-122"/>
+                <a:cs typeface="JetBrains Mono" pitchFamily="34" charset="-120"/>
+              </a:rPr>
+              <a:t>  --namespace astroshop \</a:t>
+            </a:r>
+            <a:endParaRPr lang="en-US" sz="1100" dirty="0"/>
+          </a:p>
+          <a:p>
+            <a:pPr indent="0" marL="0">
+              <a:buNone/>
+            </a:pPr>
+            <a:r>
+              <a:rPr lang="en-US" sz="1100" dirty="0">
+                <a:solidFill>
+                  <a:srgbClr val="FFFFFF"/>
+                </a:solidFill>
+                <a:latin typeface="JetBrains Mono" pitchFamily="34" charset="0"/>
+                <a:ea typeface="JetBrains Mono" pitchFamily="34" charset="-122"/>
+                <a:cs typeface="JetBrains Mono" pitchFamily="34" charset="-120"/>
+              </a:rPr>
+              <a:t>  --create-namespace</a:t>
+            </a:r>
+            <a:endParaRPr lang="en-US" sz="1100" dirty="0"/>
           </a:p>
         </p:txBody>
       </p:sp>
@@ -22510,8 +22508,8 @@
         </p:nvSpPr>
         <p:spPr>
           <a:xfrm>
-            <a:off x="457200" y="274320"/>
-            <a:ext cx="8229600" cy="548640"/>
+            <a:off x="457200" y="457200"/>
+            <a:ext cx="8229600" cy="640080"/>
           </a:xfrm>
           <a:prstGeom prst="rect">
             <a:avLst/>
@@ -22527,17 +22525,17 @@
               <a:buNone/>
             </a:pPr>
             <a:r>
-              <a:rPr lang="en-US" sz="2800" b="1" dirty="0">
-                <a:solidFill>
-                  <a:srgbClr val="FFFFFF"/>
-                </a:solidFill>
-                <a:latin typeface="Inter" pitchFamily="34" charset="0"/>
-                <a:ea typeface="Inter" pitchFamily="34" charset="-122"/>
-                <a:cs typeface="Inter" pitchFamily="34" charset="-120"/>
-              </a:rPr>
-              <a:t>Verify the Pipeline</a:t>
-            </a:r>
-            <a:endParaRPr lang="en-US" sz="2800" dirty="0"/>
+              <a:rPr lang="en-US" sz="3600" b="1" dirty="0">
+                <a:solidFill>
+                  <a:srgbClr val="FFFFFF"/>
+                </a:solidFill>
+                <a:latin typeface="Inter" pitchFamily="34" charset="0"/>
+                <a:ea typeface="Inter" pitchFamily="34" charset="-122"/>
+                <a:cs typeface="Inter" pitchFamily="34" charset="-120"/>
+              </a:rPr>
+              <a:t>Lab 6: Verify End-to-End</a:t>
+            </a:r>
+            <a:endParaRPr lang="en-US" sz="3600" dirty="0"/>
           </a:p>
         </p:txBody>
       </p:sp>
@@ -22549,53 +22547,58 @@
         </p:nvSpPr>
         <p:spPr>
           <a:xfrm>
-            <a:off x="457200" y="868680"/>
-            <a:ext cx="8229600" cy="36576"/>
+            <a:off x="457200" y="1188720"/>
+            <a:ext cx="4114800" cy="54864"/>
           </a:xfrm>
           <a:prstGeom prst="rect">
             <a:avLst/>
           </a:prstGeom>
           <a:solidFill>
             <a:srgbClr val="1496FF"/>
-          </a:solidFill>
-          <a:ln/>
-        </p:spPr>
-      </p:sp>
-      <p:sp>
-        <p:nvSpPr>
-          <p:cNvPr id="4" name="Shape 2"/>
-          <p:cNvSpPr/>
-          <p:nvPr/>
-        </p:nvSpPr>
-        <p:spPr>
-          <a:xfrm>
-            <a:off x="457200" y="1005840"/>
-            <a:ext cx="8229600" cy="3108960"/>
-          </a:xfrm>
-          <a:prstGeom prst="rect">
-            <a:avLst/>
-          </a:prstGeom>
-          <a:solidFill>
-            <a:srgbClr val="141827"/>
           </a:solidFill>
           <a:ln w="12700">
             <a:solidFill>
               <a:srgbClr val="1496FF"/>
             </a:solidFill>
-            <a:prstDash val="dash"/>
+            <a:prstDash val="solid"/>
           </a:ln>
         </p:spPr>
       </p:sp>
       <p:sp>
         <p:nvSpPr>
+          <p:cNvPr id="4" name="Shape 2"/>
+          <p:cNvSpPr/>
+          <p:nvPr/>
+        </p:nvSpPr>
+        <p:spPr>
+          <a:xfrm>
+            <a:off x="4572000" y="1188720"/>
+            <a:ext cx="4114800" cy="54864"/>
+          </a:xfrm>
+          <a:prstGeom prst="rect">
+            <a:avLst/>
+          </a:prstGeom>
+          <a:solidFill>
+            <a:srgbClr val="6366F1"/>
+          </a:solidFill>
+          <a:ln w="12700">
+            <a:solidFill>
+              <a:srgbClr val="6366F1"/>
+            </a:solidFill>
+            <a:prstDash val="solid"/>
+          </a:ln>
+        </p:spPr>
+      </p:sp>
+      <p:sp>
+        <p:nvSpPr>
           <p:cNvPr id="5" name="Text 3"/>
           <p:cNvSpPr/>
           <p:nvPr/>
         </p:nvSpPr>
         <p:spPr>
           <a:xfrm>
-            <a:off x="457200" y="2286000"/>
-            <a:ext cx="8229600" cy="548640"/>
+            <a:off x="457200" y="1463040"/>
+            <a:ext cx="8229600" cy="365760"/>
           </a:xfrm>
           <a:prstGeom prst="rect">
             <a:avLst/>
@@ -22604,10 +22607,10 @@
           <a:ln/>
         </p:spPr>
         <p:txBody>
-          <a:bodyPr wrap="square" rtlCol="0" anchor="ctr"/>
-          <a:lstStyle/>
-          <a:p>
-            <a:pPr algn="ctr" indent="0" marL="0">
+          <a:bodyPr wrap="square" rtlCol="0" anchor="t"/>
+          <a:lstStyle/>
+          <a:p>
+            <a:pPr indent="0" marL="0">
               <a:buNone/>
             </a:pPr>
             <a:r>
@@ -22619,7 +22622,21 @@
                 <a:ea typeface="Inter" pitchFamily="34" charset="-122"/>
                 <a:cs typeface="Inter" pitchFamily="34" charset="-120"/>
               </a:rPr>
-              <a:t>[ INSERT SCREENSHOT HERE ]</a:t>
+              <a:t>Check pods</a:t>
+            </a:r>
+            <a:pPr indent="0" marL="0">
+              <a:buNone/>
+            </a:pPr>
+            <a:r>
+              <a:rPr lang="en-US" sz="2000" dirty="0">
+                <a:solidFill>
+                  <a:srgbClr val="FFFFFF"/>
+                </a:solidFill>
+                <a:latin typeface="Inter" pitchFamily="34" charset="0"/>
+                <a:ea typeface="Inter" pitchFamily="34" charset="-122"/>
+                <a:cs typeface="Inter" pitchFamily="34" charset="-120"/>
+              </a:rPr>
+              <a:t> are running:</a:t>
             </a:r>
             <a:endParaRPr lang="en-US" sz="2000" dirty="0"/>
           </a:p>
@@ -22633,8 +22650,123 @@
         </p:nvSpPr>
         <p:spPr>
           <a:xfrm>
-            <a:off x="457200" y="4297680"/>
-            <a:ext cx="8229600" cy="228600"/>
+            <a:off x="457200" y="2011680"/>
+            <a:ext cx="8229600" cy="1554480"/>
+          </a:xfrm>
+          <a:prstGeom prst="rect">
+            <a:avLst/>
+          </a:prstGeom>
+          <a:solidFill>
+            <a:srgbClr val="141827"/>
+          </a:solidFill>
+          <a:ln/>
+        </p:spPr>
+        <p:txBody>
+          <a:bodyPr wrap="square" rtlCol="0" anchor="t"/>
+          <a:lstStyle/>
+          <a:p>
+            <a:pPr indent="0" marL="0">
+              <a:buNone/>
+            </a:pPr>
+            <a:r>
+              <a:rPr lang="en-US" sz="1100" dirty="0">
+                <a:solidFill>
+                  <a:srgbClr val="FFFFFF"/>
+                </a:solidFill>
+                <a:latin typeface="JetBrains Mono" pitchFamily="34" charset="0"/>
+                <a:ea typeface="JetBrains Mono" pitchFamily="34" charset="-122"/>
+                <a:cs typeface="JetBrains Mono" pitchFamily="34" charset="-120"/>
+              </a:rPr>
+              <a:t>$ kubectl get pods -n astroshop | head -5</a:t>
+            </a:r>
+            <a:endParaRPr lang="en-US" sz="1100" dirty="0"/>
+          </a:p>
+          <a:p>
+            <a:pPr indent="0" marL="0">
+              <a:buNone/>
+            </a:pPr>
+            <a:endParaRPr lang="en-US" sz="1100" dirty="0"/>
+          </a:p>
+          <a:p>
+            <a:pPr indent="0" marL="0">
+              <a:buNone/>
+            </a:pPr>
+            <a:r>
+              <a:rPr lang="en-US" sz="1100" dirty="0">
+                <a:solidFill>
+                  <a:srgbClr val="FFFFFF"/>
+                </a:solidFill>
+                <a:latin typeface="JetBrains Mono" pitchFamily="34" charset="0"/>
+                <a:ea typeface="JetBrains Mono" pitchFamily="34" charset="-122"/>
+                <a:cs typeface="JetBrains Mono" pitchFamily="34" charset="-120"/>
+              </a:rPr>
+              <a:t>NAME                         READY  STATUS</a:t>
+            </a:r>
+            <a:endParaRPr lang="en-US" sz="1100" dirty="0"/>
+          </a:p>
+          <a:p>
+            <a:pPr indent="0" marL="0">
+              <a:buNone/>
+            </a:pPr>
+            <a:r>
+              <a:rPr lang="en-US" sz="1100" dirty="0">
+                <a:solidFill>
+                  <a:srgbClr val="FFFFFF"/>
+                </a:solidFill>
+                <a:latin typeface="JetBrains Mono" pitchFamily="34" charset="0"/>
+                <a:ea typeface="JetBrains Mono" pitchFamily="34" charset="-122"/>
+                <a:cs typeface="JetBrains Mono" pitchFamily="34" charset="-120"/>
+              </a:rPr>
+              <a:t>frontend-xxx                 1/1    Running</a:t>
+            </a:r>
+            <a:endParaRPr lang="en-US" sz="1100" dirty="0"/>
+          </a:p>
+          <a:p>
+            <a:pPr indent="0" marL="0">
+              <a:buNone/>
+            </a:pPr>
+            <a:r>
+              <a:rPr lang="en-US" sz="1100" dirty="0">
+                <a:solidFill>
+                  <a:srgbClr val="FFFFFF"/>
+                </a:solidFill>
+                <a:latin typeface="JetBrains Mono" pitchFamily="34" charset="0"/>
+                <a:ea typeface="JetBrains Mono" pitchFamily="34" charset="-122"/>
+                <a:cs typeface="JetBrains Mono" pitchFamily="34" charset="-120"/>
+              </a:rPr>
+              <a:t>checkout-xxx                 1/1    Running</a:t>
+            </a:r>
+            <a:endParaRPr lang="en-US" sz="1100" dirty="0"/>
+          </a:p>
+          <a:p>
+            <a:pPr indent="0" marL="0">
+              <a:buNone/>
+            </a:pPr>
+            <a:r>
+              <a:rPr lang="en-US" sz="1100" dirty="0">
+                <a:solidFill>
+                  <a:srgbClr val="FFFFFF"/>
+                </a:solidFill>
+                <a:latin typeface="JetBrains Mono" pitchFamily="34" charset="0"/>
+                <a:ea typeface="JetBrains Mono" pitchFamily="34" charset="-122"/>
+                <a:cs typeface="JetBrains Mono" pitchFamily="34" charset="-120"/>
+              </a:rPr>
+              <a:t>otel-collector-xxx           1/1    Running</a:t>
+            </a:r>
+            <a:endParaRPr lang="en-US" sz="1100" dirty="0"/>
+          </a:p>
+        </p:txBody>
+      </p:sp>
+      <p:sp>
+        <p:nvSpPr>
+          <p:cNvPr id="7" name="Text 5"/>
+          <p:cNvSpPr/>
+          <p:nvPr/>
+        </p:nvSpPr>
+        <p:spPr>
+          <a:xfrm>
+            <a:off x="457200" y="3703320"/>
+            <a:ext cx="8229600" cy="365760"/>
           </a:xfrm>
           <a:prstGeom prst="rect">
             <a:avLst/>
@@ -22643,42 +22775,58 @@
           <a:ln/>
         </p:spPr>
         <p:txBody>
-          <a:bodyPr wrap="square" rtlCol="0" anchor="ctr"/>
-          <a:lstStyle/>
-          <a:p>
-            <a:pPr indent="0" marL="0">
-              <a:buNone/>
-            </a:pPr>
-            <a:r>
-              <a:rPr lang="en-US" sz="900" b="1" dirty="0">
-                <a:solidFill>
-                  <a:srgbClr val="FF6B6B"/>
-                </a:solidFill>
-                <a:latin typeface="Inter" pitchFamily="34" charset="0"/>
-                <a:ea typeface="Inter" pitchFamily="34" charset="-122"/>
-                <a:cs typeface="Inter" pitchFamily="34" charset="-120"/>
-              </a:rPr>
-              <a:t>AUTHOR NOTES (delete before presenting):</a:t>
-            </a:r>
-            <a:endParaRPr lang="en-US" sz="900" dirty="0"/>
-          </a:p>
-        </p:txBody>
-      </p:sp>
-      <p:sp>
-        <p:nvSpPr>
-          <p:cNvPr id="7" name="Text 5"/>
-          <p:cNvSpPr/>
-          <p:nvPr/>
-        </p:nvSpPr>
-        <p:spPr>
-          <a:xfrm>
-            <a:off x="457200" y="4553712"/>
-            <a:ext cx="8229600" cy="164592"/>
-          </a:xfrm>
-          <a:prstGeom prst="rect">
-            <a:avLst/>
-          </a:prstGeom>
-          <a:noFill/>
+          <a:bodyPr wrap="square" rtlCol="0" anchor="t"/>
+          <a:lstStyle/>
+          <a:p>
+            <a:pPr indent="0" marL="0">
+              <a:buNone/>
+            </a:pPr>
+            <a:r>
+              <a:rPr lang="en-US" sz="2000" b="1" dirty="0">
+                <a:solidFill>
+                  <a:srgbClr val="1496FF"/>
+                </a:solidFill>
+                <a:latin typeface="Inter" pitchFamily="34" charset="0"/>
+                <a:ea typeface="Inter" pitchFamily="34" charset="-122"/>
+                <a:cs typeface="Inter" pitchFamily="34" charset="-120"/>
+              </a:rPr>
+              <a:t>Check throughput</a:t>
+            </a:r>
+            <a:pPr indent="0" marL="0">
+              <a:buNone/>
+            </a:pPr>
+            <a:r>
+              <a:rPr lang="en-US" sz="2000" dirty="0">
+                <a:solidFill>
+                  <a:srgbClr val="FFFFFF"/>
+                </a:solidFill>
+                <a:latin typeface="Inter" pitchFamily="34" charset="0"/>
+                <a:ea typeface="Inter" pitchFamily="34" charset="-122"/>
+                <a:cs typeface="Inter" pitchFamily="34" charset="-120"/>
+              </a:rPr>
+              <a:t> in BindPlane:</a:t>
+            </a:r>
+            <a:endParaRPr lang="en-US" sz="2000" dirty="0"/>
+          </a:p>
+        </p:txBody>
+      </p:sp>
+      <p:sp>
+        <p:nvSpPr>
+          <p:cNvPr id="8" name="Text 6"/>
+          <p:cNvSpPr/>
+          <p:nvPr/>
+        </p:nvSpPr>
+        <p:spPr>
+          <a:xfrm>
+            <a:off x="457200" y="4251960"/>
+            <a:ext cx="8229600" cy="502920"/>
+          </a:xfrm>
+          <a:prstGeom prst="rect">
+            <a:avLst/>
+          </a:prstGeom>
+          <a:solidFill>
+            <a:srgbClr val="141827"/>
+          </a:solidFill>
           <a:ln/>
         </p:spPr>
         <p:txBody>
@@ -22689,107 +22837,57 @@
               <a:buNone/>
             </a:pPr>
             <a:r>
-              <a:rPr lang="en-US" sz="900" b="1" dirty="0">
-                <a:solidFill>
-                  <a:srgbClr val="1496FF"/>
-                </a:solidFill>
-                <a:latin typeface="Inter" pitchFamily="34" charset="0"/>
-                <a:ea typeface="Inter" pitchFamily="34" charset="-122"/>
-                <a:cs typeface="Inter" pitchFamily="34" charset="-120"/>
-              </a:rPr>
-              <a:t>SCREENSHOT:</a:t>
-            </a:r>
-            <a:pPr indent="0" marL="0">
-              <a:buNone/>
-            </a:pPr>
-            <a:r>
-              <a:rPr lang="en-US" sz="900" dirty="0">
-                <a:solidFill>
-                  <a:srgbClr val="FFFFFF"/>
-                </a:solidFill>
-                <a:latin typeface="Inter" pitchFamily="34" charset="0"/>
-                <a:ea typeface="Inter" pitchFamily="34" charset="-122"/>
-                <a:cs typeface="Inter" pitchFamily="34" charset="-120"/>
-              </a:rPr>
-              <a:t> BindPlane &gt; Configurations &gt; astroshop-gateway</a:t>
-            </a:r>
-            <a:endParaRPr lang="en-US" sz="900" dirty="0"/>
-          </a:p>
-        </p:txBody>
-      </p:sp>
-      <p:sp>
-        <p:nvSpPr>
-          <p:cNvPr id="8" name="Text 6"/>
-          <p:cNvSpPr/>
-          <p:nvPr/>
-        </p:nvSpPr>
-        <p:spPr>
-          <a:xfrm>
-            <a:off x="457200" y="4773168"/>
-            <a:ext cx="8229600" cy="164592"/>
-          </a:xfrm>
-          <a:prstGeom prst="rect">
-            <a:avLst/>
-          </a:prstGeom>
-          <a:noFill/>
-          <a:ln/>
-        </p:spPr>
-        <p:txBody>
-          <a:bodyPr wrap="square" rtlCol="0" anchor="t"/>
-          <a:lstStyle/>
-          <a:p>
-            <a:pPr marL="342900" indent="-342900">
-              <a:buSzPct val="100000"/>
-              <a:buChar char="•"/>
-            </a:pPr>
-            <a:r>
-              <a:rPr lang="en-US" sz="900" dirty="0">
-                <a:solidFill>
-                  <a:srgbClr val="AAAAAA"/>
-                </a:solidFill>
-                <a:latin typeface="Inter" pitchFamily="34" charset="0"/>
-                <a:ea typeface="Inter" pitchFamily="34" charset="-122"/>
-                <a:cs typeface="Inter" pitchFamily="34" charset="-120"/>
-              </a:rPr>
-              <a:t>OTLP source on the left, Dynatrace on the right</a:t>
-            </a:r>
-            <a:endParaRPr lang="en-US" sz="900" dirty="0"/>
-          </a:p>
-          <a:p>
-            <a:pPr marL="342900" indent="-342900">
-              <a:buSzPct val="100000"/>
-              <a:buChar char="•"/>
-            </a:pPr>
-            <a:r>
-              <a:rPr lang="en-US" sz="900" dirty="0">
-                <a:solidFill>
-                  <a:srgbClr val="AAAAAA"/>
-                </a:solidFill>
-                <a:latin typeface="Inter" pitchFamily="34" charset="0"/>
-                <a:ea typeface="Inter" pitchFamily="34" charset="-122"/>
-                <a:cs typeface="Inter" pitchFamily="34" charset="-120"/>
-              </a:rPr>
-              <a:t>Live throughput bars showing data flow</a:t>
-            </a:r>
-            <a:endParaRPr lang="en-US" sz="900" dirty="0"/>
-          </a:p>
-          <a:p>
-            <a:pPr marL="342900" indent="-342900">
-              <a:buSzPct val="100000"/>
-              <a:buChar char="•"/>
-            </a:pPr>
-            <a:r>
-              <a:rPr lang="en-US" sz="900" dirty="0">
-                <a:solidFill>
-                  <a:srgbClr val="AAAAAA"/>
-                </a:solidFill>
-                <a:latin typeface="Inter" pitchFamily="34" charset="0"/>
-                <a:ea typeface="Inter" pitchFamily="34" charset="-122"/>
-                <a:cs typeface="Inter" pitchFamily="34" charset="-120"/>
-              </a:rPr>
-              <a:t>Key point: The YAML you wrote, visualized</a:t>
-            </a:r>
-            <a:endParaRPr lang="en-US" sz="900" dirty="0"/>
+              <a:rPr lang="en-US" sz="1100" dirty="0">
+                <a:solidFill>
+                  <a:srgbClr val="FFFFFF"/>
+                </a:solidFill>
+                <a:latin typeface="JetBrains Mono" pitchFamily="34" charset="0"/>
+                <a:ea typeface="JetBrains Mono" pitchFamily="34" charset="-122"/>
+                <a:cs typeface="JetBrains Mono" pitchFamily="34" charset="-120"/>
+              </a:rPr>
+              <a:t>$ bindplane get agents</a:t>
+            </a:r>
+            <a:endParaRPr lang="en-US" sz="1100" dirty="0"/>
+          </a:p>
+          <a:p>
+            <a:pPr indent="0" marL="0">
+              <a:buNone/>
+            </a:pPr>
+            <a:endParaRPr lang="en-US" sz="1100" dirty="0"/>
+          </a:p>
+          <a:p>
+            <a:pPr indent="0" marL="0">
+              <a:buNone/>
+            </a:pPr>
+            <a:r>
+              <a:rPr lang="en-US" sz="1100" dirty="0">
+                <a:solidFill>
+                  <a:srgbClr val="FFFFFF"/>
+                </a:solidFill>
+                <a:latin typeface="JetBrains Mono" pitchFamily="34" charset="0"/>
+                <a:ea typeface="JetBrains Mono" pitchFamily="34" charset="-122"/>
+                <a:cs typeface="JetBrains Mono" pitchFamily="34" charset="-120"/>
+              </a:rPr>
+              <a:t>NAME                        LOGS      METRICS    TRACES</a:t>
+            </a:r>
+            <a:endParaRPr lang="en-US" sz="1100" dirty="0"/>
+          </a:p>
+          <a:p>
+            <a:pPr indent="0" marL="0">
+              <a:buNone/>
+            </a:pPr>
+            <a:r>
+              <a:rPr lang="en-US" sz="1100" dirty="0">
+                <a:solidFill>
+                  <a:srgbClr val="FFFFFF"/>
+                </a:solidFill>
+                <a:latin typeface="JetBrains Mono" pitchFamily="34" charset="0"/>
+                <a:ea typeface="JetBrains Mono" pitchFamily="34" charset="-122"/>
+                <a:cs typeface="JetBrains Mono" pitchFamily="34" charset="-120"/>
+              </a:rPr>
+              <a:t>bindplane-gateway-agent-xx  2.5 MB/h  9.4 MB/h   4.6 MB/h</a:t>
+            </a:r>
+            <a:endParaRPr lang="en-US" sz="1100" dirty="0"/>
           </a:p>
         </p:txBody>
       </p:sp>
@@ -22826,8 +22924,8 @@
         </p:nvSpPr>
         <p:spPr>
           <a:xfrm>
-            <a:off x="457200" y="2011680"/>
-            <a:ext cx="8229600" cy="914400"/>
+            <a:off x="457200" y="457200"/>
+            <a:ext cx="8229600" cy="640080"/>
           </a:xfrm>
           <a:prstGeom prst="rect">
             <a:avLst/>
@@ -22839,21 +22937,21 @@
           <a:bodyPr wrap="square" rtlCol="0" anchor="ctr"/>
           <a:lstStyle/>
           <a:p>
-            <a:pPr algn="ctr" indent="0" marL="0">
-              <a:buNone/>
-            </a:pPr>
-            <a:r>
-              <a:rPr lang="en-US" sz="4000" b="1" dirty="0">
-                <a:solidFill>
-                  <a:srgbClr val="FFFFFF"/>
-                </a:solidFill>
-                <a:latin typeface="Inter" pitchFamily="34" charset="0"/>
-                <a:ea typeface="Inter" pitchFamily="34" charset="-122"/>
-                <a:cs typeface="Inter" pitchFamily="34" charset="-120"/>
-              </a:rPr>
-              <a:t>Debugging</a:t>
-            </a:r>
-            <a:endParaRPr lang="en-US" sz="4000" dirty="0"/>
+            <a:pPr indent="0" marL="0">
+              <a:buNone/>
+            </a:pPr>
+            <a:r>
+              <a:rPr lang="en-US" sz="3600" b="1" dirty="0">
+                <a:solidFill>
+                  <a:srgbClr val="FFFFFF"/>
+                </a:solidFill>
+                <a:latin typeface="Inter" pitchFamily="34" charset="0"/>
+                <a:ea typeface="Inter" pitchFamily="34" charset="-122"/>
+                <a:cs typeface="Inter" pitchFamily="34" charset="-120"/>
+              </a:rPr>
+              <a:t>Lab 6: Confirm in Dynatrace</a:t>
+            </a:r>
+            <a:endParaRPr lang="en-US" sz="3600" dirty="0"/>
           </a:p>
         </p:txBody>
       </p:sp>
@@ -22865,8 +22963,8 @@
         </p:nvSpPr>
         <p:spPr>
           <a:xfrm>
-            <a:off x="1828800" y="3017520"/>
-            <a:ext cx="5486400" cy="54864"/>
+            <a:off x="457200" y="1188720"/>
+            <a:ext cx="4114800" cy="54864"/>
           </a:xfrm>
           <a:prstGeom prst="rect">
             <a:avLst/>
@@ -22874,19 +22972,49 @@
           <a:solidFill>
             <a:srgbClr val="1496FF"/>
           </a:solidFill>
-          <a:ln/>
-        </p:spPr>
-      </p:sp>
-      <p:sp>
-        <p:nvSpPr>
-          <p:cNvPr id="4" name="Text 2"/>
-          <p:cNvSpPr/>
-          <p:nvPr/>
-        </p:nvSpPr>
-        <p:spPr>
-          <a:xfrm>
-            <a:off x="457200" y="3291840"/>
-            <a:ext cx="8229600" cy="548640"/>
+          <a:ln w="12700">
+            <a:solidFill>
+              <a:srgbClr val="1496FF"/>
+            </a:solidFill>
+            <a:prstDash val="solid"/>
+          </a:ln>
+        </p:spPr>
+      </p:sp>
+      <p:sp>
+        <p:nvSpPr>
+          <p:cNvPr id="4" name="Shape 2"/>
+          <p:cNvSpPr/>
+          <p:nvPr/>
+        </p:nvSpPr>
+        <p:spPr>
+          <a:xfrm>
+            <a:off x="4572000" y="1188720"/>
+            <a:ext cx="4114800" cy="54864"/>
+          </a:xfrm>
+          <a:prstGeom prst="rect">
+            <a:avLst/>
+          </a:prstGeom>
+          <a:solidFill>
+            <a:srgbClr val="6366F1"/>
+          </a:solidFill>
+          <a:ln w="12700">
+            <a:solidFill>
+              <a:srgbClr val="6366F1"/>
+            </a:solidFill>
+            <a:prstDash val="solid"/>
+          </a:ln>
+        </p:spPr>
+      </p:sp>
+      <p:sp>
+        <p:nvSpPr>
+          <p:cNvPr id="5" name="Text 3"/>
+          <p:cNvSpPr/>
+          <p:nvPr/>
+        </p:nvSpPr>
+        <p:spPr>
+          <a:xfrm>
+            <a:off x="457200" y="1463040"/>
+            <a:ext cx="8229600" cy="585216"/>
           </a:xfrm>
           <a:prstGeom prst="rect">
             <a:avLst/>
@@ -22895,10 +23023,148 @@
           <a:ln/>
         </p:spPr>
         <p:txBody>
-          <a:bodyPr wrap="square" rtlCol="0" anchor="ctr"/>
-          <a:lstStyle/>
-          <a:p>
-            <a:pPr algn="ctr" indent="0" marL="0">
+          <a:bodyPr wrap="square" rtlCol="0" anchor="t"/>
+          <a:lstStyle/>
+          <a:p>
+            <a:pPr indent="0" marL="0">
+              <a:buNone/>
+            </a:pPr>
+            <a:r>
+              <a:rPr lang="en-US" sz="2000" dirty="0">
+                <a:solidFill>
+                  <a:srgbClr val="FFFFFF"/>
+                </a:solidFill>
+                <a:latin typeface="Inter" pitchFamily="34" charset="0"/>
+                <a:ea typeface="Inter" pitchFamily="34" charset="-122"/>
+                <a:cs typeface="Inter" pitchFamily="34" charset="-120"/>
+              </a:rPr>
+              <a:t>Open your Dynatrace environment and find data from the Astronomy Shop:</a:t>
+            </a:r>
+            <a:endParaRPr lang="en-US" sz="2000" dirty="0"/>
+          </a:p>
+        </p:txBody>
+      </p:sp>
+      <p:sp>
+        <p:nvSpPr>
+          <p:cNvPr id="6" name="Text 4"/>
+          <p:cNvSpPr/>
+          <p:nvPr/>
+        </p:nvSpPr>
+        <p:spPr>
+          <a:xfrm>
+            <a:off x="457200" y="2231136"/>
+            <a:ext cx="8229600" cy="1234440"/>
+          </a:xfrm>
+          <a:prstGeom prst="rect">
+            <a:avLst/>
+          </a:prstGeom>
+          <a:noFill/>
+          <a:ln/>
+        </p:spPr>
+        <p:txBody>
+          <a:bodyPr wrap="square" rtlCol="0" anchor="t"/>
+          <a:lstStyle/>
+          <a:p>
+            <a:pPr marL="342900" indent="-342900">
+              <a:lnSpc>
+                <a:spcPct val="120000"/>
+              </a:lnSpc>
+              <a:buSzPct val="100000"/>
+              <a:buChar char="•"/>
+            </a:pPr>
+            <a:r>
+              <a:rPr lang="en-US" sz="2200" dirty="0">
+                <a:solidFill>
+                  <a:srgbClr val="FFFFFF"/>
+                </a:solidFill>
+                <a:latin typeface="Inter" pitchFamily="34" charset="0"/>
+                <a:ea typeface="Inter" pitchFamily="34" charset="-122"/>
+                <a:cs typeface="Inter" pitchFamily="34" charset="-120"/>
+              </a:rPr>
+              <a:t>Traces: Distributed Traces, filter by service frontend or checkout</a:t>
+            </a:r>
+            <a:endParaRPr lang="en-US" sz="2200" dirty="0"/>
+          </a:p>
+          <a:p>
+            <a:pPr marL="342900" indent="-342900">
+              <a:lnSpc>
+                <a:spcPct val="120000"/>
+              </a:lnSpc>
+              <a:buSzPct val="100000"/>
+              <a:buChar char="•"/>
+            </a:pPr>
+            <a:r>
+              <a:rPr lang="en-US" sz="2200" dirty="0">
+                <a:solidFill>
+                  <a:srgbClr val="FFFFFF"/>
+                </a:solidFill>
+                <a:latin typeface="Inter" pitchFamily="34" charset="0"/>
+                <a:ea typeface="Inter" pitchFamily="34" charset="-122"/>
+                <a:cs typeface="Inter" pitchFamily="34" charset="-120"/>
+              </a:rPr>
+              <a:t>Metrics: Data Explorer, filter by k8s.namespace.name=astroshop</a:t>
+            </a:r>
+            <a:endParaRPr lang="en-US" sz="2200" dirty="0"/>
+          </a:p>
+          <a:p>
+            <a:pPr marL="342900" indent="-342900">
+              <a:lnSpc>
+                <a:spcPct val="120000"/>
+              </a:lnSpc>
+              <a:buSzPct val="100000"/>
+              <a:buChar char="•"/>
+            </a:pPr>
+            <a:r>
+              <a:rPr lang="en-US" sz="2200" dirty="0">
+                <a:solidFill>
+                  <a:srgbClr val="FFFFFF"/>
+                </a:solidFill>
+                <a:latin typeface="Inter" pitchFamily="34" charset="0"/>
+                <a:ea typeface="Inter" pitchFamily="34" charset="-122"/>
+                <a:cs typeface="Inter" pitchFamily="34" charset="-120"/>
+              </a:rPr>
+              <a:t>Logs: Logs &amp; Events, filter by k8s.namespace.name=astroshop</a:t>
+            </a:r>
+            <a:endParaRPr lang="en-US" sz="2200" dirty="0"/>
+          </a:p>
+        </p:txBody>
+      </p:sp>
+      <p:sp>
+        <p:nvSpPr>
+          <p:cNvPr id="7" name="Text 5"/>
+          <p:cNvSpPr/>
+          <p:nvPr/>
+        </p:nvSpPr>
+        <p:spPr>
+          <a:xfrm>
+            <a:off x="457200" y="3602736"/>
+            <a:ext cx="8229600" cy="877824"/>
+          </a:xfrm>
+          <a:prstGeom prst="rect">
+            <a:avLst/>
+          </a:prstGeom>
+          <a:noFill/>
+          <a:ln/>
+        </p:spPr>
+        <p:txBody>
+          <a:bodyPr wrap="square" rtlCol="0" anchor="t"/>
+          <a:lstStyle/>
+          <a:p>
+            <a:pPr indent="0" marL="0">
+              <a:buNone/>
+            </a:pPr>
+            <a:r>
+              <a:rPr lang="en-US" sz="2000" dirty="0">
+                <a:solidFill>
+                  <a:srgbClr val="FFFFFF"/>
+                </a:solidFill>
+                <a:latin typeface="Inter" pitchFamily="34" charset="0"/>
+                <a:ea typeface="Inter" pitchFamily="34" charset="-122"/>
+                <a:cs typeface="Inter" pitchFamily="34" charset="-120"/>
+              </a:rPr>
+              <a:t>If each view shows data, the pipeline from app to gateway to Dynatrace is end-to-end live. </a:t>
+            </a:r>
+            <a:pPr indent="0" marL="0">
               <a:buNone/>
             </a:pPr>
             <a:r>
@@ -22910,7 +23176,7 @@
                 <a:ea typeface="Inter" pitchFamily="34" charset="-122"/>
                 <a:cs typeface="Inter" pitchFamily="34" charset="-120"/>
               </a:rPr>
-              <a:t>What happens when things go wrong</a:t>
+              <a:t>That's the goal this primer set out to reach.</a:t>
             </a:r>
             <a:endParaRPr lang="en-US" sz="2000" dirty="0"/>
           </a:p>
@@ -22949,8 +23215,8 @@
         </p:nvSpPr>
         <p:spPr>
           <a:xfrm>
-            <a:off x="457200" y="457200"/>
-            <a:ext cx="8229600" cy="640080"/>
+            <a:off x="457200" y="274320"/>
+            <a:ext cx="8229600" cy="548640"/>
           </a:xfrm>
           <a:prstGeom prst="rect">
             <a:avLst/>
@@ -22966,17 +23232,17 @@
               <a:buNone/>
             </a:pPr>
             <a:r>
-              <a:rPr lang="en-US" sz="3600" b="1" dirty="0">
-                <a:solidFill>
-                  <a:srgbClr val="FFFFFF"/>
-                </a:solidFill>
-                <a:latin typeface="Inter" pitchFamily="34" charset="0"/>
-                <a:ea typeface="Inter" pitchFamily="34" charset="-122"/>
-                <a:cs typeface="Inter" pitchFamily="34" charset="-120"/>
-              </a:rPr>
-              <a:t>A Real Rollout Failure</a:t>
-            </a:r>
-            <a:endParaRPr lang="en-US" sz="3600" dirty="0"/>
+              <a:rPr lang="en-US" sz="2800" b="1" dirty="0">
+                <a:solidFill>
+                  <a:srgbClr val="FFFFFF"/>
+                </a:solidFill>
+                <a:latin typeface="Inter" pitchFamily="34" charset="0"/>
+                <a:ea typeface="Inter" pitchFamily="34" charset="-122"/>
+                <a:cs typeface="Inter" pitchFamily="34" charset="-120"/>
+              </a:rPr>
+              <a:t>Verify the Pipeline</a:t>
+            </a:r>
+            <a:endParaRPr lang="en-US" sz="2800" dirty="0"/>
           </a:p>
         </p:txBody>
       </p:sp>
@@ -22988,58 +23254,53 @@
         </p:nvSpPr>
         <p:spPr>
           <a:xfrm>
-            <a:off x="457200" y="1188720"/>
-            <a:ext cx="4114800" cy="54864"/>
+            <a:off x="457200" y="868680"/>
+            <a:ext cx="8229600" cy="36576"/>
           </a:xfrm>
           <a:prstGeom prst="rect">
             <a:avLst/>
           </a:prstGeom>
           <a:solidFill>
             <a:srgbClr val="1496FF"/>
+          </a:solidFill>
+          <a:ln/>
+        </p:spPr>
+      </p:sp>
+      <p:sp>
+        <p:nvSpPr>
+          <p:cNvPr id="4" name="Shape 2"/>
+          <p:cNvSpPr/>
+          <p:nvPr/>
+        </p:nvSpPr>
+        <p:spPr>
+          <a:xfrm>
+            <a:off x="457200" y="1005840"/>
+            <a:ext cx="8229600" cy="3108960"/>
+          </a:xfrm>
+          <a:prstGeom prst="rect">
+            <a:avLst/>
+          </a:prstGeom>
+          <a:solidFill>
+            <a:srgbClr val="141827"/>
           </a:solidFill>
           <a:ln w="12700">
             <a:solidFill>
               <a:srgbClr val="1496FF"/>
             </a:solidFill>
-            <a:prstDash val="solid"/>
+            <a:prstDash val="dash"/>
           </a:ln>
         </p:spPr>
       </p:sp>
       <p:sp>
         <p:nvSpPr>
-          <p:cNvPr id="4" name="Shape 2"/>
-          <p:cNvSpPr/>
-          <p:nvPr/>
-        </p:nvSpPr>
-        <p:spPr>
-          <a:xfrm>
-            <a:off x="4572000" y="1188720"/>
-            <a:ext cx="4114800" cy="54864"/>
-          </a:xfrm>
-          <a:prstGeom prst="rect">
-            <a:avLst/>
-          </a:prstGeom>
-          <a:solidFill>
-            <a:srgbClr val="6366F1"/>
-          </a:solidFill>
-          <a:ln w="12700">
-            <a:solidFill>
-              <a:srgbClr val="6366F1"/>
-            </a:solidFill>
-            <a:prstDash val="solid"/>
-          </a:ln>
-        </p:spPr>
-      </p:sp>
-      <p:sp>
-        <p:nvSpPr>
           <p:cNvPr id="5" name="Text 3"/>
           <p:cNvSpPr/>
           <p:nvPr/>
         </p:nvSpPr>
         <p:spPr>
           <a:xfrm>
-            <a:off x="457200" y="1463040"/>
-            <a:ext cx="8229600" cy="365760"/>
+            <a:off x="457200" y="2286000"/>
+            <a:ext cx="8229600" cy="548640"/>
           </a:xfrm>
           <a:prstGeom prst="rect">
             <a:avLst/>
@@ -23048,22 +23309,22 @@
           <a:ln/>
         </p:spPr>
         <p:txBody>
-          <a:bodyPr wrap="square" rtlCol="0" anchor="t"/>
-          <a:lstStyle/>
-          <a:p>
-            <a:pPr indent="0" marL="0">
-              <a:buNone/>
-            </a:pPr>
-            <a:r>
-              <a:rPr lang="en-US" sz="2000" dirty="0">
-                <a:solidFill>
-                  <a:srgbClr val="FFFFFF"/>
-                </a:solidFill>
-                <a:latin typeface="Inter" pitchFamily="34" charset="0"/>
-                <a:ea typeface="Inter" pitchFamily="34" charset="-122"/>
-                <a:cs typeface="Inter" pitchFamily="34" charset="-120"/>
-              </a:rPr>
-              <a:t>After rolling out the node config, we saw this:</a:t>
+          <a:bodyPr wrap="square" rtlCol="0" anchor="ctr"/>
+          <a:lstStyle/>
+          <a:p>
+            <a:pPr algn="ctr" indent="0" marL="0">
+              <a:buNone/>
+            </a:pPr>
+            <a:r>
+              <a:rPr lang="en-US" sz="2000" b="1" dirty="0">
+                <a:solidFill>
+                  <a:srgbClr val="1496FF"/>
+                </a:solidFill>
+                <a:latin typeface="Inter" pitchFamily="34" charset="0"/>
+                <a:ea typeface="Inter" pitchFamily="34" charset="-122"/>
+                <a:cs typeface="Inter" pitchFamily="34" charset="-120"/>
+              </a:rPr>
+              <a:t>[ INSERT SCREENSHOT HERE ]</a:t>
             </a:r>
             <a:endParaRPr lang="en-US" sz="2000" dirty="0"/>
           </a:p>
@@ -23077,89 +23338,8 @@
         </p:nvSpPr>
         <p:spPr>
           <a:xfrm>
-            <a:off x="457200" y="2011680"/>
-            <a:ext cx="8229600" cy="1097280"/>
-          </a:xfrm>
-          <a:prstGeom prst="rect">
-            <a:avLst/>
-          </a:prstGeom>
-          <a:solidFill>
-            <a:srgbClr val="141827"/>
-          </a:solidFill>
-          <a:ln/>
-        </p:spPr>
-        <p:txBody>
-          <a:bodyPr wrap="square" rtlCol="0" anchor="t"/>
-          <a:lstStyle/>
-          <a:p>
-            <a:pPr indent="0" marL="0">
-              <a:buNone/>
-            </a:pPr>
-            <a:r>
-              <a:rPr lang="en-US" sz="1100" dirty="0">
-                <a:solidFill>
-                  <a:srgbClr val="FFFFFF"/>
-                </a:solidFill>
-                <a:latin typeface="JetBrains Mono" pitchFamily="34" charset="0"/>
-                <a:ea typeface="JetBrains Mono" pitchFamily="34" charset="-122"/>
-                <a:cs typeface="JetBrains Mono" pitchFamily="34" charset="-120"/>
-              </a:rPr>
-              <a:t>$ bindplane rollout status astroshop-node</a:t>
-            </a:r>
-            <a:endParaRPr lang="en-US" sz="1100" dirty="0"/>
-          </a:p>
-          <a:p>
-            <a:pPr indent="0" marL="0">
-              <a:buNone/>
-            </a:pPr>
-            <a:endParaRPr lang="en-US" sz="1100" dirty="0"/>
-          </a:p>
-          <a:p>
-            <a:pPr indent="0" marL="0">
-              <a:buNone/>
-            </a:pPr>
-            <a:r>
-              <a:rPr lang="en-US" sz="1100" dirty="0">
-                <a:solidFill>
-                  <a:srgbClr val="FFFFFF"/>
-                </a:solidFill>
-                <a:latin typeface="JetBrains Mono" pitchFamily="34" charset="0"/>
-                <a:ea typeface="JetBrains Mono" pitchFamily="34" charset="-122"/>
-                <a:cs typeface="JetBrains Mono" pitchFamily="34" charset="-120"/>
-              </a:rPr>
-              <a:t>NAME              STATUS  COMPLETED  ERRORS  PENDING</a:t>
-            </a:r>
-            <a:endParaRPr lang="en-US" sz="1100" dirty="0"/>
-          </a:p>
-          <a:p>
-            <a:pPr indent="0" marL="0">
-              <a:buNone/>
-            </a:pPr>
-            <a:r>
-              <a:rPr lang="en-US" sz="1100" dirty="0">
-                <a:solidFill>
-                  <a:srgbClr val="FFFFFF"/>
-                </a:solidFill>
-                <a:latin typeface="JetBrains Mono" pitchFamily="34" charset="0"/>
-                <a:ea typeface="JetBrains Mono" pitchFamily="34" charset="-122"/>
-                <a:cs typeface="JetBrains Mono" pitchFamily="34" charset="-120"/>
-              </a:rPr>
-              <a:t>astroshop-node:1  Error   0          1       2</a:t>
-            </a:r>
-            <a:endParaRPr lang="en-US" sz="1100" dirty="0"/>
-          </a:p>
-        </p:txBody>
-      </p:sp>
-      <p:sp>
-        <p:nvSpPr>
-          <p:cNvPr id="7" name="Text 5"/>
-          <p:cNvSpPr/>
-          <p:nvPr/>
-        </p:nvSpPr>
-        <p:spPr>
-          <a:xfrm>
-            <a:off x="457200" y="3246120"/>
-            <a:ext cx="8229600" cy="585216"/>
+            <a:off x="457200" y="4297680"/>
+            <a:ext cx="8229600" cy="228600"/>
           </a:xfrm>
           <a:prstGeom prst="rect">
             <a:avLst/>
@@ -23168,6 +23348,45 @@
           <a:ln/>
         </p:spPr>
         <p:txBody>
+          <a:bodyPr wrap="square" rtlCol="0" anchor="ctr"/>
+          <a:lstStyle/>
+          <a:p>
+            <a:pPr indent="0" marL="0">
+              <a:buNone/>
+            </a:pPr>
+            <a:r>
+              <a:rPr lang="en-US" sz="900" b="1" dirty="0">
+                <a:solidFill>
+                  <a:srgbClr val="FF6B6B"/>
+                </a:solidFill>
+                <a:latin typeface="Inter" pitchFamily="34" charset="0"/>
+                <a:ea typeface="Inter" pitchFamily="34" charset="-122"/>
+                <a:cs typeface="Inter" pitchFamily="34" charset="-120"/>
+              </a:rPr>
+              <a:t>AUTHOR NOTES (delete before presenting):</a:t>
+            </a:r>
+            <a:endParaRPr lang="en-US" sz="900" dirty="0"/>
+          </a:p>
+        </p:txBody>
+      </p:sp>
+      <p:sp>
+        <p:nvSpPr>
+          <p:cNvPr id="7" name="Text 5"/>
+          <p:cNvSpPr/>
+          <p:nvPr/>
+        </p:nvSpPr>
+        <p:spPr>
+          <a:xfrm>
+            <a:off x="457200" y="4553712"/>
+            <a:ext cx="8229600" cy="164592"/>
+          </a:xfrm>
+          <a:prstGeom prst="rect">
+            <a:avLst/>
+          </a:prstGeom>
+          <a:noFill/>
+          <a:ln/>
+        </p:spPr>
+        <p:txBody>
           <a:bodyPr wrap="square" rtlCol="0" anchor="t"/>
           <a:lstStyle/>
           <a:p>
@@ -23175,21 +23394,7 @@
               <a:buNone/>
             </a:pPr>
             <a:r>
-              <a:rPr lang="en-US" sz="2000" dirty="0">
-                <a:solidFill>
-                  <a:srgbClr val="FFFFFF"/>
-                </a:solidFill>
-                <a:latin typeface="Inter" pitchFamily="34" charset="0"/>
-                <a:ea typeface="Inter" pitchFamily="34" charset="-122"/>
-                <a:cs typeface="Inter" pitchFamily="34" charset="-120"/>
-              </a:rPr>
-              <a:t>One agent rejected the config. Two were held back. The CLI shows the count, but not </a:t>
-            </a:r>
-            <a:pPr indent="0" marL="0">
-              <a:buNone/>
-            </a:pPr>
-            <a:r>
-              <a:rPr lang="en-US" sz="2000" b="1" dirty="0">
+              <a:rPr lang="en-US" sz="900" b="1" dirty="0">
                 <a:solidFill>
                   <a:srgbClr val="1496FF"/>
                 </a:solidFill>
@@ -23197,23 +23402,99 @@
                 <a:ea typeface="Inter" pitchFamily="34" charset="-122"/>
                 <a:cs typeface="Inter" pitchFamily="34" charset="-120"/>
               </a:rPr>
-              <a:t>what</a:t>
-            </a:r>
-            <a:pPr indent="0" marL="0">
-              <a:buNone/>
-            </a:pPr>
-            <a:r>
-              <a:rPr lang="en-US" sz="2000" dirty="0">
-                <a:solidFill>
-                  <a:srgbClr val="FFFFFF"/>
-                </a:solidFill>
-                <a:latin typeface="Inter" pitchFamily="34" charset="0"/>
-                <a:ea typeface="Inter" pitchFamily="34" charset="-122"/>
-                <a:cs typeface="Inter" pitchFamily="34" charset="-120"/>
-              </a:rPr>
-              <a:t> went wrong.</a:t>
-            </a:r>
-            <a:endParaRPr lang="en-US" sz="2000" dirty="0"/>
+              <a:t>SCREENSHOT:</a:t>
+            </a:r>
+            <a:pPr indent="0" marL="0">
+              <a:buNone/>
+            </a:pPr>
+            <a:r>
+              <a:rPr lang="en-US" sz="900" dirty="0">
+                <a:solidFill>
+                  <a:srgbClr val="FFFFFF"/>
+                </a:solidFill>
+                <a:latin typeface="Inter" pitchFamily="34" charset="0"/>
+                <a:ea typeface="Inter" pitchFamily="34" charset="-122"/>
+                <a:cs typeface="Inter" pitchFamily="34" charset="-120"/>
+              </a:rPr>
+              <a:t> BindPlane &gt; Configurations &gt; astroshop-gateway</a:t>
+            </a:r>
+            <a:endParaRPr lang="en-US" sz="900" dirty="0"/>
+          </a:p>
+        </p:txBody>
+      </p:sp>
+      <p:sp>
+        <p:nvSpPr>
+          <p:cNvPr id="8" name="Text 6"/>
+          <p:cNvSpPr/>
+          <p:nvPr/>
+        </p:nvSpPr>
+        <p:spPr>
+          <a:xfrm>
+            <a:off x="457200" y="4773168"/>
+            <a:ext cx="8229600" cy="164592"/>
+          </a:xfrm>
+          <a:prstGeom prst="rect">
+            <a:avLst/>
+          </a:prstGeom>
+          <a:noFill/>
+          <a:ln/>
+        </p:spPr>
+        <p:txBody>
+          <a:bodyPr wrap="square" rtlCol="0" anchor="t"/>
+          <a:lstStyle/>
+          <a:p>
+            <a:pPr marL="342900" indent="-342900">
+              <a:buSzPct val="100000"/>
+              <a:buChar char="•"/>
+            </a:pPr>
+            <a:r>
+              <a:rPr lang="en-US" sz="900" dirty="0">
+                <a:solidFill>
+                  <a:srgbClr val="AAAAAA"/>
+                </a:solidFill>
+                <a:latin typeface="Inter" pitchFamily="34" charset="0"/>
+                <a:ea typeface="Inter" pitchFamily="34" charset="-122"/>
+                <a:cs typeface="Inter" pitchFamily="34" charset="-120"/>
+              </a:rPr>
+              <a:t>OTLP source on the left, Dynatrace on the right</a:t>
+            </a:r>
+            <a:endParaRPr lang="en-US" sz="900" dirty="0"/>
+          </a:p>
+          <a:p>
+            <a:pPr marL="342900" indent="-342900">
+              <a:buSzPct val="100000"/>
+              <a:buChar char="•"/>
+            </a:pPr>
+            <a:r>
+              <a:rPr lang="en-US" sz="900" dirty="0">
+                <a:solidFill>
+                  <a:srgbClr val="AAAAAA"/>
+                </a:solidFill>
+                <a:latin typeface="Inter" pitchFamily="34" charset="0"/>
+                <a:ea typeface="Inter" pitchFamily="34" charset="-122"/>
+                <a:cs typeface="Inter" pitchFamily="34" charset="-120"/>
+              </a:rPr>
+              <a:t>Live throughput bars showing data flow</a:t>
+            </a:r>
+            <a:endParaRPr lang="en-US" sz="900" dirty="0"/>
+          </a:p>
+          <a:p>
+            <a:pPr marL="342900" indent="-342900">
+              <a:buSzPct val="100000"/>
+              <a:buChar char="•"/>
+            </a:pPr>
+            <a:r>
+              <a:rPr lang="en-US" sz="900" dirty="0">
+                <a:solidFill>
+                  <a:srgbClr val="AAAAAA"/>
+                </a:solidFill>
+                <a:latin typeface="Inter" pitchFamily="34" charset="0"/>
+                <a:ea typeface="Inter" pitchFamily="34" charset="-122"/>
+                <a:cs typeface="Inter" pitchFamily="34" charset="-120"/>
+              </a:rPr>
+              <a:t>Key point: The YAML you wrote, visualized</a:t>
+            </a:r>
+            <a:endParaRPr lang="en-US" sz="900" dirty="0"/>
           </a:p>
         </p:txBody>
       </p:sp>
@@ -23250,8 +23531,8 @@
         </p:nvSpPr>
         <p:spPr>
           <a:xfrm>
-            <a:off x="457200" y="457200"/>
-            <a:ext cx="8229600" cy="640080"/>
+            <a:off x="457200" y="2011680"/>
+            <a:ext cx="8229600" cy="914400"/>
           </a:xfrm>
           <a:prstGeom prst="rect">
             <a:avLst/>
@@ -23263,21 +23544,21 @@
           <a:bodyPr wrap="square" rtlCol="0" anchor="ctr"/>
           <a:lstStyle/>
           <a:p>
-            <a:pPr indent="0" marL="0">
-              <a:buNone/>
-            </a:pPr>
-            <a:r>
-              <a:rPr lang="en-US" sz="3600" b="1" dirty="0">
-                <a:solidFill>
-                  <a:srgbClr val="FFFFFF"/>
-                </a:solidFill>
-                <a:latin typeface="Inter" pitchFamily="34" charset="0"/>
-                <a:ea typeface="Inter" pitchFamily="34" charset="-122"/>
-                <a:cs typeface="Inter" pitchFamily="34" charset="-120"/>
-              </a:rPr>
-              <a:t>Finding the Error</a:t>
-            </a:r>
-            <a:endParaRPr lang="en-US" sz="3600" dirty="0"/>
+            <a:pPr algn="ctr" indent="0" marL="0">
+              <a:buNone/>
+            </a:pPr>
+            <a:r>
+              <a:rPr lang="en-US" sz="4000" b="1" dirty="0">
+                <a:solidFill>
+                  <a:srgbClr val="FFFFFF"/>
+                </a:solidFill>
+                <a:latin typeface="Inter" pitchFamily="34" charset="0"/>
+                <a:ea typeface="Inter" pitchFamily="34" charset="-122"/>
+                <a:cs typeface="Inter" pitchFamily="34" charset="-120"/>
+              </a:rPr>
+              <a:t>Takeaways</a:t>
+            </a:r>
+            <a:endParaRPr lang="en-US" sz="4000" dirty="0"/>
           </a:p>
         </p:txBody>
       </p:sp>
@@ -23289,8 +23570,8 @@
         </p:nvSpPr>
         <p:spPr>
           <a:xfrm>
-            <a:off x="457200" y="1188720"/>
-            <a:ext cx="4114800" cy="54864"/>
+            <a:off x="1828800" y="3017520"/>
+            <a:ext cx="5486400" cy="54864"/>
           </a:xfrm>
           <a:prstGeom prst="rect">
             <a:avLst/>
@@ -23298,250 +23579,8 @@
           <a:solidFill>
             <a:srgbClr val="1496FF"/>
           </a:solidFill>
-          <a:ln w="12700">
-            <a:solidFill>
-              <a:srgbClr val="1496FF"/>
-            </a:solidFill>
-            <a:prstDash val="solid"/>
-          </a:ln>
-        </p:spPr>
-      </p:sp>
-      <p:sp>
-        <p:nvSpPr>
-          <p:cNvPr id="4" name="Shape 2"/>
-          <p:cNvSpPr/>
-          <p:nvPr/>
-        </p:nvSpPr>
-        <p:spPr>
-          <a:xfrm>
-            <a:off x="4572000" y="1188720"/>
-            <a:ext cx="4114800" cy="54864"/>
-          </a:xfrm>
-          <a:prstGeom prst="rect">
-            <a:avLst/>
-          </a:prstGeom>
-          <a:solidFill>
-            <a:srgbClr val="6366F1"/>
-          </a:solidFill>
-          <a:ln w="12700">
-            <a:solidFill>
-              <a:srgbClr val="6366F1"/>
-            </a:solidFill>
-            <a:prstDash val="solid"/>
-          </a:ln>
-        </p:spPr>
-      </p:sp>
-      <p:sp>
-        <p:nvSpPr>
-          <p:cNvPr id="5" name="Text 3"/>
-          <p:cNvSpPr/>
-          <p:nvPr/>
-        </p:nvSpPr>
-        <p:spPr>
-          <a:xfrm>
-            <a:off x="457200" y="1463040"/>
-            <a:ext cx="8229600" cy="365760"/>
-          </a:xfrm>
-          <a:prstGeom prst="rect">
-            <a:avLst/>
-          </a:prstGeom>
-          <a:noFill/>
           <a:ln/>
         </p:spPr>
-        <p:txBody>
-          <a:bodyPr wrap="square" rtlCol="0" anchor="t"/>
-          <a:lstStyle/>
-          <a:p>
-            <a:pPr indent="0" marL="0">
-              <a:buNone/>
-            </a:pPr>
-            <a:r>
-              <a:rPr lang="en-US" sz="2000" dirty="0">
-                <a:solidFill>
-                  <a:srgbClr val="FFFFFF"/>
-                </a:solidFill>
-                <a:latin typeface="Inter" pitchFamily="34" charset="0"/>
-                <a:ea typeface="Inter" pitchFamily="34" charset="-122"/>
-                <a:cs typeface="Inter" pitchFamily="34" charset="-120"/>
-              </a:rPr>
-              <a:t>We checked the pod logs:</a:t>
-            </a:r>
-            <a:endParaRPr lang="en-US" sz="2000" dirty="0"/>
-          </a:p>
-        </p:txBody>
-      </p:sp>
-      <p:sp>
-        <p:nvSpPr>
-          <p:cNvPr id="6" name="Text 4"/>
-          <p:cNvSpPr/>
-          <p:nvPr/>
-        </p:nvSpPr>
-        <p:spPr>
-          <a:xfrm>
-            <a:off x="457200" y="2011680"/>
-            <a:ext cx="8229600" cy="1097280"/>
-          </a:xfrm>
-          <a:prstGeom prst="rect">
-            <a:avLst/>
-          </a:prstGeom>
-          <a:solidFill>
-            <a:srgbClr val="141827"/>
-          </a:solidFill>
-          <a:ln/>
-        </p:spPr>
-        <p:txBody>
-          <a:bodyPr wrap="square" rtlCol="0" anchor="t"/>
-          <a:lstStyle/>
-          <a:p>
-            <a:pPr indent="0" marL="0">
-              <a:buNone/>
-            </a:pPr>
-            <a:r>
-              <a:rPr lang="en-US" sz="1100" dirty="0">
-                <a:solidFill>
-                  <a:srgbClr val="FFFFFF"/>
-                </a:solidFill>
-                <a:latin typeface="JetBrains Mono" pitchFamily="34" charset="0"/>
-                <a:ea typeface="JetBrains Mono" pitchFamily="34" charset="-122"/>
-                <a:cs typeface="JetBrains Mono" pitchFamily="34" charset="-120"/>
-              </a:rPr>
-              <a:t>$ kubectl logs -n bindplane-agent bindplane-node-agent-wblpl</a:t>
-            </a:r>
-            <a:endParaRPr lang="en-US" sz="1100" dirty="0"/>
-          </a:p>
-          <a:p>
-            <a:pPr indent="0" marL="0">
-              <a:buNone/>
-            </a:pPr>
-            <a:endParaRPr lang="en-US" sz="1100" dirty="0"/>
-          </a:p>
-          <a:p>
-            <a:pPr indent="0" marL="0">
-              <a:buNone/>
-            </a:pPr>
-            <a:r>
-              <a:rPr lang="en-US" sz="1100" dirty="0">
-                <a:solidFill>
-                  <a:srgbClr val="FFFFFF"/>
-                </a:solidFill>
-                <a:latin typeface="JetBrains Mono" pitchFamily="34" charset="0"/>
-                <a:ea typeface="JetBrains Mono" pitchFamily="34" charset="-122"/>
-                <a:cs typeface="JetBrains Mono" pitchFamily="34" charset="-120"/>
-              </a:rPr>
-              <a:t>"Failed applying remote config"</a:t>
-            </a:r>
-            <a:endParaRPr lang="en-US" sz="1100" dirty="0"/>
-          </a:p>
-          <a:p>
-            <a:pPr indent="0" marL="0">
-              <a:buNone/>
-            </a:pPr>
-            <a:r>
-              <a:rPr lang="en-US" sz="1100" dirty="0">
-                <a:solidFill>
-                  <a:srgbClr val="FFFFFF"/>
-                </a:solidFill>
-                <a:latin typeface="JetBrains Mono" pitchFamily="34" charset="0"/>
-                <a:ea typeface="JetBrains Mono" pitchFamily="34" charset="-122"/>
-                <a:cs typeface="JetBrains Mono" pitchFamily="34" charset="-120"/>
-              </a:rPr>
-              <a:t>"error: 'metrics' has invalid keys: k8s.pod.volume.usage"</a:t>
-            </a:r>
-            <a:endParaRPr lang="en-US" sz="1100" dirty="0"/>
-          </a:p>
-        </p:txBody>
-      </p:sp>
-      <p:sp>
-        <p:nvSpPr>
-          <p:cNvPr id="7" name="Text 5"/>
-          <p:cNvSpPr/>
-          <p:nvPr/>
-        </p:nvSpPr>
-        <p:spPr>
-          <a:xfrm>
-            <a:off x="457200" y="3246120"/>
-            <a:ext cx="8229600" cy="585216"/>
-          </a:xfrm>
-          <a:prstGeom prst="rect">
-            <a:avLst/>
-          </a:prstGeom>
-          <a:noFill/>
-          <a:ln/>
-        </p:spPr>
-        <p:txBody>
-          <a:bodyPr wrap="square" rtlCol="0" anchor="t"/>
-          <a:lstStyle/>
-          <a:p>
-            <a:pPr indent="0" marL="0">
-              <a:buNone/>
-            </a:pPr>
-            <a:r>
-              <a:rPr lang="en-US" sz="2000" dirty="0">
-                <a:solidFill>
-                  <a:srgbClr val="FFFFFF"/>
-                </a:solidFill>
-                <a:latin typeface="Inter" pitchFamily="34" charset="0"/>
-                <a:ea typeface="Inter" pitchFamily="34" charset="-122"/>
-                <a:cs typeface="Inter" pitchFamily="34" charset="-120"/>
-              </a:rPr>
-              <a:t>The BindPlane-generated config included a metric that the agent version didn't support.</a:t>
-            </a:r>
-            <a:endParaRPr lang="en-US" sz="2000" dirty="0"/>
-          </a:p>
-        </p:txBody>
-      </p:sp>
-      <p:sp>
-        <p:nvSpPr>
-          <p:cNvPr id="8" name="Text 6"/>
-          <p:cNvSpPr/>
-          <p:nvPr/>
-        </p:nvSpPr>
-        <p:spPr>
-          <a:xfrm>
-            <a:off x="457200" y="4014216"/>
-            <a:ext cx="8229600" cy="585216"/>
-          </a:xfrm>
-          <a:prstGeom prst="rect">
-            <a:avLst/>
-          </a:prstGeom>
-          <a:noFill/>
-          <a:ln/>
-        </p:spPr>
-        <p:txBody>
-          <a:bodyPr wrap="square" rtlCol="0" anchor="t"/>
-          <a:lstStyle/>
-          <a:p>
-            <a:pPr indent="0" marL="0">
-              <a:buNone/>
-            </a:pPr>
-            <a:r>
-              <a:rPr lang="en-US" sz="2000" b="1" dirty="0">
-                <a:solidFill>
-                  <a:srgbClr val="1496FF"/>
-                </a:solidFill>
-                <a:latin typeface="Inter" pitchFamily="34" charset="0"/>
-                <a:ea typeface="Inter" pitchFamily="34" charset="-122"/>
-                <a:cs typeface="Inter" pitchFamily="34" charset="-120"/>
-              </a:rPr>
-              <a:t>What worked:</a:t>
-            </a:r>
-            <a:pPr indent="0" marL="0">
-              <a:buNone/>
-            </a:pPr>
-            <a:r>
-              <a:rPr lang="en-US" sz="2000" dirty="0">
-                <a:solidFill>
-                  <a:srgbClr val="FFFFFF"/>
-                </a:solidFill>
-                <a:latin typeface="Inter" pitchFamily="34" charset="0"/>
-                <a:ea typeface="Inter" pitchFamily="34" charset="-122"/>
-                <a:cs typeface="Inter" pitchFamily="34" charset="-120"/>
-              </a:rPr>
-              <a:t> The agent rolled back automatically. No broken state.</a:t>
-            </a:r>
-            <a:endParaRPr lang="en-US" sz="2000" dirty="0"/>
-          </a:p>
-        </p:txBody>
       </p:sp>
     </p:spTree>
   </p:cSld>
@@ -23576,8 +23615,8 @@
         </p:nvSpPr>
         <p:spPr>
           <a:xfrm>
-            <a:off x="457200" y="2011680"/>
-            <a:ext cx="8229600" cy="914400"/>
+            <a:off x="457200" y="457200"/>
+            <a:ext cx="8229600" cy="640080"/>
           </a:xfrm>
           <a:prstGeom prst="rect">
             <a:avLst/>
@@ -23589,21 +23628,21 @@
           <a:bodyPr wrap="square" rtlCol="0" anchor="ctr"/>
           <a:lstStyle/>
           <a:p>
-            <a:pPr algn="ctr" indent="0" marL="0">
-              <a:buNone/>
-            </a:pPr>
-            <a:r>
-              <a:rPr lang="en-US" sz="4000" b="1" dirty="0">
-                <a:solidFill>
-                  <a:srgbClr val="FFFFFF"/>
-                </a:solidFill>
-                <a:latin typeface="Inter" pitchFamily="34" charset="0"/>
-                <a:ea typeface="Inter" pitchFamily="34" charset="-122"/>
-                <a:cs typeface="Inter" pitchFamily="34" charset="-120"/>
-              </a:rPr>
-              <a:t>Takeaways</a:t>
-            </a:r>
-            <a:endParaRPr lang="en-US" sz="4000" dirty="0"/>
+            <a:pPr indent="0" marL="0">
+              <a:buNone/>
+            </a:pPr>
+            <a:r>
+              <a:rPr lang="en-US" sz="3600" b="1" dirty="0">
+                <a:solidFill>
+                  <a:srgbClr val="FFFFFF"/>
+                </a:solidFill>
+                <a:latin typeface="Inter" pitchFamily="34" charset="0"/>
+                <a:ea typeface="Inter" pitchFamily="34" charset="-122"/>
+                <a:cs typeface="Inter" pitchFamily="34" charset="-120"/>
+              </a:rPr>
+              <a:t>The Core Loop</a:t>
+            </a:r>
+            <a:endParaRPr lang="en-US" sz="3600" dirty="0"/>
           </a:p>
         </p:txBody>
       </p:sp>
@@ -23615,8 +23654,8 @@
         </p:nvSpPr>
         <p:spPr>
           <a:xfrm>
-            <a:off x="1828800" y="3017520"/>
-            <a:ext cx="5486400" cy="54864"/>
+            <a:off x="457200" y="1188720"/>
+            <a:ext cx="4114800" cy="54864"/>
           </a:xfrm>
           <a:prstGeom prst="rect">
             <a:avLst/>
@@ -23624,8 +23663,204 @@
           <a:solidFill>
             <a:srgbClr val="1496FF"/>
           </a:solidFill>
+          <a:ln w="12700">
+            <a:solidFill>
+              <a:srgbClr val="1496FF"/>
+            </a:solidFill>
+            <a:prstDash val="solid"/>
+          </a:ln>
+        </p:spPr>
+      </p:sp>
+      <p:sp>
+        <p:nvSpPr>
+          <p:cNvPr id="4" name="Shape 2"/>
+          <p:cNvSpPr/>
+          <p:nvPr/>
+        </p:nvSpPr>
+        <p:spPr>
+          <a:xfrm>
+            <a:off x="4572000" y="1188720"/>
+            <a:ext cx="4114800" cy="54864"/>
+          </a:xfrm>
+          <a:prstGeom prst="rect">
+            <a:avLst/>
+          </a:prstGeom>
+          <a:solidFill>
+            <a:srgbClr val="6366F1"/>
+          </a:solidFill>
+          <a:ln w="12700">
+            <a:solidFill>
+              <a:srgbClr val="6366F1"/>
+            </a:solidFill>
+            <a:prstDash val="solid"/>
+          </a:ln>
+        </p:spPr>
+      </p:sp>
+      <p:sp>
+        <p:nvSpPr>
+          <p:cNvPr id="5" name="Text 3"/>
+          <p:cNvSpPr/>
+          <p:nvPr/>
+        </p:nvSpPr>
+        <p:spPr>
+          <a:xfrm>
+            <a:off x="457200" y="1463040"/>
+            <a:ext cx="8229600" cy="2057400"/>
+          </a:xfrm>
+          <a:prstGeom prst="rect">
+            <a:avLst/>
+          </a:prstGeom>
+          <a:noFill/>
           <a:ln/>
         </p:spPr>
+        <p:txBody>
+          <a:bodyPr wrap="square" rtlCol="0" anchor="t"/>
+          <a:lstStyle/>
+          <a:p>
+            <a:pPr marL="342900" indent="-342900">
+              <a:lnSpc>
+                <a:spcPct val="120000"/>
+              </a:lnSpc>
+              <a:buSzPct val="100000"/>
+              <a:buChar char="•"/>
+            </a:pPr>
+            <a:r>
+              <a:rPr lang="en-US" sz="2200" dirty="0">
+                <a:solidFill>
+                  <a:srgbClr val="FFFFFF"/>
+                </a:solidFill>
+                <a:latin typeface="Inter" pitchFamily="34" charset="0"/>
+                <a:ea typeface="Inter" pitchFamily="34" charset="-122"/>
+                <a:cs typeface="Inter" pitchFamily="34" charset="-120"/>
+              </a:rPr>
+              <a:t>Define sources and destinations as YAML</a:t>
+            </a:r>
+            <a:endParaRPr lang="en-US" sz="2200" dirty="0"/>
+          </a:p>
+          <a:p>
+            <a:pPr marL="342900" indent="-342900">
+              <a:lnSpc>
+                <a:spcPct val="120000"/>
+              </a:lnSpc>
+              <a:buSzPct val="100000"/>
+              <a:buChar char="•"/>
+            </a:pPr>
+            <a:r>
+              <a:rPr lang="en-US" sz="2200" dirty="0">
+                <a:solidFill>
+                  <a:srgbClr val="FFFFFF"/>
+                </a:solidFill>
+                <a:latin typeface="Inter" pitchFamily="34" charset="0"/>
+                <a:ea typeface="Inter" pitchFamily="34" charset="-122"/>
+                <a:cs typeface="Inter" pitchFamily="34" charset="-120"/>
+              </a:rPr>
+              <a:t>Wire them into configurations</a:t>
+            </a:r>
+            <a:endParaRPr lang="en-US" sz="2200" dirty="0"/>
+          </a:p>
+          <a:p>
+            <a:pPr marL="342900" indent="-342900">
+              <a:lnSpc>
+                <a:spcPct val="120000"/>
+              </a:lnSpc>
+              <a:buSzPct val="100000"/>
+              <a:buChar char="•"/>
+            </a:pPr>
+            <a:r>
+              <a:rPr lang="en-US" sz="2200" dirty="0">
+                <a:solidFill>
+                  <a:srgbClr val="FFFFFF"/>
+                </a:solidFill>
+                <a:latin typeface="Inter" pitchFamily="34" charset="0"/>
+                <a:ea typeface="Inter" pitchFamily="34" charset="-122"/>
+                <a:cs typeface="Inter" pitchFamily="34" charset="-120"/>
+              </a:rPr>
+              <a:t>Group agents into fleets</a:t>
+            </a:r>
+            <a:endParaRPr lang="en-US" sz="2200" dirty="0"/>
+          </a:p>
+          <a:p>
+            <a:pPr marL="342900" indent="-342900">
+              <a:lnSpc>
+                <a:spcPct val="120000"/>
+              </a:lnSpc>
+              <a:buSzPct val="100000"/>
+              <a:buChar char="•"/>
+            </a:pPr>
+            <a:r>
+              <a:rPr lang="en-US" sz="2200" dirty="0">
+                <a:solidFill>
+                  <a:srgbClr val="FFFFFF"/>
+                </a:solidFill>
+                <a:latin typeface="Inter" pitchFamily="34" charset="0"/>
+                <a:ea typeface="Inter" pitchFamily="34" charset="-122"/>
+                <a:cs typeface="Inter" pitchFamily="34" charset="-120"/>
+              </a:rPr>
+              <a:t>Apply resources, deploy agents, rollout configs</a:t>
+            </a:r>
+            <a:endParaRPr lang="en-US" sz="2200" dirty="0"/>
+          </a:p>
+          <a:p>
+            <a:pPr marL="342900" indent="-342900">
+              <a:lnSpc>
+                <a:spcPct val="120000"/>
+              </a:lnSpc>
+              <a:buSzPct val="100000"/>
+              <a:buChar char="•"/>
+            </a:pPr>
+            <a:r>
+              <a:rPr lang="en-US" sz="2200" dirty="0">
+                <a:solidFill>
+                  <a:srgbClr val="FFFFFF"/>
+                </a:solidFill>
+                <a:latin typeface="Inter" pitchFamily="34" charset="0"/>
+                <a:ea typeface="Inter" pitchFamily="34" charset="-122"/>
+                <a:cs typeface="Inter" pitchFamily="34" charset="-120"/>
+              </a:rPr>
+              <a:t>BindPlane delivers configs via OpAMP</a:t>
+            </a:r>
+            <a:endParaRPr lang="en-US" sz="2200" dirty="0"/>
+          </a:p>
+        </p:txBody>
+      </p:sp>
+      <p:sp>
+        <p:nvSpPr>
+          <p:cNvPr id="6" name="Text 4"/>
+          <p:cNvSpPr/>
+          <p:nvPr/>
+        </p:nvSpPr>
+        <p:spPr>
+          <a:xfrm>
+            <a:off x="457200" y="3657600"/>
+            <a:ext cx="8229600" cy="585216"/>
+          </a:xfrm>
+          <a:prstGeom prst="rect">
+            <a:avLst/>
+          </a:prstGeom>
+          <a:noFill/>
+          <a:ln/>
+        </p:spPr>
+        <p:txBody>
+          <a:bodyPr wrap="square" rtlCol="0" anchor="t"/>
+          <a:lstStyle/>
+          <a:p>
+            <a:pPr indent="0" marL="0">
+              <a:buNone/>
+            </a:pPr>
+            <a:r>
+              <a:rPr lang="en-US" sz="2000" dirty="0">
+                <a:solidFill>
+                  <a:srgbClr val="FFFFFF"/>
+                </a:solidFill>
+                <a:latin typeface="Inter" pitchFamily="34" charset="0"/>
+                <a:ea typeface="Inter" pitchFamily="34" charset="-122"/>
+                <a:cs typeface="Inter" pitchFamily="34" charset="-120"/>
+              </a:rPr>
+              <a:t>Everything is a file in a repo. CI/CD follows naturally.</a:t>
+            </a:r>
+            <a:endParaRPr lang="en-US" sz="2000" dirty="0"/>
+          </a:p>
+        </p:txBody>
       </p:sp>
     </p:spTree>
   </p:cSld>
@@ -23685,7 +23920,7 @@
                 <a:ea typeface="Inter" pitchFamily="34" charset="-122"/>
                 <a:cs typeface="Inter" pitchFamily="34" charset="-120"/>
               </a:rPr>
-              <a:t>The Core Loop</a:t>
+              <a:t>What Makes It Practical</a:t>
             </a:r>
             <a:endParaRPr lang="en-US" sz="3600" dirty="0"/>
           </a:p>
@@ -23741,289 +23976,9 @@
           </a:ln>
         </p:spPr>
       </p:sp>
-      <p:sp>
-        <p:nvSpPr>
-          <p:cNvPr id="5" name="Text 3"/>
-          <p:cNvSpPr/>
-          <p:nvPr/>
-        </p:nvSpPr>
-        <p:spPr>
-          <a:xfrm>
-            <a:off x="457200" y="1463040"/>
-            <a:ext cx="8229600" cy="2057400"/>
-          </a:xfrm>
-          <a:prstGeom prst="rect">
-            <a:avLst/>
-          </a:prstGeom>
-          <a:noFill/>
-          <a:ln/>
-        </p:spPr>
-        <p:txBody>
-          <a:bodyPr wrap="square" rtlCol="0" anchor="t"/>
-          <a:lstStyle/>
-          <a:p>
-            <a:pPr marL="342900" indent="-342900">
-              <a:lnSpc>
-                <a:spcPct val="120000"/>
-              </a:lnSpc>
-              <a:buSzPct val="100000"/>
-              <a:buChar char="•"/>
-            </a:pPr>
-            <a:r>
-              <a:rPr lang="en-US" sz="2200" dirty="0">
-                <a:solidFill>
-                  <a:srgbClr val="FFFFFF"/>
-                </a:solidFill>
-                <a:latin typeface="Inter" pitchFamily="34" charset="0"/>
-                <a:ea typeface="Inter" pitchFamily="34" charset="-122"/>
-                <a:cs typeface="Inter" pitchFamily="34" charset="-120"/>
-              </a:rPr>
-              <a:t>Define sources and destinations as YAML</a:t>
-            </a:r>
-            <a:endParaRPr lang="en-US" sz="2200" dirty="0"/>
-          </a:p>
-          <a:p>
-            <a:pPr marL="342900" indent="-342900">
-              <a:lnSpc>
-                <a:spcPct val="120000"/>
-              </a:lnSpc>
-              <a:buSzPct val="100000"/>
-              <a:buChar char="•"/>
-            </a:pPr>
-            <a:r>
-              <a:rPr lang="en-US" sz="2200" dirty="0">
-                <a:solidFill>
-                  <a:srgbClr val="FFFFFF"/>
-                </a:solidFill>
-                <a:latin typeface="Inter" pitchFamily="34" charset="0"/>
-                <a:ea typeface="Inter" pitchFamily="34" charset="-122"/>
-                <a:cs typeface="Inter" pitchFamily="34" charset="-120"/>
-              </a:rPr>
-              <a:t>Wire them into configurations</a:t>
-            </a:r>
-            <a:endParaRPr lang="en-US" sz="2200" dirty="0"/>
-          </a:p>
-          <a:p>
-            <a:pPr marL="342900" indent="-342900">
-              <a:lnSpc>
-                <a:spcPct val="120000"/>
-              </a:lnSpc>
-              <a:buSzPct val="100000"/>
-              <a:buChar char="•"/>
-            </a:pPr>
-            <a:r>
-              <a:rPr lang="en-US" sz="2200" dirty="0">
-                <a:solidFill>
-                  <a:srgbClr val="FFFFFF"/>
-                </a:solidFill>
-                <a:latin typeface="Inter" pitchFamily="34" charset="0"/>
-                <a:ea typeface="Inter" pitchFamily="34" charset="-122"/>
-                <a:cs typeface="Inter" pitchFamily="34" charset="-120"/>
-              </a:rPr>
-              <a:t>Group agents into fleets</a:t>
-            </a:r>
-            <a:endParaRPr lang="en-US" sz="2200" dirty="0"/>
-          </a:p>
-          <a:p>
-            <a:pPr marL="342900" indent="-342900">
-              <a:lnSpc>
-                <a:spcPct val="120000"/>
-              </a:lnSpc>
-              <a:buSzPct val="100000"/>
-              <a:buChar char="•"/>
-            </a:pPr>
-            <a:r>
-              <a:rPr lang="en-US" sz="2200" dirty="0">
-                <a:solidFill>
-                  <a:srgbClr val="FFFFFF"/>
-                </a:solidFill>
-                <a:latin typeface="Inter" pitchFamily="34" charset="0"/>
-                <a:ea typeface="Inter" pitchFamily="34" charset="-122"/>
-                <a:cs typeface="Inter" pitchFamily="34" charset="-120"/>
-              </a:rPr>
-              <a:t>Apply resources, deploy agents, rollout configs</a:t>
-            </a:r>
-            <a:endParaRPr lang="en-US" sz="2200" dirty="0"/>
-          </a:p>
-          <a:p>
-            <a:pPr marL="342900" indent="-342900">
-              <a:lnSpc>
-                <a:spcPct val="120000"/>
-              </a:lnSpc>
-              <a:buSzPct val="100000"/>
-              <a:buChar char="•"/>
-            </a:pPr>
-            <a:r>
-              <a:rPr lang="en-US" sz="2200" dirty="0">
-                <a:solidFill>
-                  <a:srgbClr val="FFFFFF"/>
-                </a:solidFill>
-                <a:latin typeface="Inter" pitchFamily="34" charset="0"/>
-                <a:ea typeface="Inter" pitchFamily="34" charset="-122"/>
-                <a:cs typeface="Inter" pitchFamily="34" charset="-120"/>
-              </a:rPr>
-              <a:t>BindPlane delivers configs via OpAMP</a:t>
-            </a:r>
-            <a:endParaRPr lang="en-US" sz="2200" dirty="0"/>
-          </a:p>
-        </p:txBody>
-      </p:sp>
-      <p:sp>
-        <p:nvSpPr>
-          <p:cNvPr id="6" name="Text 4"/>
-          <p:cNvSpPr/>
-          <p:nvPr/>
-        </p:nvSpPr>
-        <p:spPr>
-          <a:xfrm>
-            <a:off x="457200" y="3657600"/>
-            <a:ext cx="8229600" cy="585216"/>
-          </a:xfrm>
-          <a:prstGeom prst="rect">
-            <a:avLst/>
-          </a:prstGeom>
-          <a:noFill/>
-          <a:ln/>
-        </p:spPr>
-        <p:txBody>
-          <a:bodyPr wrap="square" rtlCol="0" anchor="t"/>
-          <a:lstStyle/>
-          <a:p>
-            <a:pPr indent="0" marL="0">
-              <a:buNone/>
-            </a:pPr>
-            <a:r>
-              <a:rPr lang="en-US" sz="2000" dirty="0">
-                <a:solidFill>
-                  <a:srgbClr val="FFFFFF"/>
-                </a:solidFill>
-                <a:latin typeface="Inter" pitchFamily="34" charset="0"/>
-                <a:ea typeface="Inter" pitchFamily="34" charset="-122"/>
-                <a:cs typeface="Inter" pitchFamily="34" charset="-120"/>
-              </a:rPr>
-              <a:t>Everything is a file in a repo. CI/CD follows naturally.</a:t>
-            </a:r>
-            <a:endParaRPr lang="en-US" sz="2000" dirty="0"/>
-          </a:p>
-        </p:txBody>
-      </p:sp>
-    </p:spTree>
-  </p:cSld>
-  <p:clrMapOvr>
-    <a:masterClrMapping/>
-  </p:clrMapOvr>
-</p:sld>
-</file>
-
-<file path=ppt/slides/slide56.xml><?xml version="1.0" encoding="utf-8"?>
-<p:sld xmlns:a="http://schemas.openxmlformats.org/drawingml/2006/main" xmlns:r="http://schemas.openxmlformats.org/officeDocument/2006/relationships" xmlns:p="http://schemas.openxmlformats.org/presentationml/2006/main">
-  <p:cSld name="Slide 56">
-    <p:spTree>
-      <p:nvGrpSpPr>
-        <p:cNvPr id="1" name=""/>
-        <p:cNvGrpSpPr/>
-        <p:nvPr/>
-      </p:nvGrpSpPr>
-      <p:grpSpPr>
-        <a:xfrm>
-          <a:off x="0" y="0"/>
-          <a:ext cx="0" cy="0"/>
-          <a:chOff x="0" y="0"/>
-          <a:chExt cx="0" cy="0"/>
-        </a:xfrm>
-      </p:grpSpPr>
-      <p:sp>
-        <p:nvSpPr>
-          <p:cNvPr id="2" name="Text 0"/>
-          <p:cNvSpPr/>
-          <p:nvPr/>
-        </p:nvSpPr>
-        <p:spPr>
-          <a:xfrm>
-            <a:off x="457200" y="457200"/>
-            <a:ext cx="8229600" cy="640080"/>
-          </a:xfrm>
-          <a:prstGeom prst="rect">
-            <a:avLst/>
-          </a:prstGeom>
-          <a:noFill/>
-          <a:ln/>
-        </p:spPr>
-        <p:txBody>
-          <a:bodyPr wrap="square" rtlCol="0" anchor="ctr"/>
-          <a:lstStyle/>
-          <a:p>
-            <a:pPr indent="0" marL="0">
-              <a:buNone/>
-            </a:pPr>
-            <a:r>
-              <a:rPr lang="en-US" sz="3600" b="1" dirty="0">
-                <a:solidFill>
-                  <a:srgbClr val="FFFFFF"/>
-                </a:solidFill>
-                <a:latin typeface="Inter" pitchFamily="34" charset="0"/>
-                <a:ea typeface="Inter" pitchFamily="34" charset="-122"/>
-                <a:cs typeface="Inter" pitchFamily="34" charset="-120"/>
-              </a:rPr>
-              <a:t>What Makes It Practical</a:t>
-            </a:r>
-            <a:endParaRPr lang="en-US" sz="3600" dirty="0"/>
-          </a:p>
-        </p:txBody>
-      </p:sp>
-      <p:sp>
-        <p:nvSpPr>
-          <p:cNvPr id="3" name="Shape 1"/>
-          <p:cNvSpPr/>
-          <p:nvPr/>
-        </p:nvSpPr>
-        <p:spPr>
-          <a:xfrm>
-            <a:off x="457200" y="1188720"/>
-            <a:ext cx="4114800" cy="54864"/>
-          </a:xfrm>
-          <a:prstGeom prst="rect">
-            <a:avLst/>
-          </a:prstGeom>
-          <a:solidFill>
-            <a:srgbClr val="1496FF"/>
-          </a:solidFill>
-          <a:ln w="12700">
-            <a:solidFill>
-              <a:srgbClr val="1496FF"/>
-            </a:solidFill>
-            <a:prstDash val="solid"/>
-          </a:ln>
-        </p:spPr>
-      </p:sp>
-      <p:sp>
-        <p:nvSpPr>
-          <p:cNvPr id="4" name="Shape 2"/>
-          <p:cNvSpPr/>
-          <p:nvPr/>
-        </p:nvSpPr>
-        <p:spPr>
-          <a:xfrm>
-            <a:off x="4572000" y="1188720"/>
-            <a:ext cx="4114800" cy="54864"/>
-          </a:xfrm>
-          <a:prstGeom prst="rect">
-            <a:avLst/>
-          </a:prstGeom>
-          <a:solidFill>
-            <a:srgbClr val="6366F1"/>
-          </a:solidFill>
-          <a:ln w="12700">
-            <a:solidFill>
-              <a:srgbClr val="6366F1"/>
-            </a:solidFill>
-            <a:prstDash val="solid"/>
-          </a:ln>
-        </p:spPr>
-      </p:sp>
       <p:graphicFrame>
         <p:nvGraphicFramePr>
-          <p:cNvPr id="57" name="Table 0"/>
+          <p:cNvPr id="56" name="Table 0"/>
           <p:cNvGraphicFramePr>
             <a:graphicFrameLocks noGrp="1"/>
           </p:cNvGraphicFramePr>
@@ -24887,9 +24842,9 @@
 </p:sld>
 </file>
 
-<file path=ppt/slides/slide57.xml><?xml version="1.0" encoding="utf-8"?>
+<file path=ppt/slides/slide56.xml><?xml version="1.0" encoding="utf-8"?>
 <p:sld xmlns:a="http://schemas.openxmlformats.org/drawingml/2006/main" xmlns:r="http://schemas.openxmlformats.org/officeDocument/2006/relationships" xmlns:p="http://schemas.openxmlformats.org/presentationml/2006/main">
-  <p:cSld name="Slide 57">
+  <p:cSld name="Slide 56">
     <p:spTree>
       <p:nvGrpSpPr>
         <p:cNvPr id="1" name=""/>
@@ -24971,9 +24926,9 @@
 </p:sld>
 </file>
 
-<file path=ppt/slides/slide58.xml><?xml version="1.0" encoding="utf-8"?>
+<file path=ppt/slides/slide57.xml><?xml version="1.0" encoding="utf-8"?>
 <p:sld xmlns:a="http://schemas.openxmlformats.org/drawingml/2006/main" xmlns:r="http://schemas.openxmlformats.org/officeDocument/2006/relationships" xmlns:p="http://schemas.openxmlformats.org/presentationml/2006/main">
-  <p:cSld name="Slide 58">
+  <p:cSld name="Slide 57">
     <p:spTree>
       <p:nvGrpSpPr>
         <p:cNvPr id="1" name=""/>
